--- a/2026-Q4/10-ApostolicAppointment/Week10-ApostolicAppointment.pptx
+++ b/2026-Q4/10-ApostolicAppointment/Week10-ApostolicAppointment.pptx
@@ -4,6 +4,9 @@
   <p:sldMasterIdLst>
     <p:sldMasterId id="2147483648" r:id="rId1"/>
   </p:sldMasterIdLst>
+  <p:notesMasterIdLst>
+    <p:notesMasterId r:id="rId9"/>
+  </p:notesMasterIdLst>
   <p:sldIdLst>
     <p:sldId id="256" r:id="rId2"/>
     <p:sldId id="257" r:id="rId3"/>
@@ -13,10 +16,7 @@
     <p:sldId id="261" r:id="rId7"/>
     <p:sldId id="262" r:id="rId8"/>
   </p:sldIdLst>
-  <p:notesMasterIdLst>
-    <p:notesMasterId r:id="rId9"/>
-  </p:notesMasterIdLst>
-  <p:sldSz cx="9144000" cy="6858000"/>
+  <p:sldSz cx="9144000" cy="6858000" type="screen4x3"/>
   <p:notesSz cx="6858000" cy="9144000"/>
   <p:defaultTextStyle>
     <a:lvl1pPr marL="0" algn="l" defTabSz="914400" rtl="0" eaLnBrk="1" latinLnBrk="0" hangingPunct="1">
@@ -110,6 +110,11 @@
       </a:defRPr>
     </a:lvl9pPr>
   </p:defaultTextStyle>
+  <p:extLst>
+    <p:ext uri="{EFAFB233-063F-42B5-8137-9DF3F51BA10A}">
+      <p15:sldGuideLst xmlns:p15="http://schemas.microsoft.com/office/powerpoint/2012/main"/>
+    </p:ext>
+  </p:extLst>
 </p:presentation>
 </file>
 
@@ -135,234 +140,10 @@
           <a:chExt cx="0" cy="0"/>
         </a:xfrm>
       </p:grpSpPr>
-      <p:sp>
-        <p:nvSpPr>
-          <p:cNvPr id="2" name="Header Placeholder 1"/>
-          <p:cNvSpPr>
-            <a:spLocks noGrp="1"/>
-          </p:cNvSpPr>
-          <p:nvPr>
-            <p:ph type="hdr" sz="quarter"/>
-          </p:nvPr>
-        </p:nvSpPr>
-        <p:spPr>
-          <a:xfrm>
-            <a:off x="0" y="0"/>
-            <a:ext cx="2971800" cy="458788"/>
-          </a:xfrm>
-          <a:prstGeom prst="rect">
-            <a:avLst/>
-          </a:prstGeom>
-        </p:spPr>
-        <p:txBody>
-          <a:bodyPr vert="horz" lIns="91440" tIns="45720" rIns="91440" bIns="45720" rtlCol="0"/>
-          <a:lstStyle>
-            <a:lvl1pPr algn="l">
-              <a:defRPr sz="1200"/>
-            </a:lvl1pPr>
-          </a:lstStyle>
-          <a:p>
-            <a:endParaRPr lang="en-US"/>
-          </a:p>
-        </p:txBody>
-      </p:sp>
-      <p:sp>
-        <p:nvSpPr>
-          <p:cNvPr id="3" name="Date Placeholder 2"/>
-          <p:cNvSpPr>
-            <a:spLocks noGrp="1"/>
-          </p:cNvSpPr>
-          <p:nvPr>
-            <p:ph type="dt" idx="1"/>
-          </p:nvPr>
-        </p:nvSpPr>
-        <p:spPr>
-          <a:xfrm>
-            <a:off x="3884613" y="0"/>
-            <a:ext cx="2971800" cy="458788"/>
-          </a:xfrm>
-          <a:prstGeom prst="rect">
-            <a:avLst/>
-          </a:prstGeom>
-        </p:spPr>
-        <p:txBody>
-          <a:bodyPr vert="horz" lIns="91440" tIns="45720" rIns="91440" bIns="45720" rtlCol="0"/>
-          <a:lstStyle>
-            <a:lvl1pPr algn="r">
-              <a:defRPr sz="1200"/>
-            </a:lvl1pPr>
-          </a:lstStyle>
-          <a:p>
-            <a:fld id="{5282F153-3F37-0F45-9E97-73ACFA13230C}" type="datetimeFigureOut">
-              <a:rPr lang="en-US"/>
-              <a:t>7/23/19</a:t>
-            </a:fld>
-            <a:endParaRPr lang="en-US"/>
-          </a:p>
-        </p:txBody>
-      </p:sp>
-      <p:sp>
-        <p:nvSpPr>
-          <p:cNvPr id="4" name="Slide Image Placeholder 3"/>
-          <p:cNvSpPr>
-            <a:spLocks noGrp="1" noRot="1" noChangeAspect="1"/>
-          </p:cNvSpPr>
-          <p:nvPr>
-            <p:ph type="sldImg" idx="2"/>
-          </p:nvPr>
-        </p:nvSpPr>
-        <p:spPr>
-          <a:xfrm>
-            <a:off x="685800" y="1143000"/>
-            <a:ext cx="5486400" cy="3086100"/>
-          </a:xfrm>
-          <a:prstGeom prst="rect">
-            <a:avLst/>
-          </a:prstGeom>
-          <a:noFill/>
-          <a:ln w="12700">
-            <a:solidFill>
-              <a:prstClr val="black"/>
-            </a:solidFill>
-          </a:ln>
-        </p:spPr>
-        <p:txBody>
-          <a:bodyPr vert="horz" lIns="91440" tIns="45720" rIns="91440" bIns="45720" rtlCol="0" anchor="ctr"/>
-          <a:lstStyle/>
-          <a:p>
-            <a:endParaRPr lang="en-US"/>
-          </a:p>
-        </p:txBody>
-      </p:sp>
-      <p:sp>
-        <p:nvSpPr>
-          <p:cNvPr id="5" name="Notes Placeholder 4"/>
-          <p:cNvSpPr>
-            <a:spLocks noGrp="1"/>
-          </p:cNvSpPr>
-          <p:nvPr>
-            <p:ph type="body" sz="quarter" idx="3"/>
-          </p:nvPr>
-        </p:nvSpPr>
-        <p:spPr>
-          <a:xfrm>
-            <a:off x="685800" y="4400550"/>
-            <a:ext cx="5486400" cy="3600450"/>
-          </a:xfrm>
-          <a:prstGeom prst="rect">
-            <a:avLst/>
-          </a:prstGeom>
-        </p:spPr>
-        <p:txBody>
-          <a:bodyPr vert="horz" lIns="91440" tIns="45720" rIns="91440" bIns="45720" rtlCol="0"/>
-          <a:lstStyle/>
-          <a:p>
-            <a:pPr lvl="0"/>
-            <a:r>
-              <a:rPr lang="en-US"/>
-              <a:t>Click to edit Master text styles</a:t>
-            </a:r>
-          </a:p>
-          <a:p>
-            <a:pPr lvl="1"/>
-            <a:r>
-              <a:rPr lang="en-US"/>
-              <a:t>Second level</a:t>
-            </a:r>
-          </a:p>
-          <a:p>
-            <a:pPr lvl="2"/>
-            <a:r>
-              <a:rPr lang="en-US"/>
-              <a:t>Third level</a:t>
-            </a:r>
-          </a:p>
-          <a:p>
-            <a:pPr lvl="3"/>
-            <a:r>
-              <a:rPr lang="en-US"/>
-              <a:t>Fourth level</a:t>
-            </a:r>
-          </a:p>
-          <a:p>
-            <a:pPr lvl="4"/>
-            <a:r>
-              <a:rPr lang="en-US"/>
-              <a:t>Fifth level</a:t>
-            </a:r>
-          </a:p>
-        </p:txBody>
-      </p:sp>
-      <p:sp>
-        <p:nvSpPr>
-          <p:cNvPr id="6" name="Footer Placeholder 5"/>
-          <p:cNvSpPr>
-            <a:spLocks noGrp="1"/>
-          </p:cNvSpPr>
-          <p:nvPr>
-            <p:ph type="ftr" sz="quarter" idx="4"/>
-          </p:nvPr>
-        </p:nvSpPr>
-        <p:spPr>
-          <a:xfrm>
-            <a:off x="0" y="8685213"/>
-            <a:ext cx="2971800" cy="458787"/>
-          </a:xfrm>
-          <a:prstGeom prst="rect">
-            <a:avLst/>
-          </a:prstGeom>
-        </p:spPr>
-        <p:txBody>
-          <a:bodyPr vert="horz" lIns="91440" tIns="45720" rIns="91440" bIns="45720" rtlCol="0" anchor="b"/>
-          <a:lstStyle>
-            <a:lvl1pPr algn="l">
-              <a:defRPr sz="1200"/>
-            </a:lvl1pPr>
-          </a:lstStyle>
-          <a:p>
-            <a:endParaRPr lang="en-US"/>
-          </a:p>
-        </p:txBody>
-      </p:sp>
-      <p:sp>
-        <p:nvSpPr>
-          <p:cNvPr id="7" name="Slide Number Placeholder 6"/>
-          <p:cNvSpPr>
-            <a:spLocks noGrp="1"/>
-          </p:cNvSpPr>
-          <p:nvPr>
-            <p:ph type="sldNum" sz="quarter" idx="5"/>
-          </p:nvPr>
-        </p:nvSpPr>
-        <p:spPr>
-          <a:xfrm>
-            <a:off x="3884613" y="8685213"/>
-            <a:ext cx="2971800" cy="458787"/>
-          </a:xfrm>
-          <a:prstGeom prst="rect">
-            <a:avLst/>
-          </a:prstGeom>
-        </p:spPr>
-        <p:txBody>
-          <a:bodyPr vert="horz" lIns="91440" tIns="45720" rIns="91440" bIns="45720" rtlCol="0" anchor="b"/>
-          <a:lstStyle>
-            <a:lvl1pPr algn="r">
-              <a:defRPr sz="1200"/>
-            </a:lvl1pPr>
-          </a:lstStyle>
-          <a:p>
-            <a:fld id="{CE5E9CC1-C706-0F49-92D6-E571CC5EEA8F}" type="slidenum">
-              <a:rPr lang="en-US"/>
-              <a:t>‹#›</a:t>
-            </a:fld>
-            <a:endParaRPr lang="en-US"/>
-          </a:p>
-        </p:txBody>
-      </p:sp>
     </p:spTree>
     <p:extLst>
       <p:ext uri="{BB962C8B-B14F-4D97-AF65-F5344CB8AC3E}">
-        <p14:creationId xmlns:p14="http://schemas.microsoft.com/office/powerpoint/2010/main" val="1024086991"/>
+        <p14:creationId xmlns:p14="http://schemas.microsoft.com/office/powerpoint/2010/main" val="1487804980"/>
       </p:ext>
     </p:extLst>
   </p:cSld>
@@ -508,9 +289,32 @@
           <a:p>
             <a:r>
               <a:rPr lang="en-US" dirty="0"/>
-              <a:t>[0:00] TONE-SET — crucial for the next two weeks. Say it plainly: “We now enter genuinely contested ground. Faithful Christians who love the same Bible disagree here. We will do exactly what this course has trained: eager AND examining. Test me against the text. Today is not even about roles yet — it is one prior question: where does teaching authority COME FROM? Answer that, and next week’s harder question gets much clearer.” Recall Week 5’s permission to test the teacher — invoke it now.</a:t>
-            </a:r>
-            <a:endParaRPr lang="en-US" dirty="0"/>
+              <a:t>[0:00] TONE-SET </a:t>
+            </a:r>
+            <a:r>
+              <a:rPr lang="en-US"/>
+              <a:t>→ </a:t>
+            </a:r>
+            <a:r>
+              <a:rPr lang="en-US" dirty="0"/>
+              <a:t>crucial for the next two weeks. Say it plainly: “We now enter genuinely contested ground. Faithful Christians who love the same Bible disagree here. We will do exactly what this course has trained: eager AND examining. Test me against the text. Today is not even about roles yet </a:t>
+            </a:r>
+            <a:r>
+              <a:rPr lang="en-US"/>
+              <a:t>→ </a:t>
+            </a:r>
+            <a:r>
+              <a:rPr lang="en-US" dirty="0"/>
+              <a:t>it is one prior question: where does teaching authority COME FROM? Answer that, and next week’s harder question gets much clearer.” Recall Week 5’s permission to test the teacher </a:t>
+            </a:r>
+            <a:r>
+              <a:rPr lang="en-US"/>
+              <a:t>→</a:t>
+            </a:r>
+            <a:r>
+              <a:rPr lang="en-US" dirty="0"/>
+              <a:t> invoke it now.</a:t>
+            </a:r>
           </a:p>
         </p:txBody>
       </p:sp>
@@ -597,12 +401,51 @@
             <a:r>
               <a:rPr lang="en-US" dirty="0"/>
               <a:t>[0:00–10:00]
-[CLICK] The prior question — conferred vs generated. This is the whole lecture in one distinction. Make sure it lands before the table.
-[CLICK] The table (appears whole). Walk it: each movement relocates authority to something INSIDE the person or the moment — revelation, light, fruit, trajectory. The RIGHT column shows they’re all the same move despite different centuries and vocabularies. Be FAIR: name that some were sincere believers; we’re analyzing the structure, not smearing people.
-[CLICK] The pattern named — one move, four costumes. Authority pulled from conferral to self-generation.
-[CLICK] The Week-3 callback — sincerity was never the test; LOCATION is. Where does Scripture say authority comes from? That’s the only question. Transition: “Paul answers it — in the very passage people cite for spiritual gifts.”</a:t>
-            </a:r>
-            <a:endParaRPr lang="en-US" dirty="0"/>
+[CLICK] The prior question </a:t>
+            </a:r>
+            <a:r>
+              <a:rPr lang="en-US"/>
+              <a:t>→ </a:t>
+            </a:r>
+            <a:r>
+              <a:rPr lang="en-US" dirty="0"/>
+              <a:t>conferred vs generated. This is the whole lecture in one distinction. Make sure it lands before the table.
+[CLICK] The table (appears whole). Walk it: each movement relocates authority to something INSIDE the person or the moment </a:t>
+            </a:r>
+            <a:r>
+              <a:rPr lang="en-US"/>
+              <a:t>→ </a:t>
+            </a:r>
+            <a:r>
+              <a:rPr lang="en-US" dirty="0"/>
+              <a:t>revelation, light, fruit, trajectory. The RIGHT column shows they’re all the same move despite different centuries and vocabularies. Be FAIR: name that some were sincere believers; we’re analyzing the structure, not smearing people.
+[CLICK] The pattern named </a:t>
+            </a:r>
+            <a:r>
+              <a:rPr lang="en-US"/>
+              <a:t>→ </a:t>
+            </a:r>
+            <a:r>
+              <a:rPr lang="en-US" dirty="0"/>
+              <a:t>one move, four costumes. Authority pulled from conferral to self-generation.
+[CLICK] The Week-3 callback </a:t>
+            </a:r>
+            <a:r>
+              <a:rPr lang="en-US"/>
+              <a:t>→ </a:t>
+            </a:r>
+            <a:r>
+              <a:rPr lang="en-US" dirty="0"/>
+              <a:t>sincerity was never the test; LOCATION is. Where does Scripture say authority comes from? That’s the only question. Transition: “Paul answers it </a:t>
+            </a:r>
+            <a:r>
+              <a:rPr lang="en-US"/>
+              <a:t>→</a:t>
+            </a:r>
+            <a:r>
+              <a:rPr lang="en-US" dirty="0"/>
+              <a:t> in the very passage people cite for spiritual gifts.”</a:t>
+            </a:r>
           </a:p>
         </p:txBody>
       </p:sp>
@@ -689,12 +532,27 @@
             <a:r>
               <a:rPr lang="en-US" dirty="0"/>
               <a:t>[10:00–22:00]
-[CLICK] Set the context — this is NOT an anti-gifts grump; it’s inside the great gifts passage. That placement is the whole argument.
+[CLICK] Set the context </a:t>
+            </a:r>
+            <a:r>
+              <a:rPr lang="en-US"/>
+              <a:t>→ </a:t>
+            </a:r>
+            <a:r>
+              <a:rPr lang="en-US" dirty="0"/>
+              <a:t>this is NOT an anti-gifts grump; it’s inside the great gifts passage. That placement is the whole argument.
 [CLICK] Read 14:37–38 slowly. “What I write to you is the Lord’s COMMAND.” Apostolic writing outranks spiritual self-assessment.
-[CLICK] The move: Paul names the TWO best credentials (prophet, spiritual) and puts both under his written word. Crucially — he affirms their gifts are real; he denies gifts settle ORDER. Gift ≠ office. This is the distinction the early church kept (next slide).
+[CLICK] The move: Paul names the TWO best credentials (prophet, spiritual) and puts both under his written word. Crucially </a:t>
+            </a:r>
+            <a:r>
+              <a:rPr lang="en-US"/>
+              <a:t>→</a:t>
+            </a:r>
+            <a:r>
+              <a:rPr lang="en-US" dirty="0"/>
+              <a:t> he affirms their gifts are real; he denies gifts settle ORDER. Gift ≠ office. This is the distinction the early church kept (next slide).
 [CLICK] v.38 sanction + application. Every generated-authority claim hits this wall, and it’s located in the gifts chapter, not some anti-charismatic corner. Land: gifting is for all; authority is conferred. Transition: “So how IS it conferred? Paul shows a chain.”</a:t>
             </a:r>
-            <a:endParaRPr lang="en-US" dirty="0"/>
           </a:p>
         </p:txBody>
       </p:sp>
@@ -781,12 +639,59 @@
             <a:r>
               <a:rPr lang="en-US" dirty="0"/>
               <a:t>[22:00–34:00]
-[CLICK] The four texts — the chain. Appointed (not self-made), traditions handed on, entrusted to teach others, once-for-all deposit. Note 2 Tim 2:2 especially: it’s a RELAY (Paul→Timothy→faithful→others) — authority travels by handoff.
-[CLICK] Deposit→handoff vs. discovery — a relay, not a spring. You don’t generate the baton; you receive and pass it.
-[CLICK] The early-church question. Origen and Hippolytus BOTH separate gift from office — they concede the gift and still locate authority in appointment/function. Be careful &amp; fair: these are historical witnesses to how the sub-apostolic church read this, not proof texts themselves; cite them as evidence of early practice.
-[CLICK] Tie to Rom 1:5 — receiving the apostolic word IS the obedience of faith. Transition: “One big objection remains — the trajectory argument. Let’s meet it honestly.”</a:t>
-            </a:r>
-            <a:endParaRPr lang="en-US" dirty="0"/>
+[CLICK] The four texts </a:t>
+            </a:r>
+            <a:r>
+              <a:rPr lang="en-US"/>
+              <a:t>→ </a:t>
+            </a:r>
+            <a:r>
+              <a:rPr lang="en-US" dirty="0"/>
+              <a:t>the chain. Appointed (not self-made), traditions handed on, entrusted to teach others, once-for-all deposit. Note 2 Tim 2:2 especially: it’s a RELAY (Paul→Timothy→faithful→others) </a:t>
+            </a:r>
+            <a:r>
+              <a:rPr lang="en-US"/>
+              <a:t>→ </a:t>
+            </a:r>
+            <a:r>
+              <a:rPr lang="en-US" dirty="0"/>
+              <a:t>authority travels by handoff.
+[CLICK] Deposit→handoff vs. discovery </a:t>
+            </a:r>
+            <a:r>
+              <a:rPr lang="en-US"/>
+              <a:t>→ </a:t>
+            </a:r>
+            <a:r>
+              <a:rPr lang="en-US" dirty="0"/>
+              <a:t>a relay, not a spring. You don’t generate the baton; you receive and pass it.
+[CLICK] The early-church question. Origen and Hippolytus BOTH separate gift from office </a:t>
+            </a:r>
+            <a:r>
+              <a:rPr lang="en-US"/>
+              <a:t>→ </a:t>
+            </a:r>
+            <a:r>
+              <a:rPr lang="en-US" dirty="0"/>
+              <a:t>they concede the gift and still locate authority in appointment/function. Be careful &amp; fair: these are historical witnesses to how the sub-apostolic church read this, not proof texts themselves; cite them as evidence of early practice.
+[CLICK] Tie to Rom 1:5 </a:t>
+            </a:r>
+            <a:r>
+              <a:rPr lang="en-US"/>
+              <a:t>→ </a:t>
+            </a:r>
+            <a:r>
+              <a:rPr lang="en-US" dirty="0"/>
+              <a:t>receiving the apostolic word IS the obedience of faith. Transition: “One big objection remains </a:t>
+            </a:r>
+            <a:r>
+              <a:rPr lang="en-US"/>
+              <a:t>→</a:t>
+            </a:r>
+            <a:r>
+              <a:rPr lang="en-US" dirty="0"/>
+              <a:t> the trajectory argument. Let’s meet it honestly.”</a:t>
+            </a:r>
           </a:p>
         </p:txBody>
       </p:sp>
@@ -873,13 +778,60 @@
             <a:r>
               <a:rPr lang="en-US" dirty="0"/>
               <a:t>[34:00–42:00]
-[CLICK] State the objection at FULL strength — this is the fairness move that earns you the room. Webb’s trajectory/redemptive-movement argument is serious; don’t caricature it.
-[CLICK] GRANT the premise — the slavery-texts history is real and humbling. Concede it warmly. Then pose the real question.
-[CLICK] The distinction — slavery has no creation grounding (no “master formed first”); assembly order has one TWICE. This is next week’s bridge — plant 1 Tim 2:13 and 1 Cor 11:8–9 now.
-[CLICK] The banner — cultural anchors drag, creation anchors don’t. The memorable line.
-[CLICK] The inversion — the analogy doesn’t just fail, it runs the other way. Note honestly: this is an ARGUMENT, and thoughtful people still disagree; we hold it with conviction and humility. Transition to discussion.</a:t>
-            </a:r>
-            <a:endParaRPr lang="en-US" dirty="0"/>
+[CLICK] State the objection at FULL strength </a:t>
+            </a:r>
+            <a:r>
+              <a:rPr lang="en-US"/>
+              <a:t>→ </a:t>
+            </a:r>
+            <a:r>
+              <a:rPr lang="en-US" dirty="0"/>
+              <a:t>this is the fairness move that earns you the room. Webb’s trajectory/redemptive-movement argument is serious; don’t caricature it.
+[CLICK] GRANT the premise </a:t>
+            </a:r>
+            <a:r>
+              <a:rPr lang="en-US"/>
+              <a:t>→ </a:t>
+            </a:r>
+            <a:r>
+              <a:rPr lang="en-US" dirty="0"/>
+              <a:t>the slavery-texts history is real and humbling. Concede it warmly. Then pose the real question.
+[CLICK] The distinction </a:t>
+            </a:r>
+            <a:r>
+              <a:rPr lang="en-US"/>
+              <a:t>→ </a:t>
+            </a:r>
+            <a:r>
+              <a:rPr lang="en-US" dirty="0"/>
+              <a:t>slavery has no creation grounding (no “master formed first”); assembly order has one TWICE. This is next week’s bridge </a:t>
+            </a:r>
+            <a:r>
+              <a:rPr lang="en-US"/>
+              <a:t>→ </a:t>
+            </a:r>
+            <a:r>
+              <a:rPr lang="en-US" dirty="0"/>
+              <a:t>plant 1 Tim 2:13 and 1 Cor 11:8–9 now.
+[CLICK] The banner </a:t>
+            </a:r>
+            <a:r>
+              <a:rPr lang="en-US"/>
+              <a:t>→ </a:t>
+            </a:r>
+            <a:r>
+              <a:rPr lang="en-US" dirty="0"/>
+              <a:t>cultural anchors drag, creation anchors don’t. The memorable line.
+[CLICK] The inversion </a:t>
+            </a:r>
+            <a:r>
+              <a:rPr lang="en-US"/>
+              <a:t>→</a:t>
+            </a:r>
+            <a:r>
+              <a:rPr lang="en-US" dirty="0"/>
+              <a:t> the analogy doesn’t just fail, it runs the other way. Note honestly: this is an ARGUMENT, and thoughtful people still disagree; we hold it with conviction and humility. Transition to discussion.</a:t>
+            </a:r>
           </a:p>
         </p:txBody>
       </p:sp>
@@ -966,11 +918,26 @@
             <a:r>
               <a:rPr lang="en-US" dirty="0"/>
               <a:t>[45:00–55:00]
-Q1: The heart of the week. “God is using them” confuses FRUIT with WARRANT. God used Balaam’s donkey, Cyrus, even Caiaphas’ prophecy — usefulness never equals appointment. BUT be fair: fruit is a real confirmation of a calling already conferred (1 Tim 3, Titus 1 look for evidence). The error is making fruit the SOURCE rather than a CONFIRMATION. Draw that line carefully.
-Q2: Get practical and self-implicating — not “those people out there.” We all feel it: the church that grows must be blessed; the method that works must be right (Week 3’s Moses-rock again!). Results are DATA, not AUTHORITY. When is it legitimate input vs. usurping the text? Model nuance.
+Q1: The heart of the week. “God is using them” confuses FRUIT with WARRANT. God used Balaam’s donkey, Cyrus, even Caiaphas’ prophecy </a:t>
+            </a:r>
+            <a:r>
+              <a:rPr lang="en-US"/>
+              <a:t>→ </a:t>
+            </a:r>
+            <a:r>
+              <a:rPr lang="en-US" dirty="0"/>
+              <a:t>usefulness never equals appointment. BUT be fair: fruit is a real confirmation of a calling already conferred (1 Tim 3, Titus 1 look for evidence). The error is making fruit the SOURCE rather than a CONFIRMATION. Draw that line carefully.
+Q2: Get practical and self-implicating </a:t>
+            </a:r>
+            <a:r>
+              <a:rPr lang="en-US"/>
+              <a:t>→</a:t>
+            </a:r>
+            <a:r>
+              <a:rPr lang="en-US" dirty="0"/>
+              <a:t> not “those people out there.” We all feel it: the church that grows must be blessed; the method that works must be right (Week 3’s Moses-rock again!). Results are DATA, not AUTHORITY. When is it legitimate input vs. usurping the text? Model nuance.
 [CLICK] Read the contested-ground rule. Keep it warm; nobody wins by winning.</a:t>
             </a:r>
-            <a:endParaRPr lang="en-US" dirty="0"/>
           </a:p>
         </p:txBody>
       </p:sp>
@@ -1057,12 +1024,43 @@
             <a:r>
               <a:rPr lang="en-US" dirty="0"/>
               <a:t>[55:00 close, ~2 min]
-[CLICK] Next week’s reading — tell them explicitly to read with BOTH sides in view, noting what Paul does AND doesn’t say. Flag v.5 (women pray/prophesy) so they arrive holding the tension, not a caricature.
-[CLICK] Preview Week 11 — emphasize “narrow” and “full breadth of women’s ministry.” Reassure it will be careful and fair.
-[CLICK] Carry sentence — say it together.
-[CLICK] Close on 14:37. Dismiss on time — and warmly; the room may be tender.</a:t>
-            </a:r>
-            <a:endParaRPr lang="en-US" dirty="0"/>
+[CLICK] Next week’s reading </a:t>
+            </a:r>
+            <a:r>
+              <a:rPr lang="en-US"/>
+              <a:t>→ </a:t>
+            </a:r>
+            <a:r>
+              <a:rPr lang="en-US" dirty="0"/>
+              <a:t>tell them explicitly to read with BOTH sides in view, noting what Paul does AND doesn’t say. Flag v.5 (women pray/prophesy) so they arrive holding the tension, not a caricature.
+[CLICK] Preview Week 11 </a:t>
+            </a:r>
+            <a:r>
+              <a:rPr lang="en-US"/>
+              <a:t>→ </a:t>
+            </a:r>
+            <a:r>
+              <a:rPr lang="en-US" dirty="0"/>
+              <a:t>emphasize “narrow” and “full breadth of women’s ministry.” Reassure it will be careful and fair.
+[CLICK] Carry sentence </a:t>
+            </a:r>
+            <a:r>
+              <a:rPr lang="en-US"/>
+              <a:t>→ </a:t>
+            </a:r>
+            <a:r>
+              <a:rPr lang="en-US" dirty="0"/>
+              <a:t>say it together.
+[CLICK] Close on 14:37. Dismiss on time </a:t>
+            </a:r>
+            <a:r>
+              <a:rPr lang="en-US"/>
+              <a:t>→</a:t>
+            </a:r>
+            <a:r>
+              <a:rPr lang="en-US" dirty="0"/>
+              <a:t> and warmly; the room may be tender.</a:t>
+            </a:r>
           </a:p>
         </p:txBody>
       </p:sp>
@@ -1135,6 +1133,11 @@
 <file path=ppt/slideMasters/slideMaster1.xml><?xml version="1.0" encoding="utf-8"?>
 <p:sldMaster xmlns:a="http://schemas.openxmlformats.org/drawingml/2006/main" xmlns:r="http://schemas.openxmlformats.org/officeDocument/2006/relationships" xmlns:p="http://schemas.openxmlformats.org/presentationml/2006/main">
   <p:cSld>
+    <p:bg>
+      <p:bgRef idx="1001">
+        <a:schemeClr val="bg1"/>
+      </p:bgRef>
+    </p:bg>
     <p:spTree>
       <p:nvGrpSpPr>
         <p:cNvPr id="1" name=""/>
@@ -1447,7 +1450,7 @@
           <a:bodyPr wrap="square" lIns="0" tIns="0" rIns="0" bIns="0" rtlCol="0" anchor="t"/>
           <a:lstStyle/>
           <a:p>
-            <a:pPr algn="ctr" indent="0" marL="0">
+            <a:pPr marL="0" indent="0" algn="ctr">
               <a:buNone/>
             </a:pPr>
             <a:r>
@@ -1459,7 +1462,7 @@
                 <a:ea typeface="Arial" pitchFamily="34" charset="-122"/>
                 <a:cs typeface="Arial" pitchFamily="34" charset="-120"/>
               </a:rPr>
-              <a:t>The Obedience of Faith — Week 10  ·  Unit IV: God’s House</a:t>
+              <a:t>The Obedience of Faith - Week 10  ·  Unit IV: God’s House</a:t>
             </a:r>
             <a:endParaRPr lang="en-US" sz="1600" dirty="0"/>
           </a:p>
@@ -1486,7 +1489,7 @@
           <a:bodyPr wrap="square" lIns="0" tIns="0" rIns="0" bIns="0" rtlCol="0" anchor="t"/>
           <a:lstStyle/>
           <a:p>
-            <a:pPr algn="ctr" indent="0" marL="0">
+            <a:pPr marL="0" indent="0" algn="ctr">
               <a:buNone/>
             </a:pPr>
             <a:r>
@@ -1525,7 +1528,7 @@
           <a:bodyPr wrap="square" lIns="0" tIns="0" rIns="0" bIns="0" rtlCol="0" anchor="t"/>
           <a:lstStyle/>
           <a:p>
-            <a:pPr algn="ctr" indent="0" marL="0">
+            <a:pPr marL="0" indent="0" algn="ctr">
               <a:buNone/>
             </a:pPr>
             <a:r>
@@ -1564,11 +1567,11 @@
           <a:bodyPr wrap="square" lIns="0" tIns="0" rIns="0" bIns="0" rtlCol="0" anchor="t"/>
           <a:lstStyle/>
           <a:p>
-            <a:pPr algn="ctr" indent="0" marL="0">
+            <a:pPr marL="0" indent="0" algn="ctr">
               <a:buNone/>
             </a:pPr>
             <a:r>
-              <a:rPr lang="en-US" sz="2000" i="1" dirty="0">
+              <a:rPr lang="en-US" sz="2400" i="1" dirty="0">
                 <a:solidFill>
                   <a:srgbClr val="000000"/>
                 </a:solidFill>
@@ -1578,17 +1581,14 @@
               </a:rPr>
               <a:t>“If anyone considers himself a prophet or spiritual person, he should acknowledge that what I write to you is the Lord’s command.”</a:t>
             </a:r>
-            <a:pPr algn="ctr" indent="0" marL="0">
+            <a:endParaRPr lang="en-US" dirty="0"/>
+          </a:p>
+          <a:p>
+            <a:pPr marL="0" indent="0" algn="ctr">
               <a:buNone/>
             </a:pPr>
-            <a:endParaRPr lang="en-US" sz="1600" dirty="0"/>
-          </a:p>
-          <a:p>
-            <a:pPr algn="ctr" indent="0" marL="0">
-              <a:buNone/>
-            </a:pPr>
-            <a:r>
-              <a:rPr lang="en-US" sz="1800" dirty="0">
+            <a:r>
+              <a:rPr lang="en-US" sz="2000" dirty="0">
                 <a:solidFill>
                   <a:srgbClr val="000000"/>
                 </a:solidFill>
@@ -1598,7 +1598,7 @@
               </a:rPr>
               <a:t>(1 Corinthians 14:37)</a:t>
             </a:r>
-            <a:endParaRPr lang="en-US" sz="1600" dirty="0"/>
+            <a:endParaRPr lang="en-US" dirty="0"/>
           </a:p>
         </p:txBody>
       </p:sp>
@@ -1623,7 +1623,7 @@
           <a:bodyPr wrap="square" lIns="0" tIns="0" rIns="0" bIns="0" rtlCol="0" anchor="t"/>
           <a:lstStyle/>
           <a:p>
-            <a:pPr algn="ctr" indent="0" marL="0">
+            <a:pPr marL="0" indent="0" algn="ctr">
               <a:buNone/>
             </a:pPr>
             <a:r>
@@ -1634,7 +1634,7 @@
                 <a:latin typeface="Arial" pitchFamily="34" charset="0"/>
                 <a:ea typeface="Arial" pitchFamily="34" charset="-122"/>
                 <a:cs typeface="Arial" pitchFamily="34" charset="-120"/>
-                <a:hlinkClick r:id="rId1" invalidUrl="" action="" tgtFrame="" tooltip="" history="1" highlightClick="0" endSnd="0">
+                <a:hlinkClick r:id="rId3">
                   <a:extLst>
                     <a:ext uri="{A12FA001-AC4F-418D-AE19-62706E023703}">
                       <ahyp:hlinkClr xmlns:ahyp="http://schemas.microsoft.com/office/drawing/2018/hyperlinkcolor" val="tx"/>
@@ -1642,7 +1642,36 @@
                   </a:extLst>
                 </a:hlinkClick>
               </a:rPr>
-              <a:t>https://tinyurl.com/TeachTheWord</a:t>
+              <a:t>https://</a:t>
+            </a:r>
+            <a:r>
+              <a:rPr lang="en-US" sz="1600" b="1" u="sng" dirty="0" err="1">
+                <a:solidFill>
+                  <a:srgbClr val="4F81BD"/>
+                </a:solidFill>
+                <a:latin typeface="Arial" pitchFamily="34" charset="0"/>
+                <a:ea typeface="Arial" pitchFamily="34" charset="-122"/>
+                <a:cs typeface="Arial" pitchFamily="34" charset="-120"/>
+                <a:hlinkClick r:id="rId3">
+                  <a:extLst>
+                    <a:ext uri="{A12FA001-AC4F-418D-AE19-62706E023703}">
+                      <ahyp:hlinkClr xmlns:ahyp="http://schemas.microsoft.com/office/drawing/2018/hyperlinkcolor" val="tx"/>
+                    </a:ext>
+                  </a:extLst>
+                </a:hlinkClick>
+              </a:rPr>
+              <a:t>TeachTheWord</a:t>
+            </a:r>
+            <a:r>
+              <a:rPr lang="en-US" sz="1600" b="1" u="sng" dirty="0" err="1">
+                <a:solidFill>
+                  <a:srgbClr val="4F81BD"/>
+                </a:solidFill>
+                <a:latin typeface="Arial" pitchFamily="34" charset="0"/>
+                <a:ea typeface="Arial" pitchFamily="34" charset="-122"/>
+                <a:cs typeface="Arial" pitchFamily="34" charset="-120"/>
+              </a:rPr>
+              <a:t>.Church</a:t>
             </a:r>
             <a:endParaRPr lang="en-US" sz="1600" dirty="0"/>
           </a:p>
@@ -1694,7 +1723,7 @@
           <a:bodyPr wrap="square" lIns="0" tIns="0" rIns="0" bIns="0" rtlCol="0" anchor="t"/>
           <a:lstStyle/>
           <a:p>
-            <a:pPr algn="l" indent="0" marL="0">
+            <a:pPr marL="0" indent="0" algn="l">
               <a:buNone/>
             </a:pPr>
             <a:r>
@@ -1720,7 +1749,7 @@
         </p:nvSpPr>
         <p:spPr>
           <a:xfrm>
-            <a:off x="228600" y="566928"/>
+            <a:off x="228600" y="489204"/>
             <a:ext cx="8686800" cy="320040"/>
           </a:xfrm>
           <a:prstGeom prst="rect">
@@ -1733,11 +1762,11 @@
           <a:bodyPr wrap="square" lIns="0" tIns="0" rIns="0" bIns="0" rtlCol="0" anchor="t"/>
           <a:lstStyle/>
           <a:p>
-            <a:pPr algn="l" indent="0" marL="0">
+            <a:pPr marL="0" indent="0" algn="l">
               <a:buNone/>
             </a:pPr>
             <a:r>
-              <a:rPr lang="en-US" sz="1300" b="1" dirty="0">
+              <a:rPr lang="en-US" sz="2000" b="1" dirty="0">
                 <a:solidFill>
                   <a:srgbClr val="4F81BD"/>
                 </a:solidFill>
@@ -1745,9 +1774,31 @@
                 <a:ea typeface="Arial" pitchFamily="34" charset="-122"/>
                 <a:cs typeface="Arial" pitchFamily="34" charset="-120"/>
               </a:rPr>
-              <a:t>Is authority conferred — or generated?</a:t>
-            </a:r>
-            <a:endParaRPr lang="en-US" sz="1600" dirty="0"/>
+              <a:t>Is authority conferred </a:t>
+            </a:r>
+            <a:r>
+              <a:rPr lang="en-US" sz="2000" b="1">
+                <a:solidFill>
+                  <a:srgbClr val="4F81BD"/>
+                </a:solidFill>
+                <a:latin typeface="Arial" pitchFamily="34" charset="0"/>
+                <a:ea typeface="Arial" pitchFamily="34" charset="-122"/>
+                <a:cs typeface="Arial" pitchFamily="34" charset="-120"/>
+              </a:rPr>
+              <a:t>→</a:t>
+            </a:r>
+            <a:r>
+              <a:rPr lang="en-US" sz="2000" b="1" dirty="0">
+                <a:solidFill>
+                  <a:srgbClr val="4F81BD"/>
+                </a:solidFill>
+                <a:latin typeface="Arial" pitchFamily="34" charset="0"/>
+                <a:ea typeface="Arial" pitchFamily="34" charset="-122"/>
+                <a:cs typeface="Arial" pitchFamily="34" charset="-120"/>
+              </a:rPr>
+              <a:t> or generated?</a:t>
+            </a:r>
+            <a:endParaRPr lang="en-US" sz="2800" dirty="0"/>
           </a:p>
         </p:txBody>
       </p:sp>
@@ -1759,8 +1810,8 @@
         </p:nvSpPr>
         <p:spPr>
           <a:xfrm>
-            <a:off x="365760" y="1005840"/>
-            <a:ext cx="8412480" cy="822960"/>
+            <a:off x="365760" y="868679"/>
+            <a:ext cx="8412480" cy="979371"/>
           </a:xfrm>
           <a:prstGeom prst="rect">
             <a:avLst/>
@@ -1772,11 +1823,11 @@
           <a:bodyPr wrap="square" lIns="0" tIns="0" rIns="0" bIns="0" rtlCol="0" anchor="t"/>
           <a:lstStyle/>
           <a:p>
-            <a:pPr algn="l" indent="0" marL="0">
+            <a:pPr marL="0" indent="0" algn="l">
               <a:buNone/>
             </a:pPr>
             <a:r>
-              <a:rPr lang="en-US" sz="1500" b="1" dirty="0">
+              <a:rPr lang="en-US" sz="1600" b="1" dirty="0">
                 <a:solidFill>
                   <a:srgbClr val="1F497D"/>
                 </a:solidFill>
@@ -1787,11 +1838,8 @@
               <a:t>Before “who may do what,” a prior question: where does teaching authority in the church come from?
 </a:t>
             </a:r>
-            <a:pPr algn="l" indent="0" marL="0">
-              <a:buNone/>
-            </a:pPr>
-            <a:r>
-              <a:rPr lang="en-US" sz="1450" dirty="0">
+            <a:r>
+              <a:rPr lang="en-US" sz="1600" dirty="0">
                 <a:solidFill>
                   <a:srgbClr val="000000"/>
                 </a:solidFill>
@@ -1799,9 +1847,9 @@
                 <a:ea typeface="Arial" pitchFamily="34" charset="-122"/>
                 <a:cs typeface="Arial" pitchFamily="34" charset="-120"/>
               </a:rPr>
-              <a:t>Only two possible answers. It is CONFERRED (delivered, handed down, appointed) — or GENERATED (produced by something in the person).</a:t>
-            </a:r>
-            <a:endParaRPr lang="en-US" sz="1600" dirty="0"/>
+              <a:t>Only two possible answers. It is CONFERRED (delivered, handed down, appointed) → or GENERATED (produced by something in the person).</a:t>
+            </a:r>
+            <a:endParaRPr lang="en-US" dirty="0"/>
           </a:p>
         </p:txBody>
       </p:sp>
@@ -1813,7 +1861,7 @@
         </p:nvSpPr>
         <p:spPr>
           <a:xfrm>
-            <a:off x="365760" y="1965960"/>
+            <a:off x="365760" y="2025516"/>
             <a:ext cx="2011680" cy="347472"/>
           </a:xfrm>
           <a:prstGeom prst="rect">
@@ -1824,6 +1872,13 @@
           </a:solidFill>
           <a:ln/>
         </p:spPr>
+        <p:txBody>
+          <a:bodyPr/>
+          <a:lstStyle/>
+          <a:p>
+            <a:endParaRPr lang="en-US" sz="3200"/>
+          </a:p>
+        </p:txBody>
       </p:sp>
       <p:sp>
         <p:nvSpPr>
@@ -1833,7 +1888,7 @@
         </p:nvSpPr>
         <p:spPr>
           <a:xfrm>
-            <a:off x="438912" y="2002536"/>
+            <a:off x="438912" y="2062092"/>
             <a:ext cx="1901952" cy="274320"/>
           </a:xfrm>
           <a:prstGeom prst="rect">
@@ -1846,11 +1901,11 @@
           <a:bodyPr wrap="square" lIns="0" tIns="0" rIns="0" bIns="0" rtlCol="0" anchor="ctr"/>
           <a:lstStyle/>
           <a:p>
-            <a:pPr algn="l" indent="0" marL="0">
+            <a:pPr marL="0" indent="0" algn="l">
               <a:buNone/>
             </a:pPr>
             <a:r>
-              <a:rPr lang="en-US" sz="1100" b="1" dirty="0">
+              <a:rPr lang="en-US" b="1" dirty="0">
                 <a:solidFill>
                   <a:srgbClr val="FFFFFF"/>
                 </a:solidFill>
@@ -1860,7 +1915,7 @@
               </a:rPr>
               <a:t>Movement</a:t>
             </a:r>
-            <a:endParaRPr lang="en-US" sz="1600" dirty="0"/>
+            <a:endParaRPr lang="en-US" sz="2800" dirty="0"/>
           </a:p>
         </p:txBody>
       </p:sp>
@@ -1872,7 +1927,7 @@
         </p:nvSpPr>
         <p:spPr>
           <a:xfrm>
-            <a:off x="2377440" y="1965960"/>
+            <a:off x="2377440" y="2025516"/>
             <a:ext cx="4526280" cy="347472"/>
           </a:xfrm>
           <a:prstGeom prst="rect">
@@ -1883,6 +1938,13 @@
           </a:solidFill>
           <a:ln/>
         </p:spPr>
+        <p:txBody>
+          <a:bodyPr/>
+          <a:lstStyle/>
+          <a:p>
+            <a:endParaRPr lang="en-US" sz="3200"/>
+          </a:p>
+        </p:txBody>
       </p:sp>
       <p:sp>
         <p:nvSpPr>
@@ -1892,7 +1954,7 @@
         </p:nvSpPr>
         <p:spPr>
           <a:xfrm>
-            <a:off x="2450592" y="2002536"/>
+            <a:off x="2450592" y="2062092"/>
             <a:ext cx="4416552" cy="274320"/>
           </a:xfrm>
           <a:prstGeom prst="rect">
@@ -1905,11 +1967,11 @@
           <a:bodyPr wrap="square" lIns="0" tIns="0" rIns="0" bIns="0" rtlCol="0" anchor="ctr"/>
           <a:lstStyle/>
           <a:p>
-            <a:pPr algn="l" indent="0" marL="0">
+            <a:pPr marL="0" indent="0" algn="l">
               <a:buNone/>
             </a:pPr>
             <a:r>
-              <a:rPr lang="en-US" sz="1100" b="1" dirty="0">
+              <a:rPr lang="en-US" b="1" dirty="0">
                 <a:solidFill>
                   <a:srgbClr val="FFFFFF"/>
                 </a:solidFill>
@@ -1919,7 +1981,7 @@
               </a:rPr>
               <a:t>The claim</a:t>
             </a:r>
-            <a:endParaRPr lang="en-US" sz="1600" dirty="0"/>
+            <a:endParaRPr lang="en-US" sz="2800" dirty="0"/>
           </a:p>
         </p:txBody>
       </p:sp>
@@ -1931,7 +1993,7 @@
         </p:nvSpPr>
         <p:spPr>
           <a:xfrm>
-            <a:off x="6903720" y="1965960"/>
+            <a:off x="6903720" y="2025516"/>
             <a:ext cx="1874520" cy="347472"/>
           </a:xfrm>
           <a:prstGeom prst="rect">
@@ -1942,6 +2004,13 @@
           </a:solidFill>
           <a:ln/>
         </p:spPr>
+        <p:txBody>
+          <a:bodyPr/>
+          <a:lstStyle/>
+          <a:p>
+            <a:endParaRPr lang="en-US" sz="3200"/>
+          </a:p>
+        </p:txBody>
       </p:sp>
       <p:sp>
         <p:nvSpPr>
@@ -1951,7 +2020,7 @@
         </p:nvSpPr>
         <p:spPr>
           <a:xfrm>
-            <a:off x="6976872" y="2002536"/>
+            <a:off x="6976872" y="2062092"/>
             <a:ext cx="1764792" cy="274320"/>
           </a:xfrm>
           <a:prstGeom prst="rect">
@@ -1964,11 +2033,11 @@
           <a:bodyPr wrap="square" lIns="0" tIns="0" rIns="0" bIns="0" rtlCol="0" anchor="ctr"/>
           <a:lstStyle/>
           <a:p>
-            <a:pPr algn="l" indent="0" marL="0">
+            <a:pPr marL="0" indent="0" algn="l">
               <a:buNone/>
             </a:pPr>
             <a:r>
-              <a:rPr lang="en-US" sz="1100" b="1" dirty="0">
+              <a:rPr lang="en-US" b="1" dirty="0">
                 <a:solidFill>
                   <a:srgbClr val="FFFFFF"/>
                 </a:solidFill>
@@ -1978,7 +2047,7 @@
               </a:rPr>
               <a:t>The move</a:t>
             </a:r>
-            <a:endParaRPr lang="en-US" sz="1600" dirty="0"/>
+            <a:endParaRPr lang="en-US" sz="2800" dirty="0"/>
           </a:p>
         </p:txBody>
       </p:sp>
@@ -1990,7 +2059,7 @@
         </p:nvSpPr>
         <p:spPr>
           <a:xfrm>
-            <a:off x="365760" y="2313432"/>
+            <a:off x="365760" y="2372988"/>
             <a:ext cx="2011680" cy="566928"/>
           </a:xfrm>
           <a:prstGeom prst="rect">
@@ -2006,6 +2075,13 @@
             <a:prstDash val="solid"/>
           </a:ln>
         </p:spPr>
+        <p:txBody>
+          <a:bodyPr/>
+          <a:lstStyle/>
+          <a:p>
+            <a:endParaRPr lang="en-US" sz="3200"/>
+          </a:p>
+        </p:txBody>
       </p:sp>
       <p:sp>
         <p:nvSpPr>
@@ -2015,7 +2091,7 @@
         </p:nvSpPr>
         <p:spPr>
           <a:xfrm>
-            <a:off x="438912" y="2340864"/>
+            <a:off x="438912" y="2400420"/>
             <a:ext cx="1883664" cy="521208"/>
           </a:xfrm>
           <a:prstGeom prst="rect">
@@ -2028,11 +2104,11 @@
           <a:bodyPr wrap="square" lIns="0" tIns="0" rIns="0" bIns="0" rtlCol="0" anchor="ctr"/>
           <a:lstStyle/>
           <a:p>
-            <a:pPr algn="l" indent="0" marL="0">
+            <a:pPr marL="0" indent="0" algn="l">
               <a:buNone/>
             </a:pPr>
             <a:r>
-              <a:rPr lang="en-US" sz="1050" b="1" dirty="0">
+              <a:rPr lang="en-US" sz="1600" b="1" dirty="0">
                 <a:solidFill>
                   <a:srgbClr val="1F497D"/>
                 </a:solidFill>
@@ -2042,7 +2118,7 @@
               </a:rPr>
               <a:t>Montanists (2nd c.)</a:t>
             </a:r>
-            <a:endParaRPr lang="en-US" sz="1600" dirty="0"/>
+            <a:endParaRPr lang="en-US" sz="2800" dirty="0"/>
           </a:p>
         </p:txBody>
       </p:sp>
@@ -2054,7 +2130,7 @@
         </p:nvSpPr>
         <p:spPr>
           <a:xfrm>
-            <a:off x="2377440" y="2313432"/>
+            <a:off x="2377440" y="2372988"/>
             <a:ext cx="4526280" cy="566928"/>
           </a:xfrm>
           <a:prstGeom prst="rect">
@@ -2070,6 +2146,13 @@
             <a:prstDash val="solid"/>
           </a:ln>
         </p:spPr>
+        <p:txBody>
+          <a:bodyPr/>
+          <a:lstStyle/>
+          <a:p>
+            <a:endParaRPr lang="en-US" sz="3200"/>
+          </a:p>
+        </p:txBody>
       </p:sp>
       <p:sp>
         <p:nvSpPr>
@@ -2079,7 +2162,7 @@
         </p:nvSpPr>
         <p:spPr>
           <a:xfrm>
-            <a:off x="2450592" y="2340864"/>
+            <a:off x="2450592" y="2400420"/>
             <a:ext cx="4398264" cy="521208"/>
           </a:xfrm>
           <a:prstGeom prst="rect">
@@ -2092,11 +2175,11 @@
           <a:bodyPr wrap="square" lIns="0" tIns="0" rIns="0" bIns="0" rtlCol="0" anchor="ctr"/>
           <a:lstStyle/>
           <a:p>
-            <a:pPr algn="l" indent="0" marL="0">
+            <a:pPr marL="0" indent="0" algn="l">
               <a:buNone/>
             </a:pPr>
             <a:r>
-              <a:rPr lang="en-US" sz="1050" dirty="0">
+              <a:rPr lang="en-US" sz="1600" dirty="0">
                 <a:solidFill>
                   <a:srgbClr val="000000"/>
                 </a:solidFill>
@@ -2104,9 +2187,31 @@
                 <a:ea typeface="Arial" pitchFamily="34" charset="-122"/>
                 <a:cs typeface="Arial" pitchFamily="34" charset="-120"/>
               </a:rPr>
-              <a:t>Direct revelation — “the Spirit speaks now”</a:t>
-            </a:r>
-            <a:endParaRPr lang="en-US" sz="1600" dirty="0"/>
+              <a:t>Direct revelation </a:t>
+            </a:r>
+            <a:r>
+              <a:rPr lang="en-US" sz="1600">
+                <a:solidFill>
+                  <a:srgbClr val="000000"/>
+                </a:solidFill>
+                <a:latin typeface="Arial" pitchFamily="34" charset="0"/>
+                <a:ea typeface="Arial" pitchFamily="34" charset="-122"/>
+                <a:cs typeface="Arial" pitchFamily="34" charset="-120"/>
+              </a:rPr>
+              <a:t>→</a:t>
+            </a:r>
+            <a:r>
+              <a:rPr lang="en-US" sz="1600" dirty="0">
+                <a:solidFill>
+                  <a:srgbClr val="000000"/>
+                </a:solidFill>
+                <a:latin typeface="Arial" pitchFamily="34" charset="0"/>
+                <a:ea typeface="Arial" pitchFamily="34" charset="-122"/>
+                <a:cs typeface="Arial" pitchFamily="34" charset="-120"/>
+              </a:rPr>
+              <a:t> “the Spirit speaks now”</a:t>
+            </a:r>
+            <a:endParaRPr lang="en-US" sz="2800" dirty="0"/>
           </a:p>
         </p:txBody>
       </p:sp>
@@ -2118,7 +2223,7 @@
         </p:nvSpPr>
         <p:spPr>
           <a:xfrm>
-            <a:off x="6903720" y="2313432"/>
+            <a:off x="6903720" y="2372988"/>
             <a:ext cx="1874520" cy="566928"/>
           </a:xfrm>
           <a:prstGeom prst="rect">
@@ -2134,6 +2239,13 @@
             <a:prstDash val="solid"/>
           </a:ln>
         </p:spPr>
+        <p:txBody>
+          <a:bodyPr/>
+          <a:lstStyle/>
+          <a:p>
+            <a:endParaRPr lang="en-US" sz="3200"/>
+          </a:p>
+        </p:txBody>
       </p:sp>
       <p:sp>
         <p:nvSpPr>
@@ -2143,7 +2255,7 @@
         </p:nvSpPr>
         <p:spPr>
           <a:xfrm>
-            <a:off x="6976872" y="2340864"/>
+            <a:off x="6976872" y="2400420"/>
             <a:ext cx="1746504" cy="521208"/>
           </a:xfrm>
           <a:prstGeom prst="rect">
@@ -2156,11 +2268,11 @@
           <a:bodyPr wrap="square" lIns="0" tIns="0" rIns="0" bIns="0" rtlCol="0" anchor="ctr"/>
           <a:lstStyle/>
           <a:p>
-            <a:pPr algn="l" indent="0" marL="0">
+            <a:pPr marL="0" indent="0" algn="l">
               <a:buNone/>
             </a:pPr>
             <a:r>
-              <a:rPr lang="en-US" sz="1050" b="1" dirty="0">
+              <a:rPr lang="en-US" sz="1600" b="1" dirty="0">
                 <a:solidFill>
                   <a:srgbClr val="B0413E"/>
                 </a:solidFill>
@@ -2170,7 +2282,7 @@
               </a:rPr>
               <a:t>GENERATED</a:t>
             </a:r>
-            <a:endParaRPr lang="en-US" sz="1600" dirty="0"/>
+            <a:endParaRPr lang="en-US" sz="2800" dirty="0"/>
           </a:p>
         </p:txBody>
       </p:sp>
@@ -2182,7 +2294,7 @@
         </p:nvSpPr>
         <p:spPr>
           <a:xfrm>
-            <a:off x="365760" y="2880360"/>
+            <a:off x="365760" y="2939916"/>
             <a:ext cx="2011680" cy="566928"/>
           </a:xfrm>
           <a:prstGeom prst="rect">
@@ -2198,6 +2310,13 @@
             <a:prstDash val="solid"/>
           </a:ln>
         </p:spPr>
+        <p:txBody>
+          <a:bodyPr/>
+          <a:lstStyle/>
+          <a:p>
+            <a:endParaRPr lang="en-US" sz="3200"/>
+          </a:p>
+        </p:txBody>
       </p:sp>
       <p:sp>
         <p:nvSpPr>
@@ -2207,7 +2326,7 @@
         </p:nvSpPr>
         <p:spPr>
           <a:xfrm>
-            <a:off x="438912" y="2907792"/>
+            <a:off x="438912" y="2967348"/>
             <a:ext cx="1883664" cy="521208"/>
           </a:xfrm>
           <a:prstGeom prst="rect">
@@ -2220,11 +2339,11 @@
           <a:bodyPr wrap="square" lIns="0" tIns="0" rIns="0" bIns="0" rtlCol="0" anchor="ctr"/>
           <a:lstStyle/>
           <a:p>
-            <a:pPr algn="l" indent="0" marL="0">
+            <a:pPr marL="0" indent="0" algn="l">
               <a:buNone/>
             </a:pPr>
             <a:r>
-              <a:rPr lang="en-US" sz="1050" b="1" dirty="0">
+              <a:rPr lang="en-US" sz="1600" b="1" dirty="0">
                 <a:solidFill>
                   <a:srgbClr val="1F497D"/>
                 </a:solidFill>
@@ -2234,7 +2353,7 @@
               </a:rPr>
               <a:t>Quakers (17th c.)</a:t>
             </a:r>
-            <a:endParaRPr lang="en-US" sz="1600" dirty="0"/>
+            <a:endParaRPr lang="en-US" sz="2800" dirty="0"/>
           </a:p>
         </p:txBody>
       </p:sp>
@@ -2246,7 +2365,7 @@
         </p:nvSpPr>
         <p:spPr>
           <a:xfrm>
-            <a:off x="2377440" y="2880360"/>
+            <a:off x="2377440" y="2939916"/>
             <a:ext cx="4526280" cy="566928"/>
           </a:xfrm>
           <a:prstGeom prst="rect">
@@ -2262,6 +2381,13 @@
             <a:prstDash val="solid"/>
           </a:ln>
         </p:spPr>
+        <p:txBody>
+          <a:bodyPr/>
+          <a:lstStyle/>
+          <a:p>
+            <a:endParaRPr lang="en-US" sz="3200"/>
+          </a:p>
+        </p:txBody>
       </p:sp>
       <p:sp>
         <p:nvSpPr>
@@ -2271,7 +2397,7 @@
         </p:nvSpPr>
         <p:spPr>
           <a:xfrm>
-            <a:off x="2450592" y="2907792"/>
+            <a:off x="2450592" y="2967348"/>
             <a:ext cx="4398264" cy="521208"/>
           </a:xfrm>
           <a:prstGeom prst="rect">
@@ -2284,11 +2410,11 @@
           <a:bodyPr wrap="square" lIns="0" tIns="0" rIns="0" bIns="0" rtlCol="0" anchor="ctr"/>
           <a:lstStyle/>
           <a:p>
-            <a:pPr algn="l" indent="0" marL="0">
+            <a:pPr marL="0" indent="0" algn="l">
               <a:buNone/>
             </a:pPr>
             <a:r>
-              <a:rPr lang="en-US" sz="1050" dirty="0">
+              <a:rPr lang="en-US" sz="1600" dirty="0">
                 <a:solidFill>
                   <a:srgbClr val="000000"/>
                 </a:solidFill>
@@ -2298,7 +2424,7 @@
               </a:rPr>
               <a:t>The inner light speaks through anyone</a:t>
             </a:r>
-            <a:endParaRPr lang="en-US" sz="1600" dirty="0"/>
+            <a:endParaRPr lang="en-US" sz="2800" dirty="0"/>
           </a:p>
         </p:txBody>
       </p:sp>
@@ -2310,7 +2436,7 @@
         </p:nvSpPr>
         <p:spPr>
           <a:xfrm>
-            <a:off x="6903720" y="2880360"/>
+            <a:off x="6903720" y="2939916"/>
             <a:ext cx="1874520" cy="566928"/>
           </a:xfrm>
           <a:prstGeom prst="rect">
@@ -2326,6 +2452,13 @@
             <a:prstDash val="solid"/>
           </a:ln>
         </p:spPr>
+        <p:txBody>
+          <a:bodyPr/>
+          <a:lstStyle/>
+          <a:p>
+            <a:endParaRPr lang="en-US" sz="3200"/>
+          </a:p>
+        </p:txBody>
       </p:sp>
       <p:sp>
         <p:nvSpPr>
@@ -2335,7 +2468,7 @@
         </p:nvSpPr>
         <p:spPr>
           <a:xfrm>
-            <a:off x="6976872" y="2907792"/>
+            <a:off x="6976872" y="2967348"/>
             <a:ext cx="1746504" cy="521208"/>
           </a:xfrm>
           <a:prstGeom prst="rect">
@@ -2348,11 +2481,11 @@
           <a:bodyPr wrap="square" lIns="0" tIns="0" rIns="0" bIns="0" rtlCol="0" anchor="ctr"/>
           <a:lstStyle/>
           <a:p>
-            <a:pPr algn="l" indent="0" marL="0">
+            <a:pPr marL="0" indent="0" algn="l">
               <a:buNone/>
             </a:pPr>
             <a:r>
-              <a:rPr lang="en-US" sz="1050" b="1" dirty="0">
+              <a:rPr lang="en-US" sz="1600" b="1" dirty="0">
                 <a:solidFill>
                   <a:srgbClr val="B0413E"/>
                 </a:solidFill>
@@ -2362,7 +2495,7 @@
               </a:rPr>
               <a:t>GENERATED</a:t>
             </a:r>
-            <a:endParaRPr lang="en-US" sz="1600" dirty="0"/>
+            <a:endParaRPr lang="en-US" sz="2800" dirty="0"/>
           </a:p>
         </p:txBody>
       </p:sp>
@@ -2374,7 +2507,7 @@
         </p:nvSpPr>
         <p:spPr>
           <a:xfrm>
-            <a:off x="365760" y="3447288"/>
+            <a:off x="365760" y="3506844"/>
             <a:ext cx="2011680" cy="566928"/>
           </a:xfrm>
           <a:prstGeom prst="rect">
@@ -2390,6 +2523,13 @@
             <a:prstDash val="solid"/>
           </a:ln>
         </p:spPr>
+        <p:txBody>
+          <a:bodyPr/>
+          <a:lstStyle/>
+          <a:p>
+            <a:endParaRPr lang="en-US" sz="3200"/>
+          </a:p>
+        </p:txBody>
       </p:sp>
       <p:sp>
         <p:nvSpPr>
@@ -2399,7 +2539,7 @@
         </p:nvSpPr>
         <p:spPr>
           <a:xfrm>
-            <a:off x="438912" y="3474720"/>
+            <a:off x="438912" y="3534276"/>
             <a:ext cx="1883664" cy="521208"/>
           </a:xfrm>
           <a:prstGeom prst="rect">
@@ -2412,11 +2552,11 @@
           <a:bodyPr wrap="square" lIns="0" tIns="0" rIns="0" bIns="0" rtlCol="0" anchor="ctr"/>
           <a:lstStyle/>
           <a:p>
-            <a:pPr algn="l" indent="0" marL="0">
+            <a:pPr marL="0" indent="0" algn="l">
               <a:buNone/>
             </a:pPr>
             <a:r>
-              <a:rPr lang="en-US" sz="1050" b="1" dirty="0">
+              <a:rPr lang="en-US" sz="1600" b="1" dirty="0">
                 <a:solidFill>
                   <a:srgbClr val="1F497D"/>
                 </a:solidFill>
@@ -2426,7 +2566,7 @@
               </a:rPr>
               <a:t>Revivalism (19th c.)</a:t>
             </a:r>
-            <a:endParaRPr lang="en-US" sz="1600" dirty="0"/>
+            <a:endParaRPr lang="en-US" sz="2800" dirty="0"/>
           </a:p>
         </p:txBody>
       </p:sp>
@@ -2438,7 +2578,7 @@
         </p:nvSpPr>
         <p:spPr>
           <a:xfrm>
-            <a:off x="2377440" y="3447288"/>
+            <a:off x="2377440" y="3506844"/>
             <a:ext cx="4526280" cy="566928"/>
           </a:xfrm>
           <a:prstGeom prst="rect">
@@ -2454,6 +2594,13 @@
             <a:prstDash val="solid"/>
           </a:ln>
         </p:spPr>
+        <p:txBody>
+          <a:bodyPr/>
+          <a:lstStyle/>
+          <a:p>
+            <a:endParaRPr lang="en-US" sz="3200"/>
+          </a:p>
+        </p:txBody>
       </p:sp>
       <p:sp>
         <p:nvSpPr>
@@ -2463,7 +2610,7 @@
         </p:nvSpPr>
         <p:spPr>
           <a:xfrm>
-            <a:off x="2450592" y="3474720"/>
+            <a:off x="2450592" y="3534276"/>
             <a:ext cx="4398264" cy="521208"/>
           </a:xfrm>
           <a:prstGeom prst="rect">
@@ -2476,11 +2623,11 @@
           <a:bodyPr wrap="square" lIns="0" tIns="0" rIns="0" bIns="0" rtlCol="0" anchor="ctr"/>
           <a:lstStyle/>
           <a:p>
-            <a:pPr algn="l" indent="0" marL="0">
+            <a:pPr marL="0" indent="0" algn="l">
               <a:buNone/>
             </a:pPr>
             <a:r>
-              <a:rPr lang="en-US" sz="1050" dirty="0">
+              <a:rPr lang="en-US" sz="1600" dirty="0">
                 <a:solidFill>
                   <a:srgbClr val="000000"/>
                 </a:solidFill>
@@ -2488,9 +2635,31 @@
                 <a:ea typeface="Arial" pitchFamily="34" charset="-122"/>
                 <a:cs typeface="Arial" pitchFamily="34" charset="-120"/>
               </a:rPr>
-              <a:t>Demonstrated fruit — “look, God is using them”</a:t>
-            </a:r>
-            <a:endParaRPr lang="en-US" sz="1600" dirty="0"/>
+              <a:t>Demonstrated fruit </a:t>
+            </a:r>
+            <a:r>
+              <a:rPr lang="en-US" sz="1600">
+                <a:solidFill>
+                  <a:srgbClr val="000000"/>
+                </a:solidFill>
+                <a:latin typeface="Arial" pitchFamily="34" charset="0"/>
+                <a:ea typeface="Arial" pitchFamily="34" charset="-122"/>
+                <a:cs typeface="Arial" pitchFamily="34" charset="-120"/>
+              </a:rPr>
+              <a:t>→</a:t>
+            </a:r>
+            <a:r>
+              <a:rPr lang="en-US" sz="1600" dirty="0">
+                <a:solidFill>
+                  <a:srgbClr val="000000"/>
+                </a:solidFill>
+                <a:latin typeface="Arial" pitchFamily="34" charset="0"/>
+                <a:ea typeface="Arial" pitchFamily="34" charset="-122"/>
+                <a:cs typeface="Arial" pitchFamily="34" charset="-120"/>
+              </a:rPr>
+              <a:t> “look, God is using them”</a:t>
+            </a:r>
+            <a:endParaRPr lang="en-US" sz="2800" dirty="0"/>
           </a:p>
         </p:txBody>
       </p:sp>
@@ -2502,7 +2671,7 @@
         </p:nvSpPr>
         <p:spPr>
           <a:xfrm>
-            <a:off x="6903720" y="3447288"/>
+            <a:off x="6903720" y="3506844"/>
             <a:ext cx="1874520" cy="566928"/>
           </a:xfrm>
           <a:prstGeom prst="rect">
@@ -2518,6 +2687,13 @@
             <a:prstDash val="solid"/>
           </a:ln>
         </p:spPr>
+        <p:txBody>
+          <a:bodyPr/>
+          <a:lstStyle/>
+          <a:p>
+            <a:endParaRPr lang="en-US" sz="3200"/>
+          </a:p>
+        </p:txBody>
       </p:sp>
       <p:sp>
         <p:nvSpPr>
@@ -2527,7 +2703,7 @@
         </p:nvSpPr>
         <p:spPr>
           <a:xfrm>
-            <a:off x="6976872" y="3474720"/>
+            <a:off x="6976872" y="3534276"/>
             <a:ext cx="1746504" cy="521208"/>
           </a:xfrm>
           <a:prstGeom prst="rect">
@@ -2540,11 +2716,11 @@
           <a:bodyPr wrap="square" lIns="0" tIns="0" rIns="0" bIns="0" rtlCol="0" anchor="ctr"/>
           <a:lstStyle/>
           <a:p>
-            <a:pPr algn="l" indent="0" marL="0">
+            <a:pPr marL="0" indent="0" algn="l">
               <a:buNone/>
             </a:pPr>
             <a:r>
-              <a:rPr lang="en-US" sz="1050" b="1" dirty="0">
+              <a:rPr lang="en-US" sz="1600" b="1" dirty="0">
                 <a:solidFill>
                   <a:srgbClr val="B0413E"/>
                 </a:solidFill>
@@ -2554,7 +2730,7 @@
               </a:rPr>
               <a:t>GENERATED</a:t>
             </a:r>
-            <a:endParaRPr lang="en-US" sz="1600" dirty="0"/>
+            <a:endParaRPr lang="en-US" sz="2800" dirty="0"/>
           </a:p>
         </p:txBody>
       </p:sp>
@@ -2566,7 +2742,7 @@
         </p:nvSpPr>
         <p:spPr>
           <a:xfrm>
-            <a:off x="365760" y="4014216"/>
+            <a:off x="365760" y="4073772"/>
             <a:ext cx="2011680" cy="566928"/>
           </a:xfrm>
           <a:prstGeom prst="rect">
@@ -2582,6 +2758,13 @@
             <a:prstDash val="solid"/>
           </a:ln>
         </p:spPr>
+        <p:txBody>
+          <a:bodyPr/>
+          <a:lstStyle/>
+          <a:p>
+            <a:endParaRPr lang="en-US" sz="3200"/>
+          </a:p>
+        </p:txBody>
       </p:sp>
       <p:sp>
         <p:nvSpPr>
@@ -2591,7 +2774,7 @@
         </p:nvSpPr>
         <p:spPr>
           <a:xfrm>
-            <a:off x="438912" y="4041648"/>
+            <a:off x="438912" y="4101204"/>
             <a:ext cx="1883664" cy="521208"/>
           </a:xfrm>
           <a:prstGeom prst="rect">
@@ -2604,11 +2787,11 @@
           <a:bodyPr wrap="square" lIns="0" tIns="0" rIns="0" bIns="0" rtlCol="0" anchor="ctr"/>
           <a:lstStyle/>
           <a:p>
-            <a:pPr algn="l" indent="0" marL="0">
+            <a:pPr marL="0" indent="0" algn="l">
               <a:buNone/>
             </a:pPr>
             <a:r>
-              <a:rPr lang="en-US" sz="1050" b="1" dirty="0">
+              <a:rPr lang="en-US" sz="1600" b="1" dirty="0">
                 <a:solidFill>
                   <a:srgbClr val="1F497D"/>
                 </a:solidFill>
@@ -2618,7 +2801,7 @@
               </a:rPr>
               <a:t>Modern (20th c.)</a:t>
             </a:r>
-            <a:endParaRPr lang="en-US" sz="1600" dirty="0"/>
+            <a:endParaRPr lang="en-US" sz="2800" dirty="0"/>
           </a:p>
         </p:txBody>
       </p:sp>
@@ -2630,7 +2813,7 @@
         </p:nvSpPr>
         <p:spPr>
           <a:xfrm>
-            <a:off x="2377440" y="4014216"/>
+            <a:off x="2377440" y="4073772"/>
             <a:ext cx="4526280" cy="566928"/>
           </a:xfrm>
           <a:prstGeom prst="rect">
@@ -2646,6 +2829,13 @@
             <a:prstDash val="solid"/>
           </a:ln>
         </p:spPr>
+        <p:txBody>
+          <a:bodyPr/>
+          <a:lstStyle/>
+          <a:p>
+            <a:endParaRPr lang="en-US" sz="3200"/>
+          </a:p>
+        </p:txBody>
       </p:sp>
       <p:sp>
         <p:nvSpPr>
@@ -2655,7 +2845,7 @@
         </p:nvSpPr>
         <p:spPr>
           <a:xfrm>
-            <a:off x="2450592" y="4041648"/>
+            <a:off x="2450592" y="4101204"/>
             <a:ext cx="4398264" cy="521208"/>
           </a:xfrm>
           <a:prstGeom prst="rect">
@@ -2668,11 +2858,11 @@
           <a:bodyPr wrap="square" lIns="0" tIns="0" rIns="0" bIns="0" rtlCol="0" anchor="ctr"/>
           <a:lstStyle/>
           <a:p>
-            <a:pPr algn="l" indent="0" marL="0">
+            <a:pPr marL="0" indent="0" algn="l">
               <a:buNone/>
             </a:pPr>
             <a:r>
-              <a:rPr lang="en-US" sz="1050" dirty="0">
+              <a:rPr lang="en-US" sz="1600" dirty="0">
                 <a:solidFill>
                   <a:srgbClr val="000000"/>
                 </a:solidFill>
@@ -2682,7 +2872,7 @@
               </a:rPr>
               <a:t>Reconstructed background; cultural trajectory</a:t>
             </a:r>
-            <a:endParaRPr lang="en-US" sz="1600" dirty="0"/>
+            <a:endParaRPr lang="en-US" sz="2800" dirty="0"/>
           </a:p>
         </p:txBody>
       </p:sp>
@@ -2694,7 +2884,7 @@
         </p:nvSpPr>
         <p:spPr>
           <a:xfrm>
-            <a:off x="6903720" y="4014216"/>
+            <a:off x="6903720" y="4073772"/>
             <a:ext cx="1874520" cy="566928"/>
           </a:xfrm>
           <a:prstGeom prst="rect">
@@ -2710,6 +2900,13 @@
             <a:prstDash val="solid"/>
           </a:ln>
         </p:spPr>
+        <p:txBody>
+          <a:bodyPr/>
+          <a:lstStyle/>
+          <a:p>
+            <a:endParaRPr lang="en-US" sz="3200"/>
+          </a:p>
+        </p:txBody>
       </p:sp>
       <p:sp>
         <p:nvSpPr>
@@ -2719,7 +2916,7 @@
         </p:nvSpPr>
         <p:spPr>
           <a:xfrm>
-            <a:off x="6976872" y="4041648"/>
+            <a:off x="6976872" y="4101204"/>
             <a:ext cx="1746504" cy="521208"/>
           </a:xfrm>
           <a:prstGeom prst="rect">
@@ -2732,11 +2929,11 @@
           <a:bodyPr wrap="square" lIns="0" tIns="0" rIns="0" bIns="0" rtlCol="0" anchor="ctr"/>
           <a:lstStyle/>
           <a:p>
-            <a:pPr algn="l" indent="0" marL="0">
+            <a:pPr marL="0" indent="0" algn="l">
               <a:buNone/>
             </a:pPr>
             <a:r>
-              <a:rPr lang="en-US" sz="1050" b="1" dirty="0">
+              <a:rPr lang="en-US" sz="1600" b="1" dirty="0">
                 <a:solidFill>
                   <a:srgbClr val="B0413E"/>
                 </a:solidFill>
@@ -2746,7 +2943,7 @@
               </a:rPr>
               <a:t>GENERATED</a:t>
             </a:r>
-            <a:endParaRPr lang="en-US" sz="1600" dirty="0"/>
+            <a:endParaRPr lang="en-US" sz="2800" dirty="0"/>
           </a:p>
         </p:txBody>
       </p:sp>
@@ -2758,7 +2955,7 @@
         </p:nvSpPr>
         <p:spPr>
           <a:xfrm>
-            <a:off x="365760" y="4434840"/>
+            <a:off x="377215" y="4855464"/>
             <a:ext cx="8412480" cy="868680"/>
           </a:xfrm>
           <a:prstGeom prst="rect">
@@ -2771,11 +2968,11 @@
           <a:bodyPr wrap="square" lIns="0" tIns="0" rIns="0" bIns="0" rtlCol="0" anchor="t"/>
           <a:lstStyle/>
           <a:p>
-            <a:pPr algn="l" indent="0" marL="0">
+            <a:pPr marL="0" indent="0" algn="l">
               <a:buNone/>
             </a:pPr>
             <a:r>
-              <a:rPr lang="en-US" sz="1500" b="1" dirty="0">
+              <a:rPr lang="en-US" b="1" dirty="0">
                 <a:solidFill>
                   <a:srgbClr val="1F497D"/>
                 </a:solidFill>
@@ -2783,13 +2980,10 @@
                 <a:ea typeface="Arial" pitchFamily="34" charset="-122"/>
                 <a:cs typeface="Arial" pitchFamily="34" charset="-120"/>
               </a:rPr>
-              <a:t>Four centuries, four vocabularies — one move: </a:t>
-            </a:r>
-            <a:pPr algn="l" indent="0" marL="0">
-              <a:buNone/>
-            </a:pPr>
-            <a:r>
-              <a:rPr lang="en-US" sz="1450" dirty="0">
+              <a:t>Four centuries, four vocabularies → one move: </a:t>
+            </a:r>
+            <a:r>
+              <a:rPr lang="en-US" dirty="0">
                 <a:solidFill>
                   <a:srgbClr val="000000"/>
                 </a:solidFill>
@@ -2797,9 +2991,9 @@
                 <a:ea typeface="Arial" pitchFamily="34" charset="-122"/>
                 <a:cs typeface="Arial" pitchFamily="34" charset="-120"/>
               </a:rPr>
-              <a:t>authority relocated FROM appointment TO something claimable without it — revelation, fruit, insight, progress.</a:t>
-            </a:r>
-            <a:endParaRPr lang="en-US" sz="1600" dirty="0"/>
+              <a:t>authority relocated FROM appointment TO something claimable without it → revelation, fruit, insight, progress.</a:t>
+            </a:r>
+            <a:endParaRPr lang="en-US" sz="2000" dirty="0"/>
           </a:p>
         </p:txBody>
       </p:sp>
@@ -2811,7 +3005,7 @@
         </p:nvSpPr>
         <p:spPr>
           <a:xfrm>
-            <a:off x="365760" y="5440680"/>
+            <a:off x="377215" y="5856973"/>
             <a:ext cx="8412480" cy="822960"/>
           </a:xfrm>
           <a:prstGeom prst="rect">
@@ -2824,11 +3018,11 @@
           <a:bodyPr wrap="square" lIns="0" tIns="0" rIns="0" bIns="0" rtlCol="0" anchor="t"/>
           <a:lstStyle/>
           <a:p>
-            <a:pPr algn="l" indent="0" marL="0">
+            <a:pPr marL="0" indent="0" algn="l">
               <a:buNone/>
             </a:pPr>
             <a:r>
-              <a:rPr lang="en-US" sz="1400" i="1" dirty="0">
+              <a:rPr lang="en-US" i="1" dirty="0">
                 <a:solidFill>
                   <a:srgbClr val="000000"/>
                 </a:solidFill>
@@ -2838,11 +3032,8 @@
               </a:rPr>
               <a:t>None of these is stupid, and some of the people were godly. </a:t>
             </a:r>
-            <a:pPr algn="l" indent="0" marL="0">
-              <a:buNone/>
-            </a:pPr>
-            <a:r>
-              <a:rPr lang="en-US" sz="1400" dirty="0">
+            <a:r>
+              <a:rPr lang="en-US" dirty="0">
                 <a:solidFill>
                   <a:srgbClr val="000000"/>
                 </a:solidFill>
@@ -2852,7 +3043,7 @@
               </a:rPr>
               <a:t>The question is not “were they sincere?” (Week 3!) but “is that where the New Testament LOCATES authority?”</a:t>
             </a:r>
-            <a:endParaRPr lang="en-US" sz="1600" dirty="0"/>
+            <a:endParaRPr lang="en-US" sz="2000" dirty="0"/>
           </a:p>
         </p:txBody>
       </p:sp>
@@ -2870,26 +3061,26 @@
               <p:cTn id="2" dur="indefinite" nodeType="mainSeq">
                 <p:childTnLst>
                   <p:par>
-                    <p:cTn id="7" fill="hold">
+                    <p:cTn id="3" fill="hold">
                       <p:stCondLst>
                         <p:cond delay="indefinite"/>
                       </p:stCondLst>
                       <p:childTnLst>
                         <p:par>
-                          <p:cTn id="8" fill="hold">
+                          <p:cTn id="4" fill="hold">
                             <p:stCondLst>
                               <p:cond delay="0"/>
                             </p:stCondLst>
                             <p:childTnLst>
                               <p:par>
-                                <p:cTn id="3" presetID="42" presetClass="entr" presetSubtype="0" fill="hold" grpId="0" nodeType="clickEffect">
+                                <p:cTn id="5" presetID="42" presetClass="entr" presetSubtype="0" fill="hold" nodeType="clickEffect">
                                   <p:stCondLst>
                                     <p:cond delay="0"/>
                                   </p:stCondLst>
                                   <p:childTnLst>
                                     <p:set>
                                       <p:cBhvr>
-                                        <p:cTn id="4" dur="1" fill="hold">
+                                        <p:cTn id="6" dur="1" fill="hold">
                                           <p:stCondLst>
                                             <p:cond delay="0"/>
                                           </p:stCondLst>
@@ -2907,7 +3098,7 @@
                                     </p:set>
                                     <p:animEffect transition="in" filter="fade">
                                       <p:cBhvr>
-                                        <p:cTn id="5" dur="1000"/>
+                                        <p:cTn id="7" dur="1000"/>
                                         <p:tgtEl>
                                           <p:spTgt spid="4"/>
                                         </p:tgtEl>
@@ -2915,7 +3106,7 @@
                                     </p:animEffect>
                                     <p:anim calcmode="lin" valueType="num">
                                       <p:cBhvr>
-                                        <p:cTn id="6" dur="1000" fill="hold"/>
+                                        <p:cTn id="8" dur="1000" fill="hold"/>
                                         <p:tgtEl>
                                           <p:spTgt spid="4"/>
                                         </p:tgtEl>
@@ -2946,26 +3137,26 @@
                     </p:cTn>
                   </p:par>
                   <p:par>
-                    <p:cTn id="13" fill="hold">
+                    <p:cTn id="9" fill="hold">
                       <p:stCondLst>
                         <p:cond delay="indefinite"/>
                       </p:stCondLst>
                       <p:childTnLst>
                         <p:par>
-                          <p:cTn id="14" fill="hold">
+                          <p:cTn id="10" fill="hold">
                             <p:stCondLst>
                               <p:cond delay="0"/>
                             </p:stCondLst>
                             <p:childTnLst>
                               <p:par>
-                                <p:cTn id="9" presetID="42" presetClass="entr" presetSubtype="0" fill="hold" grpId="0" nodeType="clickEffect">
+                                <p:cTn id="11" presetID="42" presetClass="entr" presetSubtype="0" fill="hold" nodeType="clickEffect">
                                   <p:stCondLst>
                                     <p:cond delay="0"/>
                                   </p:stCondLst>
                                   <p:childTnLst>
                                     <p:set>
                                       <p:cBhvr>
-                                        <p:cTn id="10" dur="1" fill="hold">
+                                        <p:cTn id="12" dur="1" fill="hold">
                                           <p:stCondLst>
                                             <p:cond delay="0"/>
                                           </p:stCondLst>
@@ -2983,7 +3174,7 @@
                                     </p:set>
                                     <p:animEffect transition="in" filter="fade">
                                       <p:cBhvr>
-                                        <p:cTn id="11" dur="1000"/>
+                                        <p:cTn id="13" dur="1000"/>
                                         <p:tgtEl>
                                           <p:spTgt spid="35"/>
                                         </p:tgtEl>
@@ -2991,7 +3182,7 @@
                                     </p:animEffect>
                                     <p:anim calcmode="lin" valueType="num">
                                       <p:cBhvr>
-                                        <p:cTn id="12" dur="1000" fill="hold"/>
+                                        <p:cTn id="14" dur="1000" fill="hold"/>
                                         <p:tgtEl>
                                           <p:spTgt spid="35"/>
                                         </p:tgtEl>
@@ -3022,26 +3213,26 @@
                     </p:cTn>
                   </p:par>
                   <p:par>
-                    <p:cTn id="19" fill="hold">
+                    <p:cTn id="15" fill="hold">
                       <p:stCondLst>
                         <p:cond delay="indefinite"/>
                       </p:stCondLst>
                       <p:childTnLst>
                         <p:par>
-                          <p:cTn id="20" fill="hold">
+                          <p:cTn id="16" fill="hold">
                             <p:stCondLst>
                               <p:cond delay="0"/>
                             </p:stCondLst>
                             <p:childTnLst>
                               <p:par>
-                                <p:cTn id="15" presetID="42" presetClass="entr" presetSubtype="0" fill="hold" grpId="0" nodeType="clickEffect">
+                                <p:cTn id="17" presetID="42" presetClass="entr" presetSubtype="0" fill="hold" nodeType="clickEffect">
                                   <p:stCondLst>
                                     <p:cond delay="0"/>
                                   </p:stCondLst>
                                   <p:childTnLst>
                                     <p:set>
                                       <p:cBhvr>
-                                        <p:cTn id="16" dur="1" fill="hold">
+                                        <p:cTn id="18" dur="1" fill="hold">
                                           <p:stCondLst>
                                             <p:cond delay="0"/>
                                           </p:stCondLst>
@@ -3059,7 +3250,7 @@
                                     </p:set>
                                     <p:animEffect transition="in" filter="fade">
                                       <p:cBhvr>
-                                        <p:cTn id="17" dur="1000"/>
+                                        <p:cTn id="19" dur="1000"/>
                                         <p:tgtEl>
                                           <p:spTgt spid="36"/>
                                         </p:tgtEl>
@@ -3067,7 +3258,7 @@
                                     </p:animEffect>
                                     <p:anim calcmode="lin" valueType="num">
                                       <p:cBhvr>
-                                        <p:cTn id="18" dur="1000" fill="hold"/>
+                                        <p:cTn id="20" dur="1000" fill="hold"/>
                                         <p:tgtEl>
                                           <p:spTgt spid="36"/>
                                         </p:tgtEl>
@@ -3160,7 +3351,7 @@
           <a:bodyPr wrap="square" lIns="0" tIns="0" rIns="0" bIns="0" rtlCol="0" anchor="t"/>
           <a:lstStyle/>
           <a:p>
-            <a:pPr algn="l" indent="0" marL="0">
+            <a:pPr marL="0" indent="0" algn="l">
               <a:buNone/>
             </a:pPr>
             <a:r>
@@ -3199,11 +3390,11 @@
           <a:bodyPr wrap="square" lIns="0" tIns="0" rIns="0" bIns="0" rtlCol="0" anchor="t"/>
           <a:lstStyle/>
           <a:p>
-            <a:pPr algn="l" indent="0" marL="0">
+            <a:pPr marL="0" indent="0" algn="l">
               <a:buNone/>
             </a:pPr>
             <a:r>
-              <a:rPr lang="en-US" sz="1300" b="1" dirty="0">
+              <a:rPr lang="en-US" sz="2000" b="1" dirty="0">
                 <a:solidFill>
                   <a:srgbClr val="4F81BD"/>
                 </a:solidFill>
@@ -3211,9 +3402,9 @@
                 <a:ea typeface="Arial" pitchFamily="34" charset="-122"/>
                 <a:cs typeface="Arial" pitchFamily="34" charset="-120"/>
               </a:rPr>
-              <a:t>1 Corinthians 14 — gifting does not adjudicate order</a:t>
-            </a:r>
-            <a:endParaRPr lang="en-US" sz="1600" dirty="0"/>
+              <a:t>1 Corinthians 14 → gifting does not adjudicate order</a:t>
+            </a:r>
+            <a:endParaRPr lang="en-US" sz="2800" dirty="0"/>
           </a:p>
         </p:txBody>
       </p:sp>
@@ -3226,7 +3417,7 @@
         <p:spPr>
           <a:xfrm>
             <a:off x="365760" y="1051560"/>
-            <a:ext cx="8412480" cy="777240"/>
+            <a:ext cx="8412480" cy="616373"/>
           </a:xfrm>
           <a:prstGeom prst="rect">
             <a:avLst/>
@@ -3238,11 +3429,11 @@
           <a:bodyPr wrap="square" lIns="0" tIns="0" rIns="0" bIns="0" rtlCol="0" anchor="t"/>
           <a:lstStyle/>
           <a:p>
-            <a:pPr algn="l" indent="0" marL="0">
+            <a:pPr marL="0" indent="0" algn="l">
               <a:buNone/>
             </a:pPr>
             <a:r>
-              <a:rPr lang="en-US" sz="1500" b="1" dirty="0">
+              <a:rPr lang="en-US" b="1" dirty="0">
                 <a:solidFill>
                   <a:srgbClr val="1F497D"/>
                 </a:solidFill>
@@ -3252,11 +3443,8 @@
               </a:rPr>
               <a:t>The setting matters: </a:t>
             </a:r>
-            <a:pPr algn="l" indent="0" marL="0">
-              <a:buNone/>
-            </a:pPr>
-            <a:r>
-              <a:rPr lang="en-US" sz="1450" dirty="0">
+            <a:r>
+              <a:rPr lang="en-US" dirty="0">
                 <a:solidFill>
                   <a:srgbClr val="000000"/>
                 </a:solidFill>
@@ -3264,9 +3452,9 @@
                 <a:ea typeface="Arial" pitchFamily="34" charset="-122"/>
                 <a:cs typeface="Arial" pitchFamily="34" charset="-120"/>
               </a:rPr>
-              <a:t>1 Corinthians 12–14 is THE gifts passage — tongues, prophecy, the Spirit’s manifestations. And right there, Paul writes:</a:t>
-            </a:r>
-            <a:endParaRPr lang="en-US" sz="1600" dirty="0"/>
+              <a:t>1 Corinthians 12–14 is THE gifts passage → tongues, prophecy, the Spirit’s manifestations. And right there, Paul writes:</a:t>
+            </a:r>
+            <a:endParaRPr lang="en-US" sz="2000" dirty="0"/>
           </a:p>
         </p:txBody>
       </p:sp>
@@ -3278,7 +3466,156 @@
         </p:nvSpPr>
         <p:spPr>
           <a:xfrm>
-            <a:off x="365760" y="1920240"/>
+            <a:off x="365760" y="1940559"/>
+            <a:ext cx="8412480" cy="1271693"/>
+          </a:xfrm>
+          <a:prstGeom prst="rect">
+            <a:avLst/>
+          </a:prstGeom>
+          <a:noFill/>
+          <a:ln/>
+        </p:spPr>
+        <p:txBody>
+          <a:bodyPr wrap="square" lIns="0" tIns="0" rIns="0" bIns="0" rtlCol="0" anchor="t"/>
+          <a:lstStyle/>
+          <a:p>
+            <a:pPr marL="0" indent="0" algn="l">
+              <a:buNone/>
+            </a:pPr>
+            <a:r>
+              <a:rPr lang="en-US" sz="2000" b="1" i="1" dirty="0">
+                <a:solidFill>
+                  <a:srgbClr val="000000"/>
+                </a:solidFill>
+                <a:latin typeface="Arial" pitchFamily="34" charset="0"/>
+                <a:ea typeface="Arial" pitchFamily="34" charset="-122"/>
+                <a:cs typeface="Arial" pitchFamily="34" charset="-120"/>
+              </a:rPr>
+              <a:t>“If anyone considers himself a prophet or spiritual person, he should acknowledge that what I write to you is the Lord’s command. If someone does not recognize this, he is not recognized.” </a:t>
+            </a:r>
+          </a:p>
+          <a:p>
+            <a:pPr marL="0" indent="0" algn="l">
+              <a:buNone/>
+            </a:pPr>
+            <a:r>
+              <a:rPr lang="en-US" b="1" dirty="0">
+                <a:solidFill>
+                  <a:srgbClr val="000000"/>
+                </a:solidFill>
+                <a:latin typeface="Arial" pitchFamily="34" charset="0"/>
+                <a:ea typeface="Arial" pitchFamily="34" charset="-122"/>
+                <a:cs typeface="Arial" pitchFamily="34" charset="-120"/>
+              </a:rPr>
+              <a:t>(1 Corinthians 14:37–38)</a:t>
+            </a:r>
+            <a:endParaRPr lang="en-US" sz="2000" dirty="0"/>
+          </a:p>
+        </p:txBody>
+      </p:sp>
+      <p:sp>
+        <p:nvSpPr>
+          <p:cNvPr id="6" name="b3"/>
+          <p:cNvSpPr txBox="1"/>
+          <p:nvPr/>
+        </p:nvSpPr>
+        <p:spPr>
+          <a:xfrm>
+            <a:off x="365760" y="3565312"/>
+            <a:ext cx="8412480" cy="1202267"/>
+          </a:xfrm>
+          <a:prstGeom prst="rect">
+            <a:avLst/>
+          </a:prstGeom>
+          <a:noFill/>
+          <a:ln/>
+        </p:spPr>
+        <p:txBody>
+          <a:bodyPr wrap="square" lIns="0" tIns="0" rIns="0" bIns="0" rtlCol="0" anchor="t"/>
+          <a:lstStyle/>
+          <a:p>
+            <a:pPr marL="0" indent="0" algn="l">
+              <a:buNone/>
+            </a:pPr>
+            <a:r>
+              <a:rPr lang="en-US" b="1" dirty="0">
+                <a:solidFill>
+                  <a:srgbClr val="1F497D"/>
+                </a:solidFill>
+                <a:latin typeface="Arial" pitchFamily="34" charset="0"/>
+                <a:ea typeface="Arial" pitchFamily="34" charset="-122"/>
+                <a:cs typeface="Arial" pitchFamily="34" charset="-120"/>
+              </a:rPr>
+              <a:t>Look at whom Paul names: </a:t>
+            </a:r>
+            <a:r>
+              <a:rPr lang="en-US" dirty="0">
+                <a:solidFill>
+                  <a:srgbClr val="000000"/>
+                </a:solidFill>
+                <a:latin typeface="Arial" pitchFamily="34" charset="0"/>
+                <a:ea typeface="Arial" pitchFamily="34" charset="-122"/>
+                <a:cs typeface="Arial" pitchFamily="34" charset="-120"/>
+              </a:rPr>
+              <a:t>not skeptics → </a:t>
+            </a:r>
+            <a:r>
+              <a:rPr lang="en-US" b="1" dirty="0">
+                <a:solidFill>
+                  <a:srgbClr val="000000"/>
+                </a:solidFill>
+                <a:latin typeface="Arial" pitchFamily="34" charset="0"/>
+                <a:ea typeface="Arial" pitchFamily="34" charset="-122"/>
+                <a:cs typeface="Arial" pitchFamily="34" charset="-120"/>
+              </a:rPr>
+              <a:t>prophets and spiritual people</a:t>
+            </a:r>
+            <a:r>
+              <a:rPr lang="en-US" dirty="0">
+                <a:solidFill>
+                  <a:srgbClr val="000000"/>
+                </a:solidFill>
+                <a:latin typeface="Arial" pitchFamily="34" charset="0"/>
+                <a:ea typeface="Arial" pitchFamily="34" charset="-122"/>
+                <a:cs typeface="Arial" pitchFamily="34" charset="-120"/>
+              </a:rPr>
+              <a:t>. The two most impressive credentials in that church. And he subordinates BOTH to what he writes. He does not deny they have gifts → the Corinthian gifts were real. He denies that gifts adjudicate </a:t>
+            </a:r>
+            <a:r>
+              <a:rPr lang="en-US" b="1" i="1" dirty="0">
+                <a:solidFill>
+                  <a:srgbClr val="1F497D"/>
+                </a:solidFill>
+                <a:latin typeface="Arial" pitchFamily="34" charset="0"/>
+                <a:ea typeface="Arial" pitchFamily="34" charset="-122"/>
+                <a:cs typeface="Arial" pitchFamily="34" charset="-120"/>
+              </a:rPr>
+              <a:t>order</a:t>
+            </a:r>
+            <a:r>
+              <a:rPr lang="en-US" dirty="0">
+                <a:solidFill>
+                  <a:srgbClr val="000000"/>
+                </a:solidFill>
+                <a:latin typeface="Arial" pitchFamily="34" charset="0"/>
+                <a:ea typeface="Arial" pitchFamily="34" charset="-122"/>
+                <a:cs typeface="Arial" pitchFamily="34" charset="-120"/>
+              </a:rPr>
+              <a:t>.</a:t>
+            </a:r>
+            <a:endParaRPr lang="en-US" sz="2000" dirty="0"/>
+          </a:p>
+        </p:txBody>
+      </p:sp>
+      <p:sp>
+        <p:nvSpPr>
+          <p:cNvPr id="7" name="b4"/>
+          <p:cNvSpPr txBox="1"/>
+          <p:nvPr/>
+        </p:nvSpPr>
+        <p:spPr>
+          <a:xfrm>
+            <a:off x="365760" y="5120640"/>
             <a:ext cx="8412480" cy="1371600"/>
           </a:xfrm>
           <a:prstGeom prst="rect">
@@ -3291,11 +3628,22 @@
           <a:bodyPr wrap="square" lIns="0" tIns="0" rIns="0" bIns="0" rtlCol="0" anchor="t"/>
           <a:lstStyle/>
           <a:p>
-            <a:pPr algn="l" indent="0" marL="0">
+            <a:pPr marL="0" indent="0" algn="l">
               <a:buNone/>
             </a:pPr>
             <a:r>
-              <a:rPr lang="en-US" sz="1600" b="1" i="1" dirty="0">
+              <a:rPr lang="en-US" b="1" dirty="0">
+                <a:solidFill>
+                  <a:srgbClr val="1F497D"/>
+                </a:solidFill>
+                <a:latin typeface="Arial" pitchFamily="34" charset="0"/>
+                <a:ea typeface="Arial" pitchFamily="34" charset="-122"/>
+                <a:cs typeface="Arial" pitchFamily="34" charset="-120"/>
+              </a:rPr>
+              <a:t>And v.38 attaches a sanction: </a:t>
+            </a:r>
+            <a:r>
+              <a:rPr lang="en-US" dirty="0">
                 <a:solidFill>
                   <a:srgbClr val="000000"/>
                 </a:solidFill>
@@ -3303,52 +3651,10 @@
                 <a:ea typeface="Arial" pitchFamily="34" charset="-122"/>
                 <a:cs typeface="Arial" pitchFamily="34" charset="-120"/>
               </a:rPr>
-              <a:t>“If anyone considers himself a prophet or spiritual person, he should acknowledge that what I write to you is the Lord’s command. If someone does not recognize this, he is not recognized.” </a:t>
-            </a:r>
-            <a:pPr algn="l" indent="0" marL="0">
-              <a:buNone/>
-            </a:pPr>
-            <a:r>
-              <a:rPr lang="en-US" sz="1500" b="1" dirty="0">
-                <a:solidFill>
-                  <a:srgbClr val="000000"/>
-                </a:solidFill>
-                <a:latin typeface="Arial" pitchFamily="34" charset="0"/>
-                <a:ea typeface="Arial" pitchFamily="34" charset="-122"/>
-                <a:cs typeface="Arial" pitchFamily="34" charset="-120"/>
-              </a:rPr>
-              <a:t>(1 Corinthians 14:37–38)</a:t>
-            </a:r>
-            <a:endParaRPr lang="en-US" sz="1600" dirty="0"/>
-          </a:p>
-        </p:txBody>
-      </p:sp>
-      <p:sp>
-        <p:nvSpPr>
-          <p:cNvPr id="6" name="b3"/>
-          <p:cNvSpPr txBox="1"/>
-          <p:nvPr/>
-        </p:nvSpPr>
-        <p:spPr>
-          <a:xfrm>
-            <a:off x="365760" y="3429000"/>
-            <a:ext cx="8412480" cy="1280160"/>
-          </a:xfrm>
-          <a:prstGeom prst="rect">
-            <a:avLst/>
-          </a:prstGeom>
-          <a:noFill/>
-          <a:ln/>
-        </p:spPr>
-        <p:txBody>
-          <a:bodyPr wrap="square" lIns="0" tIns="0" rIns="0" bIns="0" rtlCol="0" anchor="t"/>
-          <a:lstStyle/>
-          <a:p>
-            <a:pPr algn="l" indent="0" marL="0">
-              <a:buNone/>
-            </a:pPr>
-            <a:r>
-              <a:rPr lang="en-US" sz="1450" b="1" dirty="0">
+              <a:t>refusing to recognize apostolic authority is itself disqualifying. So every claim that bypasses the apostolic word → “the Spirit told me,” “look at the fruit,” “we’ve grown past this” → runs into the wall Paul built here, in the gifts chapter itself. Gifting is given to the whole body; </a:t>
+            </a:r>
+            <a:r>
+              <a:rPr lang="en-US" b="1" dirty="0">
                 <a:solidFill>
                   <a:srgbClr val="1F497D"/>
                 </a:solidFill>
@@ -3356,146 +3662,9 @@
                 <a:ea typeface="Arial" pitchFamily="34" charset="-122"/>
                 <a:cs typeface="Arial" pitchFamily="34" charset="-120"/>
               </a:rPr>
-              <a:t>Look at whom Paul names: </a:t>
-            </a:r>
-            <a:pPr algn="l" indent="0" marL="0">
-              <a:buNone/>
-            </a:pPr>
-            <a:r>
-              <a:rPr lang="en-US" sz="1450" dirty="0">
-                <a:solidFill>
-                  <a:srgbClr val="000000"/>
-                </a:solidFill>
-                <a:latin typeface="Arial" pitchFamily="34" charset="0"/>
-                <a:ea typeface="Arial" pitchFamily="34" charset="-122"/>
-                <a:cs typeface="Arial" pitchFamily="34" charset="-120"/>
-              </a:rPr>
-              <a:t>not skeptics — </a:t>
-            </a:r>
-            <a:pPr algn="l" indent="0" marL="0">
-              <a:buNone/>
-            </a:pPr>
-            <a:r>
-              <a:rPr lang="en-US" sz="1450" b="1" dirty="0">
-                <a:solidFill>
-                  <a:srgbClr val="000000"/>
-                </a:solidFill>
-                <a:latin typeface="Arial" pitchFamily="34" charset="0"/>
-                <a:ea typeface="Arial" pitchFamily="34" charset="-122"/>
-                <a:cs typeface="Arial" pitchFamily="34" charset="-120"/>
-              </a:rPr>
-              <a:t>prophets and spiritual people</a:t>
-            </a:r>
-            <a:pPr algn="l" indent="0" marL="0">
-              <a:buNone/>
-            </a:pPr>
-            <a:r>
-              <a:rPr lang="en-US" sz="1450" dirty="0">
-                <a:solidFill>
-                  <a:srgbClr val="000000"/>
-                </a:solidFill>
-                <a:latin typeface="Arial" pitchFamily="34" charset="0"/>
-                <a:ea typeface="Arial" pitchFamily="34" charset="-122"/>
-                <a:cs typeface="Arial" pitchFamily="34" charset="-120"/>
-              </a:rPr>
-              <a:t>. The two most impressive credentials in that church. And he subordinates BOTH to what he writes. He does not deny they have gifts — the Corinthian gifts were real. He denies that gifts adjudicate </a:t>
-            </a:r>
-            <a:pPr algn="l" indent="0" marL="0">
-              <a:buNone/>
-            </a:pPr>
-            <a:r>
-              <a:rPr lang="en-US" sz="1450" b="1" i="1" dirty="0">
-                <a:solidFill>
-                  <a:srgbClr val="1F497D"/>
-                </a:solidFill>
-                <a:latin typeface="Arial" pitchFamily="34" charset="0"/>
-                <a:ea typeface="Arial" pitchFamily="34" charset="-122"/>
-                <a:cs typeface="Arial" pitchFamily="34" charset="-120"/>
-              </a:rPr>
-              <a:t>order</a:t>
-            </a:r>
-            <a:pPr algn="l" indent="0" marL="0">
-              <a:buNone/>
-            </a:pPr>
-            <a:r>
-              <a:rPr lang="en-US" sz="1450" dirty="0">
-                <a:solidFill>
-                  <a:srgbClr val="000000"/>
-                </a:solidFill>
-                <a:latin typeface="Arial" pitchFamily="34" charset="0"/>
-                <a:ea typeface="Arial" pitchFamily="34" charset="-122"/>
-                <a:cs typeface="Arial" pitchFamily="34" charset="-120"/>
-              </a:rPr>
-              <a:t>.</a:t>
-            </a:r>
-            <a:endParaRPr lang="en-US" sz="1600" dirty="0"/>
-          </a:p>
-        </p:txBody>
-      </p:sp>
-      <p:sp>
-        <p:nvSpPr>
-          <p:cNvPr id="7" name="b4"/>
-          <p:cNvSpPr txBox="1"/>
-          <p:nvPr/>
-        </p:nvSpPr>
-        <p:spPr>
-          <a:xfrm>
-            <a:off x="365760" y="4800600"/>
-            <a:ext cx="8412480" cy="1371600"/>
-          </a:xfrm>
-          <a:prstGeom prst="rect">
-            <a:avLst/>
-          </a:prstGeom>
-          <a:noFill/>
-          <a:ln/>
-        </p:spPr>
-        <p:txBody>
-          <a:bodyPr wrap="square" lIns="0" tIns="0" rIns="0" bIns="0" rtlCol="0" anchor="t"/>
-          <a:lstStyle/>
-          <a:p>
-            <a:pPr algn="l" indent="0" marL="0">
-              <a:buNone/>
-            </a:pPr>
-            <a:r>
-              <a:rPr lang="en-US" sz="1450" b="1" dirty="0">
-                <a:solidFill>
-                  <a:srgbClr val="1F497D"/>
-                </a:solidFill>
-                <a:latin typeface="Arial" pitchFamily="34" charset="0"/>
-                <a:ea typeface="Arial" pitchFamily="34" charset="-122"/>
-                <a:cs typeface="Arial" pitchFamily="34" charset="-120"/>
-              </a:rPr>
-              <a:t>And v.38 attaches a sanction: </a:t>
-            </a:r>
-            <a:pPr algn="l" indent="0" marL="0">
-              <a:buNone/>
-            </a:pPr>
-            <a:r>
-              <a:rPr lang="en-US" sz="1400" dirty="0">
-                <a:solidFill>
-                  <a:srgbClr val="000000"/>
-                </a:solidFill>
-                <a:latin typeface="Arial" pitchFamily="34" charset="0"/>
-                <a:ea typeface="Arial" pitchFamily="34" charset="-122"/>
-                <a:cs typeface="Arial" pitchFamily="34" charset="-120"/>
-              </a:rPr>
-              <a:t>refusing to recognize apostolic authority is itself disqualifying. So every claim that bypasses the apostolic word — “the Spirit told me,” “look at the fruit,” “we’ve grown past this” — runs into the wall Paul built here, in the gifts chapter itself. Gifting is given to the whole body; </a:t>
-            </a:r>
-            <a:pPr algn="l" indent="0" marL="0">
-              <a:buNone/>
-            </a:pPr>
-            <a:r>
-              <a:rPr lang="en-US" sz="1450" b="1" dirty="0">
-                <a:solidFill>
-                  <a:srgbClr val="1F497D"/>
-                </a:solidFill>
-                <a:latin typeface="Arial" pitchFamily="34" charset="0"/>
-                <a:ea typeface="Arial" pitchFamily="34" charset="-122"/>
-                <a:cs typeface="Arial" pitchFamily="34" charset="-120"/>
-              </a:rPr>
               <a:t>authority is conferred by the apostolic word.</a:t>
             </a:r>
-            <a:endParaRPr lang="en-US" sz="1600" dirty="0"/>
+            <a:endParaRPr lang="en-US" sz="2000" dirty="0"/>
           </a:p>
         </p:txBody>
       </p:sp>
@@ -3513,26 +3682,26 @@
               <p:cTn id="2" dur="indefinite" nodeType="mainSeq">
                 <p:childTnLst>
                   <p:par>
-                    <p:cTn id="7" fill="hold">
+                    <p:cTn id="3" fill="hold">
                       <p:stCondLst>
                         <p:cond delay="indefinite"/>
                       </p:stCondLst>
                       <p:childTnLst>
                         <p:par>
-                          <p:cTn id="8" fill="hold">
+                          <p:cTn id="4" fill="hold">
                             <p:stCondLst>
                               <p:cond delay="0"/>
                             </p:stCondLst>
                             <p:childTnLst>
                               <p:par>
-                                <p:cTn id="3" presetID="42" presetClass="entr" presetSubtype="0" fill="hold" grpId="0" nodeType="clickEffect">
+                                <p:cTn id="5" presetID="42" presetClass="entr" presetSubtype="0" fill="hold" nodeType="clickEffect">
                                   <p:stCondLst>
                                     <p:cond delay="0"/>
                                   </p:stCondLst>
                                   <p:childTnLst>
                                     <p:set>
                                       <p:cBhvr>
-                                        <p:cTn id="4" dur="1" fill="hold">
+                                        <p:cTn id="6" dur="1" fill="hold">
                                           <p:stCondLst>
                                             <p:cond delay="0"/>
                                           </p:stCondLst>
@@ -3550,7 +3719,7 @@
                                     </p:set>
                                     <p:animEffect transition="in" filter="fade">
                                       <p:cBhvr>
-                                        <p:cTn id="5" dur="1000"/>
+                                        <p:cTn id="7" dur="1000"/>
                                         <p:tgtEl>
                                           <p:spTgt spid="4"/>
                                         </p:tgtEl>
@@ -3558,7 +3727,7 @@
                                     </p:animEffect>
                                     <p:anim calcmode="lin" valueType="num">
                                       <p:cBhvr>
-                                        <p:cTn id="6" dur="1000" fill="hold"/>
+                                        <p:cTn id="8" dur="1000" fill="hold"/>
                                         <p:tgtEl>
                                           <p:spTgt spid="4"/>
                                         </p:tgtEl>
@@ -3589,26 +3758,26 @@
                     </p:cTn>
                   </p:par>
                   <p:par>
-                    <p:cTn id="13" fill="hold">
+                    <p:cTn id="9" fill="hold">
                       <p:stCondLst>
                         <p:cond delay="indefinite"/>
                       </p:stCondLst>
                       <p:childTnLst>
                         <p:par>
-                          <p:cTn id="14" fill="hold">
+                          <p:cTn id="10" fill="hold">
                             <p:stCondLst>
                               <p:cond delay="0"/>
                             </p:stCondLst>
                             <p:childTnLst>
                               <p:par>
-                                <p:cTn id="9" presetID="42" presetClass="entr" presetSubtype="0" fill="hold" grpId="0" nodeType="clickEffect">
+                                <p:cTn id="11" presetID="42" presetClass="entr" presetSubtype="0" fill="hold" nodeType="clickEffect">
                                   <p:stCondLst>
                                     <p:cond delay="0"/>
                                   </p:stCondLst>
                                   <p:childTnLst>
                                     <p:set>
                                       <p:cBhvr>
-                                        <p:cTn id="10" dur="1" fill="hold">
+                                        <p:cTn id="12" dur="1" fill="hold">
                                           <p:stCondLst>
                                             <p:cond delay="0"/>
                                           </p:stCondLst>
@@ -3626,7 +3795,7 @@
                                     </p:set>
                                     <p:animEffect transition="in" filter="fade">
                                       <p:cBhvr>
-                                        <p:cTn id="11" dur="1000"/>
+                                        <p:cTn id="13" dur="1000"/>
                                         <p:tgtEl>
                                           <p:spTgt spid="5"/>
                                         </p:tgtEl>
@@ -3634,7 +3803,7 @@
                                     </p:animEffect>
                                     <p:anim calcmode="lin" valueType="num">
                                       <p:cBhvr>
-                                        <p:cTn id="12" dur="1000" fill="hold"/>
+                                        <p:cTn id="14" dur="1000" fill="hold"/>
                                         <p:tgtEl>
                                           <p:spTgt spid="5"/>
                                         </p:tgtEl>
@@ -3665,26 +3834,26 @@
                     </p:cTn>
                   </p:par>
                   <p:par>
-                    <p:cTn id="19" fill="hold">
+                    <p:cTn id="15" fill="hold">
                       <p:stCondLst>
                         <p:cond delay="indefinite"/>
                       </p:stCondLst>
                       <p:childTnLst>
                         <p:par>
-                          <p:cTn id="20" fill="hold">
+                          <p:cTn id="16" fill="hold">
                             <p:stCondLst>
                               <p:cond delay="0"/>
                             </p:stCondLst>
                             <p:childTnLst>
                               <p:par>
-                                <p:cTn id="15" presetID="42" presetClass="entr" presetSubtype="0" fill="hold" grpId="0" nodeType="clickEffect">
+                                <p:cTn id="17" presetID="42" presetClass="entr" presetSubtype="0" fill="hold" nodeType="clickEffect">
                                   <p:stCondLst>
                                     <p:cond delay="0"/>
                                   </p:stCondLst>
                                   <p:childTnLst>
                                     <p:set>
                                       <p:cBhvr>
-                                        <p:cTn id="16" dur="1" fill="hold">
+                                        <p:cTn id="18" dur="1" fill="hold">
                                           <p:stCondLst>
                                             <p:cond delay="0"/>
                                           </p:stCondLst>
@@ -3702,7 +3871,7 @@
                                     </p:set>
                                     <p:animEffect transition="in" filter="fade">
                                       <p:cBhvr>
-                                        <p:cTn id="17" dur="1000"/>
+                                        <p:cTn id="19" dur="1000"/>
                                         <p:tgtEl>
                                           <p:spTgt spid="6"/>
                                         </p:tgtEl>
@@ -3710,7 +3879,7 @@
                                     </p:animEffect>
                                     <p:anim calcmode="lin" valueType="num">
                                       <p:cBhvr>
-                                        <p:cTn id="18" dur="1000" fill="hold"/>
+                                        <p:cTn id="20" dur="1000" fill="hold"/>
                                         <p:tgtEl>
                                           <p:spTgt spid="6"/>
                                         </p:tgtEl>
@@ -3741,26 +3910,26 @@
                     </p:cTn>
                   </p:par>
                   <p:par>
-                    <p:cTn id="25" fill="hold">
+                    <p:cTn id="21" fill="hold">
                       <p:stCondLst>
                         <p:cond delay="indefinite"/>
                       </p:stCondLst>
                       <p:childTnLst>
                         <p:par>
-                          <p:cTn id="26" fill="hold">
+                          <p:cTn id="22" fill="hold">
                             <p:stCondLst>
                               <p:cond delay="0"/>
                             </p:stCondLst>
                             <p:childTnLst>
                               <p:par>
-                                <p:cTn id="21" presetID="42" presetClass="entr" presetSubtype="0" fill="hold" grpId="0" nodeType="clickEffect">
+                                <p:cTn id="23" presetID="42" presetClass="entr" presetSubtype="0" fill="hold" nodeType="clickEffect">
                                   <p:stCondLst>
                                     <p:cond delay="0"/>
                                   </p:stCondLst>
                                   <p:childTnLst>
                                     <p:set>
                                       <p:cBhvr>
-                                        <p:cTn id="22" dur="1" fill="hold">
+                                        <p:cTn id="24" dur="1" fill="hold">
                                           <p:stCondLst>
                                             <p:cond delay="0"/>
                                           </p:stCondLst>
@@ -3778,7 +3947,7 @@
                                     </p:set>
                                     <p:animEffect transition="in" filter="fade">
                                       <p:cBhvr>
-                                        <p:cTn id="23" dur="1000"/>
+                                        <p:cTn id="25" dur="1000"/>
                                         <p:tgtEl>
                                           <p:spTgt spid="7"/>
                                         </p:tgtEl>
@@ -3786,7 +3955,7 @@
                                     </p:animEffect>
                                     <p:anim calcmode="lin" valueType="num">
                                       <p:cBhvr>
-                                        <p:cTn id="24" dur="1000" fill="hold"/>
+                                        <p:cTn id="26" dur="1000" fill="hold"/>
                                         <p:tgtEl>
                                           <p:spTgt spid="7"/>
                                         </p:tgtEl>
@@ -3879,7 +4048,7 @@
           <a:bodyPr wrap="square" lIns="0" tIns="0" rIns="0" bIns="0" rtlCol="0" anchor="t"/>
           <a:lstStyle/>
           <a:p>
-            <a:pPr algn="l" indent="0" marL="0">
+            <a:pPr marL="0" indent="0" algn="l">
               <a:buNone/>
             </a:pPr>
             <a:r>
@@ -3905,7 +4074,7 @@
         </p:nvSpPr>
         <p:spPr>
           <a:xfrm>
-            <a:off x="228600" y="566928"/>
+            <a:off x="228600" y="452628"/>
             <a:ext cx="8686800" cy="320040"/>
           </a:xfrm>
           <a:prstGeom prst="rect">
@@ -3918,11 +4087,11 @@
           <a:bodyPr wrap="square" lIns="0" tIns="0" rIns="0" bIns="0" rtlCol="0" anchor="t"/>
           <a:lstStyle/>
           <a:p>
-            <a:pPr algn="l" indent="0" marL="0">
+            <a:pPr marL="0" indent="0" algn="l">
               <a:buNone/>
             </a:pPr>
             <a:r>
-              <a:rPr lang="en-US" sz="1300" b="1" dirty="0">
+              <a:rPr lang="en-US" sz="2000" b="1" dirty="0">
                 <a:solidFill>
                   <a:srgbClr val="4F81BD"/>
                 </a:solidFill>
@@ -3930,9 +4099,9 @@
                 <a:ea typeface="Arial" pitchFamily="34" charset="-122"/>
                 <a:cs typeface="Arial" pitchFamily="34" charset="-120"/>
               </a:rPr>
-              <a:t>Authority is delivered and received — never self-generated</a:t>
-            </a:r>
-            <a:endParaRPr lang="en-US" sz="1600" dirty="0"/>
+              <a:t>Authority is delivered and received → never self-generated</a:t>
+            </a:r>
+            <a:endParaRPr lang="en-US" sz="2800" dirty="0"/>
           </a:p>
         </p:txBody>
       </p:sp>
@@ -3944,8 +4113,8 @@
         </p:nvSpPr>
         <p:spPr>
           <a:xfrm>
-            <a:off x="365760" y="1005840"/>
-            <a:ext cx="8412480" cy="1691640"/>
+            <a:off x="365760" y="876555"/>
+            <a:ext cx="8412480" cy="2191172"/>
           </a:xfrm>
           <a:prstGeom prst="rect">
             <a:avLst/>
@@ -3957,11 +4126,11 @@
           <a:bodyPr wrap="square" lIns="0" tIns="0" rIns="0" bIns="0" rtlCol="0" anchor="t"/>
           <a:lstStyle/>
           <a:p>
-            <a:pPr algn="l" indent="0" marL="0">
+            <a:pPr marL="0" indent="0" algn="l">
               <a:buNone/>
             </a:pPr>
             <a:r>
-              <a:rPr lang="en-US" sz="1400" b="1" dirty="0">
+              <a:rPr lang="en-US" sz="1600" b="1" dirty="0">
                 <a:solidFill>
                   <a:srgbClr val="1F497D"/>
                 </a:solidFill>
@@ -3972,11 +4141,47 @@
               <a:t>The New Testament describes authority as a deposit passed down a chain:
 </a:t>
             </a:r>
-            <a:pPr algn="l" indent="0" marL="0">
+            <a:r>
+              <a:rPr lang="en-US" sz="1600" dirty="0">
+                <a:solidFill>
+                  <a:srgbClr val="000000"/>
+                </a:solidFill>
+                <a:latin typeface="Arial" pitchFamily="34" charset="0"/>
+                <a:ea typeface="Arial" pitchFamily="34" charset="-122"/>
+                <a:cs typeface="Arial" pitchFamily="34" charset="-120"/>
+              </a:rPr>
+              <a:t>▪  Appointed, not attained → </a:t>
+            </a:r>
+            <a:r>
+              <a:rPr lang="en-US" sz="1600" b="1" i="1" dirty="0">
+                <a:solidFill>
+                  <a:srgbClr val="000000"/>
+                </a:solidFill>
+                <a:latin typeface="Arial" pitchFamily="34" charset="0"/>
+                <a:ea typeface="Arial" pitchFamily="34" charset="-122"/>
+                <a:cs typeface="Arial" pitchFamily="34" charset="-120"/>
+              </a:rPr>
+              <a:t>“For this I was appointed a preacher and apostle” </a:t>
+            </a:r>
+            <a:r>
+              <a:rPr lang="en-US" sz="1400" b="1" dirty="0">
+                <a:solidFill>
+                  <a:srgbClr val="000000"/>
+                </a:solidFill>
+                <a:latin typeface="Arial" pitchFamily="34" charset="0"/>
+                <a:ea typeface="Arial" pitchFamily="34" charset="-122"/>
+                <a:cs typeface="Arial" pitchFamily="34" charset="-120"/>
+              </a:rPr>
+              <a:t>(1 Tim 2:7)</a:t>
+            </a:r>
+            <a:endParaRPr lang="en-US" sz="2000" dirty="0"/>
+          </a:p>
+          <a:p>
+            <a:pPr marL="0" indent="0" algn="l">
               <a:buNone/>
             </a:pPr>
             <a:r>
-              <a:rPr lang="en-US" sz="1350" dirty="0">
+              <a:rPr lang="en-US" sz="1600" dirty="0">
                 <a:solidFill>
                   <a:srgbClr val="000000"/>
                 </a:solidFill>
@@ -3984,13 +4189,16 @@
                 <a:ea typeface="Arial" pitchFamily="34" charset="-122"/>
                 <a:cs typeface="Arial" pitchFamily="34" charset="-120"/>
               </a:rPr>
-              <a:t>▪  Appointed, not attained — </a:t>
-            </a:r>
-            <a:pPr algn="l" indent="0" marL="0">
+              <a:t>▪  Traditions delivered &amp; held → </a:t>
+            </a:r>
+            <a:endParaRPr lang="en-US" sz="2000" dirty="0"/>
+          </a:p>
+          <a:p>
+            <a:pPr marL="0" indent="0" algn="l">
               <a:buNone/>
             </a:pPr>
             <a:r>
-              <a:rPr lang="en-US" sz="1250" b="1" i="1" dirty="0">
+              <a:rPr lang="en-US" sz="1600" b="1" i="1" dirty="0">
                 <a:solidFill>
                   <a:srgbClr val="000000"/>
                 </a:solidFill>
@@ -3998,13 +4206,27 @@
                 <a:ea typeface="Arial" pitchFamily="34" charset="-122"/>
                 <a:cs typeface="Arial" pitchFamily="34" charset="-120"/>
               </a:rPr>
-              <a:t>“For this I was appointed a preacher and apostle” </a:t>
-            </a:r>
-            <a:pPr algn="l" indent="0" marL="0">
+              <a:t>“maintain the traditions just as I passed them on to you” </a:t>
+            </a:r>
+            <a:r>
+              <a:rPr lang="en-US" sz="1400" b="1" dirty="0">
+                <a:solidFill>
+                  <a:srgbClr val="000000"/>
+                </a:solidFill>
+                <a:latin typeface="Arial" pitchFamily="34" charset="0"/>
+                <a:ea typeface="Arial" pitchFamily="34" charset="-122"/>
+                <a:cs typeface="Arial" pitchFamily="34" charset="-120"/>
+              </a:rPr>
+              <a:t>(1 Cor 11:2)</a:t>
+            </a:r>
+            <a:endParaRPr lang="en-US" sz="2000" dirty="0"/>
+          </a:p>
+          <a:p>
+            <a:pPr marL="0" indent="0" algn="l">
               <a:buNone/>
             </a:pPr>
             <a:r>
-              <a:rPr lang="en-US" sz="1150" b="1" dirty="0">
+              <a:rPr lang="en-US" sz="1600" dirty="0">
                 <a:solidFill>
                   <a:srgbClr val="000000"/>
                 </a:solidFill>
@@ -4012,19 +4234,44 @@
                 <a:ea typeface="Arial" pitchFamily="34" charset="-122"/>
                 <a:cs typeface="Arial" pitchFamily="34" charset="-120"/>
               </a:rPr>
-              <a:t>(1 Tim 2:7)</a:t>
-            </a:r>
-            <a:pPr algn="l" indent="0" marL="0">
+              <a:t>▪  Entrusted to teach others → </a:t>
+            </a:r>
+            <a:endParaRPr lang="en-US" sz="2000" dirty="0"/>
+          </a:p>
+          <a:p>
+            <a:pPr marL="0" indent="0" algn="l">
               <a:buNone/>
             </a:pPr>
-            <a:endParaRPr lang="en-US" sz="1600" dirty="0"/>
-          </a:p>
-          <a:p>
-            <a:pPr algn="l" indent="0" marL="0">
+            <a:r>
+              <a:rPr lang="en-US" sz="1600" b="1" i="1" dirty="0">
+                <a:solidFill>
+                  <a:srgbClr val="000000"/>
+                </a:solidFill>
+                <a:latin typeface="Arial" pitchFamily="34" charset="0"/>
+                <a:ea typeface="Arial" pitchFamily="34" charset="-122"/>
+                <a:cs typeface="Arial" pitchFamily="34" charset="-120"/>
+              </a:rPr>
+              <a:t>“what you heard from me… entrust to faithful people who will be competent to teach others” </a:t>
+            </a:r>
+            <a:r>
+              <a:rPr lang="en-US" sz="1400" b="1" dirty="0">
+                <a:solidFill>
+                  <a:srgbClr val="000000"/>
+                </a:solidFill>
+                <a:latin typeface="Arial" pitchFamily="34" charset="0"/>
+                <a:ea typeface="Arial" pitchFamily="34" charset="-122"/>
+                <a:cs typeface="Arial" pitchFamily="34" charset="-120"/>
+              </a:rPr>
+              <a:t>(2 Tim 2:2)</a:t>
+            </a:r>
+            <a:endParaRPr lang="en-US" sz="2000" dirty="0"/>
+          </a:p>
+          <a:p>
+            <a:pPr marL="0" indent="0" algn="l">
               <a:buNone/>
             </a:pPr>
             <a:r>
-              <a:rPr lang="en-US" sz="1350" dirty="0">
+              <a:rPr lang="en-US" sz="1600" dirty="0">
                 <a:solidFill>
                   <a:srgbClr val="000000"/>
                 </a:solidFill>
@@ -4032,16 +4279,16 @@
                 <a:ea typeface="Arial" pitchFamily="34" charset="-122"/>
                 <a:cs typeface="Arial" pitchFamily="34" charset="-120"/>
               </a:rPr>
-              <a:t>▪  Traditions delivered &amp; held — </a:t>
-            </a:r>
-            <a:endParaRPr lang="en-US" sz="1600" dirty="0"/>
-          </a:p>
-          <a:p>
-            <a:pPr algn="l" indent="0" marL="0">
+              <a:t>▪  Once for all entrusted → </a:t>
+            </a:r>
+            <a:endParaRPr lang="en-US" sz="2000" dirty="0"/>
+          </a:p>
+          <a:p>
+            <a:pPr marL="0" indent="0" algn="l">
               <a:buNone/>
             </a:pPr>
             <a:r>
-              <a:rPr lang="en-US" sz="1250" b="1" i="1" dirty="0">
+              <a:rPr lang="en-US" sz="1600" b="1" i="1" dirty="0">
                 <a:solidFill>
                   <a:srgbClr val="000000"/>
                 </a:solidFill>
@@ -4049,13 +4296,10 @@
                 <a:ea typeface="Arial" pitchFamily="34" charset="-122"/>
                 <a:cs typeface="Arial" pitchFamily="34" charset="-120"/>
               </a:rPr>
-              <a:t>“maintain the traditions just as I passed them on to you” </a:t>
-            </a:r>
-            <a:pPr algn="l" indent="0" marL="0">
-              <a:buNone/>
-            </a:pPr>
-            <a:r>
-              <a:rPr lang="en-US" sz="1150" b="1" dirty="0">
+              <a:t>“the faith that was once for all entrusted to the saints” </a:t>
+            </a:r>
+            <a:r>
+              <a:rPr lang="en-US" sz="1400" b="1" dirty="0">
                 <a:solidFill>
                   <a:srgbClr val="000000"/>
                 </a:solidFill>
@@ -4063,111 +4307,9 @@
                 <a:ea typeface="Arial" pitchFamily="34" charset="-122"/>
                 <a:cs typeface="Arial" pitchFamily="34" charset="-120"/>
               </a:rPr>
-              <a:t>(1 Cor 11:2)</a:t>
-            </a:r>
-            <a:pPr algn="l" indent="0" marL="0">
-              <a:buNone/>
-            </a:pPr>
-            <a:endParaRPr lang="en-US" sz="1600" dirty="0"/>
-          </a:p>
-          <a:p>
-            <a:pPr algn="l" indent="0" marL="0">
-              <a:buNone/>
-            </a:pPr>
-            <a:r>
-              <a:rPr lang="en-US" sz="1350" dirty="0">
-                <a:solidFill>
-                  <a:srgbClr val="000000"/>
-                </a:solidFill>
-                <a:latin typeface="Arial" pitchFamily="34" charset="0"/>
-                <a:ea typeface="Arial" pitchFamily="34" charset="-122"/>
-                <a:cs typeface="Arial" pitchFamily="34" charset="-120"/>
-              </a:rPr>
-              <a:t>▪  Entrusted to teach others — </a:t>
-            </a:r>
-            <a:endParaRPr lang="en-US" sz="1600" dirty="0"/>
-          </a:p>
-          <a:p>
-            <a:pPr algn="l" indent="0" marL="0">
-              <a:buNone/>
-            </a:pPr>
-            <a:r>
-              <a:rPr lang="en-US" sz="1250" b="1" i="1" dirty="0">
-                <a:solidFill>
-                  <a:srgbClr val="000000"/>
-                </a:solidFill>
-                <a:latin typeface="Arial" pitchFamily="34" charset="0"/>
-                <a:ea typeface="Arial" pitchFamily="34" charset="-122"/>
-                <a:cs typeface="Arial" pitchFamily="34" charset="-120"/>
-              </a:rPr>
-              <a:t>“what you heard from me… entrust to faithful people who will be competent to teach others” </a:t>
-            </a:r>
-            <a:pPr algn="l" indent="0" marL="0">
-              <a:buNone/>
-            </a:pPr>
-            <a:r>
-              <a:rPr lang="en-US" sz="1150" b="1" dirty="0">
-                <a:solidFill>
-                  <a:srgbClr val="000000"/>
-                </a:solidFill>
-                <a:latin typeface="Arial" pitchFamily="34" charset="0"/>
-                <a:ea typeface="Arial" pitchFamily="34" charset="-122"/>
-                <a:cs typeface="Arial" pitchFamily="34" charset="-120"/>
-              </a:rPr>
-              <a:t>(2 Tim 2:2)</a:t>
-            </a:r>
-            <a:pPr algn="l" indent="0" marL="0">
-              <a:buNone/>
-            </a:pPr>
-            <a:endParaRPr lang="en-US" sz="1600" dirty="0"/>
-          </a:p>
-          <a:p>
-            <a:pPr algn="l" indent="0" marL="0">
-              <a:buNone/>
-            </a:pPr>
-            <a:r>
-              <a:rPr lang="en-US" sz="1350" dirty="0">
-                <a:solidFill>
-                  <a:srgbClr val="000000"/>
-                </a:solidFill>
-                <a:latin typeface="Arial" pitchFamily="34" charset="0"/>
-                <a:ea typeface="Arial" pitchFamily="34" charset="-122"/>
-                <a:cs typeface="Arial" pitchFamily="34" charset="-120"/>
-              </a:rPr>
-              <a:t>▪  Once for all entrusted — </a:t>
-            </a:r>
-            <a:endParaRPr lang="en-US" sz="1600" dirty="0"/>
-          </a:p>
-          <a:p>
-            <a:pPr algn="l" indent="0" marL="0">
-              <a:buNone/>
-            </a:pPr>
-            <a:r>
-              <a:rPr lang="en-US" sz="1250" b="1" i="1" dirty="0">
-                <a:solidFill>
-                  <a:srgbClr val="000000"/>
-                </a:solidFill>
-                <a:latin typeface="Arial" pitchFamily="34" charset="0"/>
-                <a:ea typeface="Arial" pitchFamily="34" charset="-122"/>
-                <a:cs typeface="Arial" pitchFamily="34" charset="-120"/>
-              </a:rPr>
-              <a:t>“the faith that was once for all entrusted to the saints” </a:t>
-            </a:r>
-            <a:pPr algn="l" indent="0" marL="0">
-              <a:buNone/>
-            </a:pPr>
-            <a:r>
-              <a:rPr lang="en-US" sz="1150" b="1" dirty="0">
-                <a:solidFill>
-                  <a:srgbClr val="000000"/>
-                </a:solidFill>
-                <a:latin typeface="Arial" pitchFamily="34" charset="0"/>
-                <a:ea typeface="Arial" pitchFamily="34" charset="-122"/>
-                <a:cs typeface="Arial" pitchFamily="34" charset="-120"/>
-              </a:rPr>
               <a:t>(Jude 3)</a:t>
             </a:r>
-            <a:endParaRPr lang="en-US" sz="1600" dirty="0"/>
+            <a:endParaRPr lang="en-US" sz="2000" dirty="0"/>
           </a:p>
         </p:txBody>
       </p:sp>
@@ -4179,7 +4321,7 @@
         </p:nvSpPr>
         <p:spPr>
           <a:xfrm>
-            <a:off x="365760" y="2880360"/>
+            <a:off x="365760" y="3227196"/>
             <a:ext cx="8412480" cy="868680"/>
           </a:xfrm>
           <a:prstGeom prst="rect">
@@ -4192,11 +4334,11 @@
           <a:bodyPr wrap="square" lIns="0" tIns="0" rIns="0" bIns="0" rtlCol="0" anchor="t"/>
           <a:lstStyle/>
           <a:p>
-            <a:pPr algn="l" indent="0" marL="0">
+            <a:pPr marL="0" indent="0" algn="l">
               <a:buNone/>
             </a:pPr>
             <a:r>
-              <a:rPr lang="en-US" sz="1500" b="1" dirty="0">
+              <a:rPr lang="en-US" b="1" dirty="0">
                 <a:solidFill>
                   <a:srgbClr val="1F497D"/>
                 </a:solidFill>
@@ -4206,11 +4348,8 @@
               </a:rPr>
               <a:t>The pattern is deposit → handoff, never discovery. </a:t>
             </a:r>
-            <a:pPr algn="l" indent="0" marL="0">
-              <a:buNone/>
-            </a:pPr>
-            <a:r>
-              <a:rPr lang="en-US" sz="1400" dirty="0">
+            <a:r>
+              <a:rPr lang="en-US" dirty="0">
                 <a:solidFill>
                   <a:srgbClr val="000000"/>
                 </a:solidFill>
@@ -4220,7 +4359,7 @@
               </a:rPr>
               <a:t>2 Timothy 2:2 shows four generations in one verse: Paul → Timothy → faithful people → others. A relay, not a spring.</a:t>
             </a:r>
-            <a:endParaRPr lang="en-US" sz="1600" dirty="0"/>
+            <a:endParaRPr lang="en-US" sz="2000" dirty="0"/>
           </a:p>
         </p:txBody>
       </p:sp>
@@ -4232,8 +4371,8 @@
         </p:nvSpPr>
         <p:spPr>
           <a:xfrm>
-            <a:off x="365760" y="3840480"/>
-            <a:ext cx="8412480" cy="1234440"/>
+            <a:off x="365760" y="4255345"/>
+            <a:ext cx="8412480" cy="1332653"/>
           </a:xfrm>
           <a:prstGeom prst="rect">
             <a:avLst/>
@@ -4245,11 +4384,11 @@
           <a:bodyPr wrap="square" lIns="0" tIns="0" rIns="0" bIns="0" rtlCol="0" anchor="t"/>
           <a:lstStyle/>
           <a:p>
-            <a:pPr algn="l" indent="0" marL="0">
+            <a:pPr marL="0" indent="0" algn="l">
               <a:buNone/>
             </a:pPr>
             <a:r>
-              <a:rPr lang="en-US" sz="1400" b="1" dirty="0">
+              <a:rPr lang="en-US" b="1" dirty="0">
                 <a:solidFill>
                   <a:srgbClr val="1F497D"/>
                 </a:solidFill>
@@ -4260,11 +4399,8 @@
               <a:t>The early church kept exactly this question. Not “who has the gift?” but “who was appointed?”
 </a:t>
             </a:r>
-            <a:pPr algn="l" indent="0" marL="0">
-              <a:buNone/>
-            </a:pPr>
-            <a:r>
-              <a:rPr lang="en-US" sz="1350" dirty="0">
+            <a:r>
+              <a:rPr lang="en-US" sz="1600" dirty="0">
                 <a:solidFill>
                   <a:srgbClr val="000000"/>
                 </a:solidFill>
@@ -4272,24 +4408,10 @@
                 <a:ea typeface="Arial" pitchFamily="34" charset="-122"/>
                 <a:cs typeface="Arial" pitchFamily="34" charset="-120"/>
               </a:rPr>
-              <a:t>•  Origen concedes women may have the prophetic gift — and still restricts the venue.
-</a:t>
-            </a:r>
-            <a:pPr algn="l" indent="0" marL="0">
-              <a:buNone/>
-            </a:pPr>
-            <a:r>
-              <a:rPr lang="en-US" sz="1350" dirty="0">
-                <a:solidFill>
-                  <a:srgbClr val="000000"/>
-                </a:solidFill>
-                <a:latin typeface="Arial" pitchFamily="34" charset="0"/>
-                <a:ea typeface="Arial" pitchFamily="34" charset="-122"/>
-                <a:cs typeface="Arial" pitchFamily="34" charset="-120"/>
-              </a:rPr>
-              <a:t>•  Hippolytus ties ordination to liturgical function: hands are laid where there is a governing role, not merely a gift.</a:t>
-            </a:r>
-            <a:endParaRPr lang="en-US" sz="1600" dirty="0"/>
+              <a:t>•  Origen concedes women may have the prophetic gift → and still restricts the venue.
+•  Hippolytus ties ordination to liturgical function: hands are laid where there is a governing role, not merely a gift.</a:t>
+            </a:r>
+            <a:endParaRPr lang="en-US" sz="2000" dirty="0"/>
           </a:p>
         </p:txBody>
       </p:sp>
@@ -4301,7 +4423,7 @@
         </p:nvSpPr>
         <p:spPr>
           <a:xfrm>
-            <a:off x="365760" y="5166360"/>
+            <a:off x="365760" y="5682826"/>
             <a:ext cx="8412480" cy="960120"/>
           </a:xfrm>
           <a:prstGeom prst="rect">
@@ -4314,11 +4436,11 @@
           <a:bodyPr wrap="square" lIns="0" tIns="0" rIns="0" bIns="0" rtlCol="0" anchor="t"/>
           <a:lstStyle/>
           <a:p>
-            <a:pPr algn="l" indent="0" marL="0">
+            <a:pPr marL="0" indent="0" algn="l">
               <a:buNone/>
             </a:pPr>
             <a:r>
-              <a:rPr lang="en-US" sz="1400" dirty="0">
+              <a:rPr lang="en-US" dirty="0">
                 <a:solidFill>
                   <a:srgbClr val="000000"/>
                 </a:solidFill>
@@ -4326,23 +4448,9 @@
                 <a:ea typeface="Arial" pitchFamily="34" charset="-122"/>
                 <a:cs typeface="Arial" pitchFamily="34" charset="-120"/>
               </a:rPr>
-              <a:t>This is why the course’s title phrase fits: </a:t>
-            </a:r>
-            <a:pPr algn="l" indent="0" marL="0">
-              <a:buNone/>
-            </a:pPr>
-            <a:r>
-              <a:rPr lang="en-US" sz="1400" dirty="0">
-                <a:solidFill>
-                  <a:srgbClr val="000000"/>
-                </a:solidFill>
-                <a:latin typeface="Arial" pitchFamily="34" charset="0"/>
-                <a:ea typeface="Arial" pitchFamily="34" charset="-122"/>
-                <a:cs typeface="Arial" pitchFamily="34" charset="-120"/>
-              </a:rPr>
-              <a:t>the whole apostleship exists “to bring about the obedience of faith” (Rom 1:5). The apostolic word is the conferring authority — and receiving it is itself an act of obedient faith.</a:t>
-            </a:r>
-            <a:endParaRPr lang="en-US" sz="1600" dirty="0"/>
+              <a:t>This is why the course’s title phrase fits: the whole apostleship exists “to bring about the obedience of faith” (Rom 1:5). The apostolic word is the conferring authority → and receiving it is itself an act of obedient faith.</a:t>
+            </a:r>
+            <a:endParaRPr lang="en-US" sz="2000" dirty="0"/>
           </a:p>
         </p:txBody>
       </p:sp>
@@ -4360,26 +4468,26 @@
               <p:cTn id="2" dur="indefinite" nodeType="mainSeq">
                 <p:childTnLst>
                   <p:par>
-                    <p:cTn id="7" fill="hold">
+                    <p:cTn id="3" fill="hold">
                       <p:stCondLst>
                         <p:cond delay="indefinite"/>
                       </p:stCondLst>
                       <p:childTnLst>
                         <p:par>
-                          <p:cTn id="8" fill="hold">
+                          <p:cTn id="4" fill="hold">
                             <p:stCondLst>
                               <p:cond delay="0"/>
                             </p:stCondLst>
                             <p:childTnLst>
                               <p:par>
-                                <p:cTn id="3" presetID="42" presetClass="entr" presetSubtype="0" fill="hold" grpId="0" nodeType="clickEffect">
+                                <p:cTn id="5" presetID="42" presetClass="entr" presetSubtype="0" fill="hold" nodeType="clickEffect">
                                   <p:stCondLst>
                                     <p:cond delay="0"/>
                                   </p:stCondLst>
                                   <p:childTnLst>
                                     <p:set>
                                       <p:cBhvr>
-                                        <p:cTn id="4" dur="1" fill="hold">
+                                        <p:cTn id="6" dur="1" fill="hold">
                                           <p:stCondLst>
                                             <p:cond delay="0"/>
                                           </p:stCondLst>
@@ -4397,7 +4505,7 @@
                                     </p:set>
                                     <p:animEffect transition="in" filter="fade">
                                       <p:cBhvr>
-                                        <p:cTn id="5" dur="1000"/>
+                                        <p:cTn id="7" dur="1000"/>
                                         <p:tgtEl>
                                           <p:spTgt spid="4"/>
                                         </p:tgtEl>
@@ -4405,7 +4513,7 @@
                                     </p:animEffect>
                                     <p:anim calcmode="lin" valueType="num">
                                       <p:cBhvr>
-                                        <p:cTn id="6" dur="1000" fill="hold"/>
+                                        <p:cTn id="8" dur="1000" fill="hold"/>
                                         <p:tgtEl>
                                           <p:spTgt spid="4"/>
                                         </p:tgtEl>
@@ -4436,26 +4544,26 @@
                     </p:cTn>
                   </p:par>
                   <p:par>
-                    <p:cTn id="13" fill="hold">
+                    <p:cTn id="9" fill="hold">
                       <p:stCondLst>
                         <p:cond delay="indefinite"/>
                       </p:stCondLst>
                       <p:childTnLst>
                         <p:par>
-                          <p:cTn id="14" fill="hold">
+                          <p:cTn id="10" fill="hold">
                             <p:stCondLst>
                               <p:cond delay="0"/>
                             </p:stCondLst>
                             <p:childTnLst>
                               <p:par>
-                                <p:cTn id="9" presetID="42" presetClass="entr" presetSubtype="0" fill="hold" grpId="0" nodeType="clickEffect">
+                                <p:cTn id="11" presetID="42" presetClass="entr" presetSubtype="0" fill="hold" nodeType="clickEffect">
                                   <p:stCondLst>
                                     <p:cond delay="0"/>
                                   </p:stCondLst>
                                   <p:childTnLst>
                                     <p:set>
                                       <p:cBhvr>
-                                        <p:cTn id="10" dur="1" fill="hold">
+                                        <p:cTn id="12" dur="1" fill="hold">
                                           <p:stCondLst>
                                             <p:cond delay="0"/>
                                           </p:stCondLst>
@@ -4473,7 +4581,7 @@
                                     </p:set>
                                     <p:animEffect transition="in" filter="fade">
                                       <p:cBhvr>
-                                        <p:cTn id="11" dur="1000"/>
+                                        <p:cTn id="13" dur="1000"/>
                                         <p:tgtEl>
                                           <p:spTgt spid="5"/>
                                         </p:tgtEl>
@@ -4481,7 +4589,7 @@
                                     </p:animEffect>
                                     <p:anim calcmode="lin" valueType="num">
                                       <p:cBhvr>
-                                        <p:cTn id="12" dur="1000" fill="hold"/>
+                                        <p:cTn id="14" dur="1000" fill="hold"/>
                                         <p:tgtEl>
                                           <p:spTgt spid="5"/>
                                         </p:tgtEl>
@@ -4512,26 +4620,26 @@
                     </p:cTn>
                   </p:par>
                   <p:par>
-                    <p:cTn id="19" fill="hold">
+                    <p:cTn id="15" fill="hold">
                       <p:stCondLst>
                         <p:cond delay="indefinite"/>
                       </p:stCondLst>
                       <p:childTnLst>
                         <p:par>
-                          <p:cTn id="20" fill="hold">
+                          <p:cTn id="16" fill="hold">
                             <p:stCondLst>
                               <p:cond delay="0"/>
                             </p:stCondLst>
                             <p:childTnLst>
                               <p:par>
-                                <p:cTn id="15" presetID="42" presetClass="entr" presetSubtype="0" fill="hold" grpId="0" nodeType="clickEffect">
+                                <p:cTn id="17" presetID="42" presetClass="entr" presetSubtype="0" fill="hold" nodeType="clickEffect">
                                   <p:stCondLst>
                                     <p:cond delay="0"/>
                                   </p:stCondLst>
                                   <p:childTnLst>
                                     <p:set>
                                       <p:cBhvr>
-                                        <p:cTn id="16" dur="1" fill="hold">
+                                        <p:cTn id="18" dur="1" fill="hold">
                                           <p:stCondLst>
                                             <p:cond delay="0"/>
                                           </p:stCondLst>
@@ -4549,7 +4657,7 @@
                                     </p:set>
                                     <p:animEffect transition="in" filter="fade">
                                       <p:cBhvr>
-                                        <p:cTn id="17" dur="1000"/>
+                                        <p:cTn id="19" dur="1000"/>
                                         <p:tgtEl>
                                           <p:spTgt spid="6"/>
                                         </p:tgtEl>
@@ -4557,7 +4665,7 @@
                                     </p:animEffect>
                                     <p:anim calcmode="lin" valueType="num">
                                       <p:cBhvr>
-                                        <p:cTn id="18" dur="1000" fill="hold"/>
+                                        <p:cTn id="20" dur="1000" fill="hold"/>
                                         <p:tgtEl>
                                           <p:spTgt spid="6"/>
                                         </p:tgtEl>
@@ -4588,26 +4696,26 @@
                     </p:cTn>
                   </p:par>
                   <p:par>
-                    <p:cTn id="25" fill="hold">
+                    <p:cTn id="21" fill="hold">
                       <p:stCondLst>
                         <p:cond delay="indefinite"/>
                       </p:stCondLst>
                       <p:childTnLst>
                         <p:par>
-                          <p:cTn id="26" fill="hold">
+                          <p:cTn id="22" fill="hold">
                             <p:stCondLst>
                               <p:cond delay="0"/>
                             </p:stCondLst>
                             <p:childTnLst>
                               <p:par>
-                                <p:cTn id="21" presetID="42" presetClass="entr" presetSubtype="0" fill="hold" grpId="0" nodeType="clickEffect">
+                                <p:cTn id="23" presetID="42" presetClass="entr" presetSubtype="0" fill="hold" nodeType="clickEffect">
                                   <p:stCondLst>
                                     <p:cond delay="0"/>
                                   </p:stCondLst>
                                   <p:childTnLst>
                                     <p:set>
                                       <p:cBhvr>
-                                        <p:cTn id="22" dur="1" fill="hold">
+                                        <p:cTn id="24" dur="1" fill="hold">
                                           <p:stCondLst>
                                             <p:cond delay="0"/>
                                           </p:stCondLst>
@@ -4625,7 +4733,7 @@
                                     </p:set>
                                     <p:animEffect transition="in" filter="fade">
                                       <p:cBhvr>
-                                        <p:cTn id="23" dur="1000"/>
+                                        <p:cTn id="25" dur="1000"/>
                                         <p:tgtEl>
                                           <p:spTgt spid="7"/>
                                         </p:tgtEl>
@@ -4633,7 +4741,7 @@
                                     </p:animEffect>
                                     <p:anim calcmode="lin" valueType="num">
                                       <p:cBhvr>
-                                        <p:cTn id="24" dur="1000" fill="hold"/>
+                                        <p:cTn id="26" dur="1000" fill="hold"/>
                                         <p:tgtEl>
                                           <p:spTgt spid="7"/>
                                         </p:tgtEl>
@@ -4726,7 +4834,7 @@
           <a:bodyPr wrap="square" lIns="0" tIns="0" rIns="0" bIns="0" rtlCol="0" anchor="t"/>
           <a:lstStyle/>
           <a:p>
-            <a:pPr algn="l" indent="0" marL="0">
+            <a:pPr marL="0" indent="0" algn="l">
               <a:buNone/>
             </a:pPr>
             <a:r>
@@ -4738,7 +4846,29 @@
                 <a:ea typeface="Arial" pitchFamily="34" charset="-122"/>
                 <a:cs typeface="Arial" pitchFamily="34" charset="-120"/>
               </a:rPr>
-              <a:t>The Trajectory Argument — and Why It Inverts</a:t>
+              <a:t>The Trajectory Argument </a:t>
+            </a:r>
+            <a:r>
+              <a:rPr lang="en-US" sz="2500" b="1">
+                <a:solidFill>
+                  <a:srgbClr val="1F497D"/>
+                </a:solidFill>
+                <a:latin typeface="Arial" pitchFamily="34" charset="0"/>
+                <a:ea typeface="Arial" pitchFamily="34" charset="-122"/>
+                <a:cs typeface="Arial" pitchFamily="34" charset="-120"/>
+              </a:rPr>
+              <a:t>→</a:t>
+            </a:r>
+            <a:r>
+              <a:rPr lang="en-US" sz="2500" b="1" dirty="0">
+                <a:solidFill>
+                  <a:srgbClr val="1F497D"/>
+                </a:solidFill>
+                <a:latin typeface="Arial" pitchFamily="34" charset="0"/>
+                <a:ea typeface="Arial" pitchFamily="34" charset="-122"/>
+                <a:cs typeface="Arial" pitchFamily="34" charset="-120"/>
+              </a:rPr>
+              <a:t> and Why It Inverts</a:t>
             </a:r>
             <a:endParaRPr lang="en-US" sz="1600" dirty="0"/>
           </a:p>
@@ -4765,11 +4895,11 @@
           <a:bodyPr wrap="square" lIns="0" tIns="0" rIns="0" bIns="0" rtlCol="0" anchor="t"/>
           <a:lstStyle/>
           <a:p>
-            <a:pPr algn="l" indent="0" marL="0">
+            <a:pPr marL="0" indent="0" algn="l">
               <a:buNone/>
             </a:pPr>
             <a:r>
-              <a:rPr lang="en-US" sz="1300" b="1" dirty="0">
+              <a:rPr lang="en-US" sz="2000" b="1" dirty="0">
                 <a:solidFill>
                   <a:srgbClr val="4F81BD"/>
                 </a:solidFill>
@@ -4779,7 +4909,7 @@
               </a:rPr>
               <a:t>The strongest objection, met honestly</a:t>
             </a:r>
-            <a:endParaRPr lang="en-US" sz="1600" dirty="0"/>
+            <a:endParaRPr lang="en-US" sz="2800" dirty="0"/>
           </a:p>
         </p:txBody>
       </p:sp>
@@ -4791,7 +4921,7 @@
         </p:nvSpPr>
         <p:spPr>
           <a:xfrm>
-            <a:off x="365760" y="1097280"/>
+            <a:off x="365760" y="1024128"/>
             <a:ext cx="8412480" cy="1051560"/>
           </a:xfrm>
           <a:prstGeom prst="rect">
@@ -4804,11 +4934,11 @@
           <a:bodyPr wrap="square" lIns="0" tIns="0" rIns="0" bIns="0" rtlCol="0" anchor="t"/>
           <a:lstStyle/>
           <a:p>
-            <a:pPr algn="l" indent="0" marL="0">
+            <a:pPr marL="0" indent="0" algn="l">
               <a:buNone/>
             </a:pPr>
             <a:r>
-              <a:rPr lang="en-US" sz="1450" b="1" dirty="0">
+              <a:rPr lang="en-US" b="1" dirty="0">
                 <a:solidFill>
                   <a:srgbClr val="1F497D"/>
                 </a:solidFill>
@@ -4818,11 +4948,8 @@
               </a:rPr>
               <a:t>The objection (state it at full strength): </a:t>
             </a:r>
-            <a:pPr algn="l" indent="0" marL="0">
-              <a:buNone/>
-            </a:pPr>
-            <a:r>
-              <a:rPr lang="en-US" sz="1400" dirty="0">
+            <a:r>
+              <a:rPr lang="en-US" dirty="0">
                 <a:solidFill>
                   <a:srgbClr val="000000"/>
                 </a:solidFill>
@@ -4830,9 +4957,9 @@
                 <a:ea typeface="Arial" pitchFamily="34" charset="-122"/>
                 <a:cs typeface="Arial" pitchFamily="34" charset="-120"/>
               </a:rPr>
-              <a:t>“Scripture regulated slavery without condemning it; the church later moved past slavery. Gender order is the same — a cultural waypoint we’ve moved beyond.”  This deserves a real answer, not a dodge.</a:t>
-            </a:r>
-            <a:endParaRPr lang="en-US" sz="1600" dirty="0"/>
+              <a:t>“Scripture regulated slavery without condemning it; the church later moved past slavery. Gender order is the same → a cultural waypoint we’ve moved beyond.”  This deserves a real answer, not a dodge.</a:t>
+            </a:r>
+            <a:endParaRPr lang="en-US" sz="2000" dirty="0"/>
           </a:p>
         </p:txBody>
       </p:sp>
@@ -4844,7 +4971,7 @@
         </p:nvSpPr>
         <p:spPr>
           <a:xfrm>
-            <a:off x="365760" y="2240280"/>
+            <a:off x="365760" y="2235708"/>
             <a:ext cx="8412480" cy="868680"/>
           </a:xfrm>
           <a:prstGeom prst="rect">
@@ -4857,11 +4984,11 @@
           <a:bodyPr wrap="square" lIns="0" tIns="0" rIns="0" bIns="0" rtlCol="0" anchor="t"/>
           <a:lstStyle/>
           <a:p>
-            <a:pPr algn="l" indent="0" marL="0">
+            <a:pPr marL="0" indent="0" algn="l">
               <a:buNone/>
             </a:pPr>
             <a:r>
-              <a:rPr lang="en-US" sz="1450" b="1" dirty="0">
+              <a:rPr lang="en-US" b="1" dirty="0">
                 <a:solidFill>
                   <a:srgbClr val="1F497D"/>
                 </a:solidFill>
@@ -4871,11 +4998,8 @@
               </a:rPr>
               <a:t>Grant the premise: </a:t>
             </a:r>
-            <a:pPr algn="l" indent="0" marL="0">
-              <a:buNone/>
-            </a:pPr>
-            <a:r>
-              <a:rPr lang="en-US" sz="1400" dirty="0">
+            <a:r>
+              <a:rPr lang="en-US" dirty="0">
                 <a:solidFill>
                   <a:srgbClr val="000000"/>
                 </a:solidFill>
@@ -4885,7 +5009,7 @@
               </a:rPr>
               <a:t>the church DID read the slavery texts badly for centuries, and the correction came late. That should humble everyone. So why doesn’t the analogy carry?</a:t>
             </a:r>
-            <a:endParaRPr lang="en-US" sz="1600" dirty="0"/>
+            <a:endParaRPr lang="en-US" sz="2000" dirty="0"/>
           </a:p>
         </p:txBody>
       </p:sp>
@@ -4910,11 +5034,11 @@
           <a:bodyPr wrap="square" lIns="0" tIns="0" rIns="0" bIns="0" rtlCol="0" anchor="t"/>
           <a:lstStyle/>
           <a:p>
-            <a:pPr algn="l" indent="0" marL="0">
+            <a:pPr marL="0" indent="0" algn="l">
               <a:buNone/>
             </a:pPr>
             <a:r>
-              <a:rPr lang="en-US" sz="1400" b="1" dirty="0">
+              <a:rPr lang="en-US" b="1" dirty="0">
                 <a:solidFill>
                   <a:srgbClr val="1F497D"/>
                 </a:solidFill>
@@ -4925,11 +5049,8 @@
               <a:t>Because of WHERE each is grounded:
 </a:t>
             </a:r>
-            <a:pPr algn="l" indent="0" marL="0">
-              <a:buNone/>
-            </a:pPr>
-            <a:r>
-              <a:rPr lang="en-US" sz="1350" dirty="0">
+            <a:r>
+              <a:rPr lang="en-US" sz="1600" dirty="0">
                 <a:solidFill>
                   <a:srgbClr val="000000"/>
                 </a:solidFill>
@@ -4937,14 +5058,11 @@
                 <a:ea typeface="Arial" pitchFamily="34" charset="-122"/>
                 <a:cs typeface="Arial" pitchFamily="34" charset="-120"/>
               </a:rPr>
-              <a:t>•  Slavery — Paul never grounds it in creation. There is no verse “for the master was formed first.” The anchor is cultural.
-</a:t>
-            </a:r>
-            <a:pPr algn="l" indent="0" marL="0">
-              <a:buNone/>
-            </a:pPr>
-            <a:r>
-              <a:rPr lang="en-US" sz="1350" dirty="0">
+              <a:t>•  Slavery → Paul never grounds it in creation. There is no verse “for the master was formed first.” The anchor is cultural.
+•  Assembly order → Paul grounds it in creation, TWICE: </a:t>
+            </a:r>
+            <a:r>
+              <a:rPr lang="en-US" sz="1600" i="1" dirty="0">
                 <a:solidFill>
                   <a:srgbClr val="000000"/>
                 </a:solidFill>
@@ -4952,23 +5070,9 @@
                 <a:ea typeface="Arial" pitchFamily="34" charset="-122"/>
                 <a:cs typeface="Arial" pitchFamily="34" charset="-120"/>
               </a:rPr>
-              <a:t>•  Assembly order — Paul grounds it in creation, TWICE: </a:t>
-            </a:r>
-            <a:pPr algn="l" indent="0" marL="0">
-              <a:buNone/>
-            </a:pPr>
-            <a:r>
-              <a:rPr lang="en-US" sz="1300" i="1" dirty="0">
-                <a:solidFill>
-                  <a:srgbClr val="000000"/>
-                </a:solidFill>
-                <a:latin typeface="Arial" pitchFamily="34" charset="0"/>
-                <a:ea typeface="Arial" pitchFamily="34" charset="-122"/>
-                <a:cs typeface="Arial" pitchFamily="34" charset="-120"/>
-              </a:rPr>
               <a:t>“Adam was formed first, then Eve” (1 Tim 2:13); “woman came from man… for man” (1 Cor 11:8–9).</a:t>
             </a:r>
-            <a:endParaRPr lang="en-US" sz="1600" dirty="0"/>
+            <a:endParaRPr lang="en-US" sz="2000" dirty="0"/>
           </a:p>
         </p:txBody>
       </p:sp>
@@ -4993,6 +5097,13 @@
           </a:solidFill>
           <a:ln/>
         </p:spPr>
+        <p:txBody>
+          <a:bodyPr/>
+          <a:lstStyle/>
+          <a:p>
+            <a:endParaRPr lang="en-US"/>
+          </a:p>
+        </p:txBody>
       </p:sp>
       <p:sp>
         <p:nvSpPr>
@@ -5015,7 +5126,7 @@
           <a:bodyPr wrap="square" lIns="0" tIns="0" rIns="0" bIns="0" rtlCol="0" anchor="ctr"/>
           <a:lstStyle/>
           <a:p>
-            <a:pPr algn="ctr" indent="0" marL="0">
+            <a:pPr marL="0" indent="0" algn="ctr">
               <a:buNone/>
             </a:pPr>
             <a:r>
@@ -5041,7 +5152,7 @@
         </p:nvSpPr>
         <p:spPr>
           <a:xfrm>
-            <a:off x="365760" y="5623560"/>
+            <a:off x="365760" y="5760720"/>
             <a:ext cx="8412480" cy="777240"/>
           </a:xfrm>
           <a:prstGeom prst="rect">
@@ -5054,11 +5165,11 @@
           <a:bodyPr wrap="square" lIns="0" tIns="0" rIns="0" bIns="0" rtlCol="0" anchor="t"/>
           <a:lstStyle/>
           <a:p>
-            <a:pPr algn="l" indent="0" marL="0">
+            <a:pPr marL="0" indent="0" algn="l">
               <a:buNone/>
             </a:pPr>
             <a:r>
-              <a:rPr lang="en-US" sz="1400" b="1" dirty="0">
+              <a:rPr lang="en-US" b="1" dirty="0">
                 <a:solidFill>
                   <a:srgbClr val="1F497D"/>
                 </a:solidFill>
@@ -5066,13 +5177,10 @@
                 <a:ea typeface="Arial" pitchFamily="34" charset="-122"/>
                 <a:cs typeface="Arial" pitchFamily="34" charset="-120"/>
               </a:rPr>
-              <a:t>So the analogy inverts: </a:t>
-            </a:r>
-            <a:pPr algn="l" indent="0" marL="0">
-              <a:buNone/>
-            </a:pPr>
-            <a:r>
-              <a:rPr lang="en-US" sz="1350" dirty="0">
+              <a:t>So, the analogy inverts: </a:t>
+            </a:r>
+            <a:r>
+              <a:rPr lang="en-US" sz="1600" dirty="0">
                 <a:solidFill>
                   <a:srgbClr val="000000"/>
                 </a:solidFill>
@@ -5082,7 +5190,7 @@
               </a:rPr>
               <a:t>the very feature that let the church move past slavery (no creation grounding) is the feature the assembly texts conspicuously HAVE. Same tool, opposite result.</a:t>
             </a:r>
-            <a:endParaRPr lang="en-US" sz="1600" dirty="0"/>
+            <a:endParaRPr lang="en-US" sz="2000" dirty="0"/>
           </a:p>
         </p:txBody>
       </p:sp>
@@ -5100,26 +5208,26 @@
               <p:cTn id="2" dur="indefinite" nodeType="mainSeq">
                 <p:childTnLst>
                   <p:par>
-                    <p:cTn id="7" fill="hold">
+                    <p:cTn id="3" fill="hold">
                       <p:stCondLst>
                         <p:cond delay="indefinite"/>
                       </p:stCondLst>
                       <p:childTnLst>
                         <p:par>
-                          <p:cTn id="8" fill="hold">
+                          <p:cTn id="4" fill="hold">
                             <p:stCondLst>
                               <p:cond delay="0"/>
                             </p:stCondLst>
                             <p:childTnLst>
                               <p:par>
-                                <p:cTn id="3" presetID="42" presetClass="entr" presetSubtype="0" fill="hold" grpId="0" nodeType="clickEffect">
+                                <p:cTn id="5" presetID="42" presetClass="entr" presetSubtype="0" fill="hold" nodeType="clickEffect">
                                   <p:stCondLst>
                                     <p:cond delay="0"/>
                                   </p:stCondLst>
                                   <p:childTnLst>
                                     <p:set>
                                       <p:cBhvr>
-                                        <p:cTn id="4" dur="1" fill="hold">
+                                        <p:cTn id="6" dur="1" fill="hold">
                                           <p:stCondLst>
                                             <p:cond delay="0"/>
                                           </p:stCondLst>
@@ -5137,7 +5245,7 @@
                                     </p:set>
                                     <p:animEffect transition="in" filter="fade">
                                       <p:cBhvr>
-                                        <p:cTn id="5" dur="1000"/>
+                                        <p:cTn id="7" dur="1000"/>
                                         <p:tgtEl>
                                           <p:spTgt spid="4"/>
                                         </p:tgtEl>
@@ -5145,7 +5253,7 @@
                                     </p:animEffect>
                                     <p:anim calcmode="lin" valueType="num">
                                       <p:cBhvr>
-                                        <p:cTn id="6" dur="1000" fill="hold"/>
+                                        <p:cTn id="8" dur="1000" fill="hold"/>
                                         <p:tgtEl>
                                           <p:spTgt spid="4"/>
                                         </p:tgtEl>
@@ -5176,26 +5284,26 @@
                     </p:cTn>
                   </p:par>
                   <p:par>
-                    <p:cTn id="13" fill="hold">
+                    <p:cTn id="9" fill="hold">
                       <p:stCondLst>
                         <p:cond delay="indefinite"/>
                       </p:stCondLst>
                       <p:childTnLst>
                         <p:par>
-                          <p:cTn id="14" fill="hold">
+                          <p:cTn id="10" fill="hold">
                             <p:stCondLst>
                               <p:cond delay="0"/>
                             </p:stCondLst>
                             <p:childTnLst>
                               <p:par>
-                                <p:cTn id="9" presetID="42" presetClass="entr" presetSubtype="0" fill="hold" grpId="0" nodeType="clickEffect">
+                                <p:cTn id="11" presetID="42" presetClass="entr" presetSubtype="0" fill="hold" nodeType="clickEffect">
                                   <p:stCondLst>
                                     <p:cond delay="0"/>
                                   </p:stCondLst>
                                   <p:childTnLst>
                                     <p:set>
                                       <p:cBhvr>
-                                        <p:cTn id="10" dur="1" fill="hold">
+                                        <p:cTn id="12" dur="1" fill="hold">
                                           <p:stCondLst>
                                             <p:cond delay="0"/>
                                           </p:stCondLst>
@@ -5213,7 +5321,7 @@
                                     </p:set>
                                     <p:animEffect transition="in" filter="fade">
                                       <p:cBhvr>
-                                        <p:cTn id="11" dur="1000"/>
+                                        <p:cTn id="13" dur="1000"/>
                                         <p:tgtEl>
                                           <p:spTgt spid="5"/>
                                         </p:tgtEl>
@@ -5221,7 +5329,7 @@
                                     </p:animEffect>
                                     <p:anim calcmode="lin" valueType="num">
                                       <p:cBhvr>
-                                        <p:cTn id="12" dur="1000" fill="hold"/>
+                                        <p:cTn id="14" dur="1000" fill="hold"/>
                                         <p:tgtEl>
                                           <p:spTgt spid="5"/>
                                         </p:tgtEl>
@@ -5252,26 +5360,26 @@
                     </p:cTn>
                   </p:par>
                   <p:par>
-                    <p:cTn id="19" fill="hold">
+                    <p:cTn id="15" fill="hold">
                       <p:stCondLst>
                         <p:cond delay="indefinite"/>
                       </p:stCondLst>
                       <p:childTnLst>
                         <p:par>
-                          <p:cTn id="20" fill="hold">
+                          <p:cTn id="16" fill="hold">
                             <p:stCondLst>
                               <p:cond delay="0"/>
                             </p:stCondLst>
                             <p:childTnLst>
                               <p:par>
-                                <p:cTn id="15" presetID="42" presetClass="entr" presetSubtype="0" fill="hold" grpId="0" nodeType="clickEffect">
+                                <p:cTn id="17" presetID="42" presetClass="entr" presetSubtype="0" fill="hold" nodeType="clickEffect">
                                   <p:stCondLst>
                                     <p:cond delay="0"/>
                                   </p:stCondLst>
                                   <p:childTnLst>
                                     <p:set>
                                       <p:cBhvr>
-                                        <p:cTn id="16" dur="1" fill="hold">
+                                        <p:cTn id="18" dur="1" fill="hold">
                                           <p:stCondLst>
                                             <p:cond delay="0"/>
                                           </p:stCondLst>
@@ -5289,7 +5397,7 @@
                                     </p:set>
                                     <p:animEffect transition="in" filter="fade">
                                       <p:cBhvr>
-                                        <p:cTn id="17" dur="1000"/>
+                                        <p:cTn id="19" dur="1000"/>
                                         <p:tgtEl>
                                           <p:spTgt spid="6"/>
                                         </p:tgtEl>
@@ -5297,7 +5405,7 @@
                                     </p:animEffect>
                                     <p:anim calcmode="lin" valueType="num">
                                       <p:cBhvr>
-                                        <p:cTn id="18" dur="1000" fill="hold"/>
+                                        <p:cTn id="20" dur="1000" fill="hold"/>
                                         <p:tgtEl>
                                           <p:spTgt spid="6"/>
                                         </p:tgtEl>
@@ -5328,26 +5436,26 @@
                     </p:cTn>
                   </p:par>
                   <p:par>
-                    <p:cTn id="29" fill="hold">
+                    <p:cTn id="21" fill="hold">
                       <p:stCondLst>
                         <p:cond delay="indefinite"/>
                       </p:stCondLst>
                       <p:childTnLst>
                         <p:par>
-                          <p:cTn id="30" fill="hold">
+                          <p:cTn id="22" fill="hold">
                             <p:stCondLst>
                               <p:cond delay="0"/>
                             </p:stCondLst>
                             <p:childTnLst>
                               <p:par>
-                                <p:cTn id="21" presetID="42" presetClass="entr" presetSubtype="0" fill="hold" grpId="0" nodeType="clickEffect">
+                                <p:cTn id="23" presetID="42" presetClass="entr" presetSubtype="0" fill="hold" nodeType="clickEffect">
                                   <p:stCondLst>
                                     <p:cond delay="0"/>
                                   </p:stCondLst>
                                   <p:childTnLst>
                                     <p:set>
                                       <p:cBhvr>
-                                        <p:cTn id="22" dur="1" fill="hold">
+                                        <p:cTn id="24" dur="1" fill="hold">
                                           <p:stCondLst>
                                             <p:cond delay="0"/>
                                           </p:stCondLst>
@@ -5365,7 +5473,7 @@
                                     </p:set>
                                     <p:animEffect transition="in" filter="fade">
                                       <p:cBhvr>
-                                        <p:cTn id="23" dur="1000"/>
+                                        <p:cTn id="25" dur="1000"/>
                                         <p:tgtEl>
                                           <p:spTgt spid="7"/>
                                         </p:tgtEl>
@@ -5373,7 +5481,7 @@
                                     </p:animEffect>
                                     <p:anim calcmode="lin" valueType="num">
                                       <p:cBhvr>
-                                        <p:cTn id="24" dur="1000" fill="hold"/>
+                                        <p:cTn id="26" dur="1000" fill="hold"/>
                                         <p:tgtEl>
                                           <p:spTgt spid="7"/>
                                         </p:tgtEl>
@@ -5398,14 +5506,14 @@
                                 </p:cTn>
                               </p:par>
                               <p:par>
-                                <p:cTn id="25" presetID="42" presetClass="entr" presetSubtype="0" fill="hold" grpId="0" nodeType="withEffect">
+                                <p:cTn id="27" presetID="42" presetClass="entr" presetSubtype="0" fill="hold" nodeType="withEffect">
                                   <p:stCondLst>
                                     <p:cond delay="0"/>
                                   </p:stCondLst>
                                   <p:childTnLst>
                                     <p:set>
                                       <p:cBhvr>
-                                        <p:cTn id="26" dur="1" fill="hold">
+                                        <p:cTn id="28" dur="1" fill="hold">
                                           <p:stCondLst>
                                             <p:cond delay="0"/>
                                           </p:stCondLst>
@@ -5423,7 +5531,7 @@
                                     </p:set>
                                     <p:animEffect transition="in" filter="fade">
                                       <p:cBhvr>
-                                        <p:cTn id="27" dur="1000"/>
+                                        <p:cTn id="29" dur="1000"/>
                                         <p:tgtEl>
                                           <p:spTgt spid="8"/>
                                         </p:tgtEl>
@@ -5431,7 +5539,7 @@
                                     </p:animEffect>
                                     <p:anim calcmode="lin" valueType="num">
                                       <p:cBhvr>
-                                        <p:cTn id="28" dur="1000" fill="hold"/>
+                                        <p:cTn id="30" dur="1000" fill="hold"/>
                                         <p:tgtEl>
                                           <p:spTgt spid="8"/>
                                         </p:tgtEl>
@@ -5462,26 +5570,26 @@
                     </p:cTn>
                   </p:par>
                   <p:par>
-                    <p:cTn id="35" fill="hold">
+                    <p:cTn id="31" fill="hold">
                       <p:stCondLst>
                         <p:cond delay="indefinite"/>
                       </p:stCondLst>
                       <p:childTnLst>
                         <p:par>
-                          <p:cTn id="36" fill="hold">
+                          <p:cTn id="32" fill="hold">
                             <p:stCondLst>
                               <p:cond delay="0"/>
                             </p:stCondLst>
                             <p:childTnLst>
                               <p:par>
-                                <p:cTn id="31" presetID="42" presetClass="entr" presetSubtype="0" fill="hold" grpId="0" nodeType="clickEffect">
+                                <p:cTn id="33" presetID="42" presetClass="entr" presetSubtype="0" fill="hold" nodeType="clickEffect">
                                   <p:stCondLst>
                                     <p:cond delay="0"/>
                                   </p:stCondLst>
                                   <p:childTnLst>
                                     <p:set>
                                       <p:cBhvr>
-                                        <p:cTn id="32" dur="1" fill="hold">
+                                        <p:cTn id="34" dur="1" fill="hold">
                                           <p:stCondLst>
                                             <p:cond delay="0"/>
                                           </p:stCondLst>
@@ -5499,7 +5607,7 @@
                                     </p:set>
                                     <p:animEffect transition="in" filter="fade">
                                       <p:cBhvr>
-                                        <p:cTn id="33" dur="1000"/>
+                                        <p:cTn id="35" dur="1000"/>
                                         <p:tgtEl>
                                           <p:spTgt spid="9"/>
                                         </p:tgtEl>
@@ -5507,7 +5615,7 @@
                                     </p:animEffect>
                                     <p:anim calcmode="lin" valueType="num">
                                       <p:cBhvr>
-                                        <p:cTn id="34" dur="1000" fill="hold"/>
+                                        <p:cTn id="36" dur="1000" fill="hold"/>
                                         <p:tgtEl>
                                           <p:spTgt spid="9"/>
                                         </p:tgtEl>
@@ -5600,7 +5708,7 @@
           <a:bodyPr wrap="square" lIns="0" tIns="0" rIns="0" bIns="0" rtlCol="0" anchor="t"/>
           <a:lstStyle/>
           <a:p>
-            <a:pPr algn="l" indent="0" marL="0">
+            <a:pPr marL="0" indent="0" algn="l">
               <a:buNone/>
             </a:pPr>
             <a:r>
@@ -5639,11 +5747,11 @@
           <a:bodyPr wrap="square" lIns="0" tIns="0" rIns="0" bIns="0" rtlCol="0" anchor="t"/>
           <a:lstStyle/>
           <a:p>
-            <a:pPr algn="l" indent="0" marL="0">
+            <a:pPr marL="0" indent="0" algn="l">
               <a:buNone/>
             </a:pPr>
             <a:r>
-              <a:rPr lang="en-US" sz="1300" b="1" dirty="0">
+              <a:rPr lang="en-US" sz="2000" b="1" dirty="0">
                 <a:solidFill>
                   <a:srgbClr val="4F81BD"/>
                 </a:solidFill>
@@ -5651,9 +5759,9 @@
                 <a:ea typeface="Arial" pitchFamily="34" charset="-122"/>
                 <a:cs typeface="Arial" pitchFamily="34" charset="-120"/>
               </a:rPr>
-              <a:t>Ten minutes — this is the week’s practice</a:t>
-            </a:r>
-            <a:endParaRPr lang="en-US" sz="1600" dirty="0"/>
+              <a:t>Ten minutes → this is the week’s practice</a:t>
+            </a:r>
+            <a:endParaRPr lang="en-US" sz="2800" dirty="0"/>
           </a:p>
         </p:txBody>
       </p:sp>
@@ -5678,11 +5786,11 @@
           <a:bodyPr wrap="square" lIns="0" tIns="0" rIns="0" bIns="0" rtlCol="0" anchor="t"/>
           <a:lstStyle/>
           <a:p>
-            <a:pPr algn="l" indent="0" marL="0">
+            <a:pPr marL="0" indent="0" algn="l">
               <a:buNone/>
             </a:pPr>
             <a:r>
-              <a:rPr lang="en-US" sz="2000" b="1" dirty="0">
+              <a:rPr lang="en-US" sz="2800" b="1" dirty="0">
                 <a:solidFill>
                   <a:srgbClr val="1F497D"/>
                 </a:solidFill>
@@ -5692,11 +5800,8 @@
               </a:rPr>
               <a:t>1.  </a:t>
             </a:r>
-            <a:pPr algn="l" indent="0" marL="0">
-              <a:buNone/>
-            </a:pPr>
-            <a:r>
-              <a:rPr lang="en-US" sz="1800" dirty="0">
+            <a:r>
+              <a:rPr lang="en-US" sz="2400" dirty="0">
                 <a:solidFill>
                   <a:srgbClr val="000000"/>
                 </a:solidFill>
@@ -5704,9 +5809,9 @@
                 <a:ea typeface="Arial" pitchFamily="34" charset="-122"/>
                 <a:cs typeface="Arial" pitchFamily="34" charset="-120"/>
               </a:rPr>
-              <a:t>Why is “God is clearly using them” not, by itself, a warrant for office? Where does that reasoning go wrong — and where is it partly right?</a:t>
-            </a:r>
-            <a:endParaRPr lang="en-US" sz="1600" dirty="0"/>
+              <a:t>Why is “God is clearly using them” not, by itself, a warrant for office? Where does that reasoning go wrong → and where is it partly right?</a:t>
+            </a:r>
+            <a:endParaRPr lang="en-US" sz="2000" dirty="0"/>
           </a:p>
         </p:txBody>
       </p:sp>
@@ -5731,11 +5836,11 @@
           <a:bodyPr wrap="square" lIns="0" tIns="0" rIns="0" bIns="0" rtlCol="0" anchor="t"/>
           <a:lstStyle/>
           <a:p>
-            <a:pPr algn="l" indent="0" marL="0">
+            <a:pPr marL="0" indent="0" algn="l">
               <a:buNone/>
             </a:pPr>
             <a:r>
-              <a:rPr lang="en-US" sz="2000" b="1" dirty="0">
+              <a:rPr lang="en-US" sz="2800" b="1" dirty="0">
                 <a:solidFill>
                   <a:srgbClr val="1F497D"/>
                 </a:solidFill>
@@ -5745,11 +5850,8 @@
               </a:rPr>
               <a:t>2.  </a:t>
             </a:r>
-            <a:pPr algn="l" indent="0" marL="0">
-              <a:buNone/>
-            </a:pPr>
-            <a:r>
-              <a:rPr lang="en-US" sz="1800" dirty="0">
+            <a:r>
+              <a:rPr lang="en-US" sz="2400" dirty="0">
                 <a:solidFill>
                   <a:srgbClr val="000000"/>
                 </a:solidFill>
@@ -5757,9 +5859,9 @@
                 <a:ea typeface="Arial" pitchFamily="34" charset="-122"/>
                 <a:cs typeface="Arial" pitchFamily="34" charset="-120"/>
               </a:rPr>
-              <a:t>Where do WE feel the pull of results-based validation — in ministry, in decisions, in judging what’s true? Is it always wrong?</a:t>
-            </a:r>
-            <a:endParaRPr lang="en-US" sz="1600" dirty="0"/>
+              <a:t>Where do WE feel the pull of results-based validation → in ministry, in decisions, in judging what’s true? Is it always wrong?</a:t>
+            </a:r>
+            <a:endParaRPr lang="en-US" sz="2000" dirty="0"/>
           </a:p>
         </p:txBody>
       </p:sp>
@@ -5784,11 +5886,11 @@
           <a:bodyPr wrap="square" lIns="0" tIns="0" rIns="0" bIns="0" rtlCol="0" anchor="t"/>
           <a:lstStyle/>
           <a:p>
-            <a:pPr algn="l" indent="0" marL="0">
+            <a:pPr marL="0" indent="0" algn="l">
               <a:buNone/>
             </a:pPr>
             <a:r>
-              <a:rPr lang="en-US" sz="1400" b="1" dirty="0">
+              <a:rPr lang="en-US" b="1" dirty="0">
                 <a:solidFill>
                   <a:srgbClr val="B0413E"/>
                 </a:solidFill>
@@ -5798,11 +5900,8 @@
               </a:rPr>
               <a:t>Contested-ground rule: </a:t>
             </a:r>
-            <a:pPr algn="l" indent="0" marL="0">
-              <a:buNone/>
-            </a:pPr>
-            <a:r>
-              <a:rPr lang="en-US" sz="1400" i="1" dirty="0">
+            <a:r>
+              <a:rPr lang="en-US" i="1" dirty="0">
                 <a:solidFill>
                   <a:srgbClr val="000000"/>
                 </a:solidFill>
@@ -5812,7 +5911,7 @@
               </a:rPr>
               <a:t>reason from the text, not from certainty. Disagreement is welcome; scoring points is not.</a:t>
             </a:r>
-            <a:endParaRPr lang="en-US" sz="1600" dirty="0"/>
+            <a:endParaRPr lang="en-US" sz="2000" dirty="0"/>
           </a:p>
         </p:txBody>
       </p:sp>
@@ -5830,26 +5929,26 @@
               <p:cTn id="2" dur="indefinite" nodeType="mainSeq">
                 <p:childTnLst>
                   <p:par>
-                    <p:cTn id="7" fill="hold">
+                    <p:cTn id="3" fill="hold">
                       <p:stCondLst>
                         <p:cond delay="indefinite"/>
                       </p:stCondLst>
                       <p:childTnLst>
                         <p:par>
-                          <p:cTn id="8" fill="hold">
+                          <p:cTn id="4" fill="hold">
                             <p:stCondLst>
                               <p:cond delay="0"/>
                             </p:stCondLst>
                             <p:childTnLst>
                               <p:par>
-                                <p:cTn id="3" presetID="42" presetClass="entr" presetSubtype="0" fill="hold" grpId="0" nodeType="clickEffect">
+                                <p:cTn id="5" presetID="42" presetClass="entr" presetSubtype="0" fill="hold" nodeType="clickEffect">
                                   <p:stCondLst>
                                     <p:cond delay="0"/>
                                   </p:stCondLst>
                                   <p:childTnLst>
                                     <p:set>
                                       <p:cBhvr>
-                                        <p:cTn id="4" dur="1" fill="hold">
+                                        <p:cTn id="6" dur="1" fill="hold">
                                           <p:stCondLst>
                                             <p:cond delay="0"/>
                                           </p:stCondLst>
@@ -5867,7 +5966,7 @@
                                     </p:set>
                                     <p:animEffect transition="in" filter="fade">
                                       <p:cBhvr>
-                                        <p:cTn id="5" dur="1000"/>
+                                        <p:cTn id="7" dur="1000"/>
                                         <p:tgtEl>
                                           <p:spTgt spid="4"/>
                                         </p:tgtEl>
@@ -5875,7 +5974,7 @@
                                     </p:animEffect>
                                     <p:anim calcmode="lin" valueType="num">
                                       <p:cBhvr>
-                                        <p:cTn id="6" dur="1000" fill="hold"/>
+                                        <p:cTn id="8" dur="1000" fill="hold"/>
                                         <p:tgtEl>
                                           <p:spTgt spid="4"/>
                                         </p:tgtEl>
@@ -5906,26 +6005,26 @@
                     </p:cTn>
                   </p:par>
                   <p:par>
-                    <p:cTn id="13" fill="hold">
+                    <p:cTn id="9" fill="hold">
                       <p:stCondLst>
                         <p:cond delay="indefinite"/>
                       </p:stCondLst>
                       <p:childTnLst>
                         <p:par>
-                          <p:cTn id="14" fill="hold">
+                          <p:cTn id="10" fill="hold">
                             <p:stCondLst>
                               <p:cond delay="0"/>
                             </p:stCondLst>
                             <p:childTnLst>
                               <p:par>
-                                <p:cTn id="9" presetID="42" presetClass="entr" presetSubtype="0" fill="hold" grpId="0" nodeType="clickEffect">
+                                <p:cTn id="11" presetID="42" presetClass="entr" presetSubtype="0" fill="hold" nodeType="clickEffect">
                                   <p:stCondLst>
                                     <p:cond delay="0"/>
                                   </p:stCondLst>
                                   <p:childTnLst>
                                     <p:set>
                                       <p:cBhvr>
-                                        <p:cTn id="10" dur="1" fill="hold">
+                                        <p:cTn id="12" dur="1" fill="hold">
                                           <p:stCondLst>
                                             <p:cond delay="0"/>
                                           </p:stCondLst>
@@ -5943,7 +6042,7 @@
                                     </p:set>
                                     <p:animEffect transition="in" filter="fade">
                                       <p:cBhvr>
-                                        <p:cTn id="11" dur="1000"/>
+                                        <p:cTn id="13" dur="1000"/>
                                         <p:tgtEl>
                                           <p:spTgt spid="5"/>
                                         </p:tgtEl>
@@ -5951,7 +6050,7 @@
                                     </p:animEffect>
                                     <p:anim calcmode="lin" valueType="num">
                                       <p:cBhvr>
-                                        <p:cTn id="12" dur="1000" fill="hold"/>
+                                        <p:cTn id="14" dur="1000" fill="hold"/>
                                         <p:tgtEl>
                                           <p:spTgt spid="5"/>
                                         </p:tgtEl>
@@ -5982,26 +6081,26 @@
                     </p:cTn>
                   </p:par>
                   <p:par>
-                    <p:cTn id="19" fill="hold">
+                    <p:cTn id="15" fill="hold">
                       <p:stCondLst>
                         <p:cond delay="indefinite"/>
                       </p:stCondLst>
                       <p:childTnLst>
                         <p:par>
-                          <p:cTn id="20" fill="hold">
+                          <p:cTn id="16" fill="hold">
                             <p:stCondLst>
                               <p:cond delay="0"/>
                             </p:stCondLst>
                             <p:childTnLst>
                               <p:par>
-                                <p:cTn id="15" presetID="42" presetClass="entr" presetSubtype="0" fill="hold" grpId="0" nodeType="clickEffect">
+                                <p:cTn id="17" presetID="42" presetClass="entr" presetSubtype="0" fill="hold" nodeType="clickEffect">
                                   <p:stCondLst>
                                     <p:cond delay="0"/>
                                   </p:stCondLst>
                                   <p:childTnLst>
                                     <p:set>
                                       <p:cBhvr>
-                                        <p:cTn id="16" dur="1" fill="hold">
+                                        <p:cTn id="18" dur="1" fill="hold">
                                           <p:stCondLst>
                                             <p:cond delay="0"/>
                                           </p:stCondLst>
@@ -6019,7 +6118,7 @@
                                     </p:set>
                                     <p:animEffect transition="in" filter="fade">
                                       <p:cBhvr>
-                                        <p:cTn id="17" dur="1000"/>
+                                        <p:cTn id="19" dur="1000"/>
                                         <p:tgtEl>
                                           <p:spTgt spid="6"/>
                                         </p:tgtEl>
@@ -6027,7 +6126,7 @@
                                     </p:animEffect>
                                     <p:anim calcmode="lin" valueType="num">
                                       <p:cBhvr>
-                                        <p:cTn id="18" dur="1000" fill="hold"/>
+                                        <p:cTn id="20" dur="1000" fill="hold"/>
                                         <p:tgtEl>
                                           <p:spTgt spid="6"/>
                                         </p:tgtEl>
@@ -6120,7 +6219,7 @@
           <a:bodyPr wrap="square" lIns="0" tIns="0" rIns="0" bIns="0" rtlCol="0" anchor="t"/>
           <a:lstStyle/>
           <a:p>
-            <a:pPr algn="l" indent="0" marL="0">
+            <a:pPr marL="0" indent="0" algn="l">
               <a:buNone/>
             </a:pPr>
             <a:r>
@@ -6159,11 +6258,11 @@
           <a:bodyPr wrap="square" lIns="0" tIns="0" rIns="0" bIns="0" rtlCol="0" anchor="t"/>
           <a:lstStyle/>
           <a:p>
-            <a:pPr algn="l" indent="0" marL="0">
+            <a:pPr marL="0" indent="0" algn="l">
               <a:buNone/>
             </a:pPr>
             <a:r>
-              <a:rPr lang="en-US" sz="1300" b="1" dirty="0">
+              <a:rPr lang="en-US" sz="2000" b="1" dirty="0">
                 <a:solidFill>
                   <a:srgbClr val="4F81BD"/>
                 </a:solidFill>
@@ -6171,9 +6270,9 @@
                 <a:ea typeface="Arial" pitchFamily="34" charset="-122"/>
                 <a:cs typeface="Arial" pitchFamily="34" charset="-120"/>
               </a:rPr>
-              <a:t>For next week — the harder question</a:t>
-            </a:r>
-            <a:endParaRPr lang="en-US" sz="1600" dirty="0"/>
+              <a:t>For next week → the harder question</a:t>
+            </a:r>
+            <a:endParaRPr lang="en-US" sz="2800" dirty="0"/>
           </a:p>
         </p:txBody>
       </p:sp>
@@ -6198,11 +6297,11 @@
           <a:bodyPr wrap="square" lIns="0" tIns="0" rIns="0" bIns="0" rtlCol="0" anchor="t"/>
           <a:lstStyle/>
           <a:p>
-            <a:pPr algn="l" indent="0" marL="0">
+            <a:pPr marL="0" indent="0" algn="l">
               <a:buNone/>
             </a:pPr>
             <a:r>
-              <a:rPr lang="en-US" sz="1600" b="1" dirty="0">
+              <a:rPr lang="en-US" sz="2000" b="1" dirty="0">
                 <a:solidFill>
                   <a:srgbClr val="1F497D"/>
                 </a:solidFill>
@@ -6210,14 +6309,11 @@
                 <a:ea typeface="Arial" pitchFamily="34" charset="-122"/>
                 <a:cs typeface="Arial" pitchFamily="34" charset="-120"/>
               </a:rPr>
-              <a:t>For next week, read — slowly, both sides in view:
+              <a:t>For next week, read → slowly, both sides in view:
 </a:t>
             </a:r>
-            <a:pPr algn="l" indent="0" marL="0">
-              <a:buNone/>
-            </a:pPr>
-            <a:r>
-              <a:rPr lang="en-US" sz="1500" dirty="0">
+            <a:r>
+              <a:rPr lang="en-US" dirty="0">
                 <a:solidFill>
                   <a:srgbClr val="000000"/>
                 </a:solidFill>
@@ -6225,14 +6321,10 @@
                 <a:ea typeface="Arial" pitchFamily="34" charset="-122"/>
                 <a:cs typeface="Arial" pitchFamily="34" charset="-120"/>
               </a:rPr>
-              <a:t>•  1 Timothy 2:1–15  — what does Paul restrict, what reason does he give (v.13), and what does he NOT say?
-</a:t>
-            </a:r>
-            <a:pPr algn="l" indent="0" marL="0">
-              <a:buNone/>
-            </a:pPr>
-            <a:r>
-              <a:rPr lang="en-US" sz="1500" dirty="0">
+              <a:t>•  </a:t>
+            </a:r>
+            <a:r>
+              <a:rPr lang="en-US" b="1" dirty="0">
                 <a:solidFill>
                   <a:srgbClr val="000000"/>
                 </a:solidFill>
@@ -6240,9 +6332,43 @@
                 <a:ea typeface="Arial" pitchFamily="34" charset="-122"/>
                 <a:cs typeface="Arial" pitchFamily="34" charset="-120"/>
               </a:rPr>
-              <a:t>•  1 Corinthians 11:2–16  — note v.5: women pray and prophesy. How does that fit with restriction?</a:t>
-            </a:r>
-            <a:endParaRPr lang="en-US" sz="1600" dirty="0"/>
+              <a:t>1 Timothy 2:1–15  </a:t>
+            </a:r>
+            <a:r>
+              <a:rPr lang="en-US" dirty="0">
+                <a:solidFill>
+                  <a:srgbClr val="000000"/>
+                </a:solidFill>
+                <a:latin typeface="Arial" pitchFamily="34" charset="0"/>
+                <a:ea typeface="Arial" pitchFamily="34" charset="-122"/>
+                <a:cs typeface="Arial" pitchFamily="34" charset="-120"/>
+              </a:rPr>
+              <a:t>→ what does Paul restrict, what reason does he give (v.13), and what does he NOT say?
+•  </a:t>
+            </a:r>
+            <a:r>
+              <a:rPr lang="en-US" b="1" dirty="0">
+                <a:solidFill>
+                  <a:srgbClr val="000000"/>
+                </a:solidFill>
+                <a:latin typeface="Arial" pitchFamily="34" charset="0"/>
+                <a:ea typeface="Arial" pitchFamily="34" charset="-122"/>
+                <a:cs typeface="Arial" pitchFamily="34" charset="-120"/>
+              </a:rPr>
+              <a:t>1 Corinthians 11:2–16  </a:t>
+            </a:r>
+            <a:r>
+              <a:rPr lang="en-US" dirty="0">
+                <a:solidFill>
+                  <a:srgbClr val="000000"/>
+                </a:solidFill>
+                <a:latin typeface="Arial" pitchFamily="34" charset="0"/>
+                <a:ea typeface="Arial" pitchFamily="34" charset="-122"/>
+                <a:cs typeface="Arial" pitchFamily="34" charset="-120"/>
+              </a:rPr>
+              <a:t>→ note v3 &amp; v.5: women pray and prophesy. How does that reason fit with restriction?</a:t>
+            </a:r>
+            <a:endParaRPr lang="en-US" sz="2000" dirty="0"/>
           </a:p>
         </p:txBody>
       </p:sp>
@@ -6267,11 +6393,11 @@
           <a:bodyPr wrap="square" lIns="0" tIns="0" rIns="0" bIns="0" rtlCol="0" anchor="t"/>
           <a:lstStyle/>
           <a:p>
-            <a:pPr algn="l" indent="0" marL="0">
+            <a:pPr marL="0" indent="0" algn="l">
               <a:buNone/>
             </a:pPr>
             <a:r>
-              <a:rPr lang="en-US" sz="1600" b="1" dirty="0">
+              <a:rPr lang="en-US" sz="2000" b="1" dirty="0">
                 <a:solidFill>
                   <a:srgbClr val="000000"/>
                 </a:solidFill>
@@ -6281,11 +6407,8 @@
               </a:rPr>
               <a:t>Next week: </a:t>
             </a:r>
-            <a:pPr algn="l" indent="0" marL="0">
-              <a:buNone/>
-            </a:pPr>
-            <a:r>
-              <a:rPr lang="en-US" sz="1550" i="1" dirty="0">
+            <a:r>
+              <a:rPr lang="en-US" i="1" dirty="0">
                 <a:solidFill>
                   <a:srgbClr val="000000"/>
                 </a:solidFill>
@@ -6293,9 +6416,9 @@
                 <a:ea typeface="Arial" pitchFamily="34" charset="-122"/>
                 <a:cs typeface="Arial" pitchFamily="34" charset="-120"/>
               </a:rPr>
-              <a:t>God’s Created Order — the narrow, careful question of roles in the assembly, and the full breadth of women’s ministry Scripture shows.</a:t>
-            </a:r>
-            <a:endParaRPr lang="en-US" sz="1600" dirty="0"/>
+              <a:t>God’s Created Order → the narrow, careful question of roles in the assembly, and the full breadth of women’s ministry Scripture shows.</a:t>
+            </a:r>
+            <a:endParaRPr lang="en-US" sz="2000" dirty="0"/>
           </a:p>
         </p:txBody>
       </p:sp>
@@ -6307,7 +6430,7 @@
         </p:nvSpPr>
         <p:spPr>
           <a:xfrm>
-            <a:off x="365760" y="3931920"/>
+            <a:off x="365760" y="3669453"/>
             <a:ext cx="8412480" cy="1051560"/>
           </a:xfrm>
           <a:prstGeom prst="rect">
@@ -6320,11 +6443,11 @@
           <a:bodyPr wrap="square" lIns="0" tIns="0" rIns="0" bIns="0" rtlCol="0" anchor="t"/>
           <a:lstStyle/>
           <a:p>
-            <a:pPr algn="l" indent="0" marL="0">
+            <a:pPr marL="0" indent="0" algn="l">
               <a:buNone/>
             </a:pPr>
             <a:r>
-              <a:rPr lang="en-US" sz="1500" b="1" dirty="0">
+              <a:rPr lang="en-US" b="1" dirty="0">
                 <a:solidFill>
                   <a:srgbClr val="000000"/>
                 </a:solidFill>
@@ -6332,14 +6455,11 @@
                 <a:ea typeface="Arial" pitchFamily="34" charset="-122"/>
                 <a:cs typeface="Arial" pitchFamily="34" charset="-120"/>
               </a:rPr>
-              <a:t>Carry this week in one sentence:
+              <a:t>This week in one sentence:
 </a:t>
             </a:r>
-            <a:pPr algn="l" indent="0" marL="0">
-              <a:buNone/>
-            </a:pPr>
-            <a:r>
-              <a:rPr lang="en-US" sz="1600" b="1" i="1" dirty="0">
+            <a:r>
+              <a:rPr lang="en-US" sz="2000" b="1" i="1" dirty="0">
                 <a:solidFill>
                   <a:srgbClr val="1F497D"/>
                 </a:solidFill>
@@ -6349,7 +6469,7 @@
               </a:rPr>
               <a:t>Gifting is given to the whole body; authority is conferred by the apostolic word. Deposit, not discovery.</a:t>
             </a:r>
-            <a:endParaRPr lang="en-US" sz="1600" dirty="0"/>
+            <a:endParaRPr lang="en-US" sz="2000" dirty="0"/>
           </a:p>
         </p:txBody>
       </p:sp>
@@ -6374,11 +6494,11 @@
           <a:bodyPr wrap="square" lIns="0" tIns="0" rIns="0" bIns="0" rtlCol="0" anchor="t"/>
           <a:lstStyle/>
           <a:p>
-            <a:pPr algn="ctr" indent="0" marL="0">
+            <a:pPr marL="0" indent="0" algn="ctr">
               <a:buNone/>
             </a:pPr>
             <a:r>
-              <a:rPr lang="en-US" sz="1700" b="1" i="1" dirty="0">
+              <a:rPr lang="en-US" sz="2000" b="1" i="1" dirty="0">
                 <a:solidFill>
                   <a:srgbClr val="1F497D"/>
                 </a:solidFill>
@@ -6386,9 +6506,25 @@
                 <a:ea typeface="Arial" pitchFamily="34" charset="-122"/>
                 <a:cs typeface="Arial" pitchFamily="34" charset="-120"/>
               </a:rPr>
-              <a:t>“what I write to you is the Lord’s command.”  (1 Corinthians 14:37)</a:t>
-            </a:r>
-            <a:endParaRPr lang="en-US" sz="1600" dirty="0"/>
+              <a:t>“what I write to you is the Lord’s command.”  </a:t>
+            </a:r>
+          </a:p>
+          <a:p>
+            <a:pPr marL="0" indent="0" algn="ctr">
+              <a:buNone/>
+            </a:pPr>
+            <a:r>
+              <a:rPr lang="en-US" sz="2000" b="1" i="1" dirty="0">
+                <a:solidFill>
+                  <a:srgbClr val="1F497D"/>
+                </a:solidFill>
+                <a:latin typeface="Arial" pitchFamily="34" charset="0"/>
+                <a:ea typeface="Arial" pitchFamily="34" charset="-122"/>
+                <a:cs typeface="Arial" pitchFamily="34" charset="-120"/>
+              </a:rPr>
+              <a:t>(1 Corinthians 14:37)</a:t>
+            </a:r>
+            <a:endParaRPr lang="en-US" sz="2000" dirty="0"/>
           </a:p>
         </p:txBody>
       </p:sp>
@@ -6413,18 +6549,18 @@
           <a:bodyPr wrap="square" lIns="0" tIns="0" rIns="0" bIns="0" rtlCol="0" anchor="t"/>
           <a:lstStyle/>
           <a:p>
-            <a:pPr algn="ctr" indent="0" marL="0">
+            <a:pPr marL="0" indent="0" algn="ctr">
               <a:buNone/>
             </a:pPr>
             <a:r>
-              <a:rPr lang="en-US" sz="1300" b="1" u="sng" dirty="0">
+              <a:rPr lang="en-US" sz="2000" b="1" u="sng" dirty="0">
                 <a:solidFill>
                   <a:srgbClr val="4F81BD"/>
                 </a:solidFill>
                 <a:latin typeface="Arial" pitchFamily="34" charset="0"/>
                 <a:ea typeface="Arial" pitchFamily="34" charset="-122"/>
                 <a:cs typeface="Arial" pitchFamily="34" charset="-120"/>
-                <a:hlinkClick r:id="rId1" invalidUrl="" action="" tgtFrame="" tooltip="" history="1" highlightClick="0" endSnd="0">
+                <a:hlinkClick r:id="rId3">
                   <a:extLst>
                     <a:ext uri="{A12FA001-AC4F-418D-AE19-62706E023703}">
                       <ahyp:hlinkClr xmlns:ahyp="http://schemas.microsoft.com/office/drawing/2018/hyperlinkcolor" val="tx"/>
@@ -6432,9 +6568,38 @@
                   </a:extLst>
                 </a:hlinkClick>
               </a:rPr>
-              <a:t>https://tinyurl.com/TeachTheWord</a:t>
-            </a:r>
-            <a:endParaRPr lang="en-US" sz="1600" dirty="0"/>
+              <a:t>https://</a:t>
+            </a:r>
+            <a:r>
+              <a:rPr lang="en-US" sz="2000" b="1" u="sng" dirty="0" err="1">
+                <a:solidFill>
+                  <a:srgbClr val="4F81BD"/>
+                </a:solidFill>
+                <a:latin typeface="Arial" pitchFamily="34" charset="0"/>
+                <a:ea typeface="Arial" pitchFamily="34" charset="-122"/>
+                <a:cs typeface="Arial" pitchFamily="34" charset="-120"/>
+                <a:hlinkClick r:id="rId3">
+                  <a:extLst>
+                    <a:ext uri="{A12FA001-AC4F-418D-AE19-62706E023703}">
+                      <ahyp:hlinkClr xmlns:ahyp="http://schemas.microsoft.com/office/drawing/2018/hyperlinkcolor" val="tx"/>
+                    </a:ext>
+                  </a:extLst>
+                </a:hlinkClick>
+              </a:rPr>
+              <a:t>TeachTheWord</a:t>
+            </a:r>
+            <a:r>
+              <a:rPr lang="en-US" sz="2000" b="1" u="sng" dirty="0" err="1">
+                <a:solidFill>
+                  <a:srgbClr val="4F81BD"/>
+                </a:solidFill>
+                <a:latin typeface="Arial" pitchFamily="34" charset="0"/>
+                <a:ea typeface="Arial" pitchFamily="34" charset="-122"/>
+                <a:cs typeface="Arial" pitchFamily="34" charset="-120"/>
+              </a:rPr>
+              <a:t>.Church</a:t>
+            </a:r>
+            <a:endParaRPr lang="en-US" sz="2800" dirty="0"/>
           </a:p>
         </p:txBody>
       </p:sp>
@@ -6452,26 +6617,26 @@
               <p:cTn id="2" dur="indefinite" nodeType="mainSeq">
                 <p:childTnLst>
                   <p:par>
-                    <p:cTn id="7" fill="hold">
+                    <p:cTn id="3" fill="hold">
                       <p:stCondLst>
                         <p:cond delay="indefinite"/>
                       </p:stCondLst>
                       <p:childTnLst>
                         <p:par>
-                          <p:cTn id="8" fill="hold">
+                          <p:cTn id="4" fill="hold">
                             <p:stCondLst>
                               <p:cond delay="0"/>
                             </p:stCondLst>
                             <p:childTnLst>
                               <p:par>
-                                <p:cTn id="3" presetID="42" presetClass="entr" presetSubtype="0" fill="hold" grpId="0" nodeType="clickEffect">
+                                <p:cTn id="5" presetID="42" presetClass="entr" presetSubtype="0" fill="hold" nodeType="clickEffect">
                                   <p:stCondLst>
                                     <p:cond delay="0"/>
                                   </p:stCondLst>
                                   <p:childTnLst>
                                     <p:set>
                                       <p:cBhvr>
-                                        <p:cTn id="4" dur="1" fill="hold">
+                                        <p:cTn id="6" dur="1" fill="hold">
                                           <p:stCondLst>
                                             <p:cond delay="0"/>
                                           </p:stCondLst>
@@ -6489,7 +6654,7 @@
                                     </p:set>
                                     <p:animEffect transition="in" filter="fade">
                                       <p:cBhvr>
-                                        <p:cTn id="5" dur="1000"/>
+                                        <p:cTn id="7" dur="1000"/>
                                         <p:tgtEl>
                                           <p:spTgt spid="4"/>
                                         </p:tgtEl>
@@ -6497,7 +6662,7 @@
                                     </p:animEffect>
                                     <p:anim calcmode="lin" valueType="num">
                                       <p:cBhvr>
-                                        <p:cTn id="6" dur="1000" fill="hold"/>
+                                        <p:cTn id="8" dur="1000" fill="hold"/>
                                         <p:tgtEl>
                                           <p:spTgt spid="4"/>
                                         </p:tgtEl>
@@ -6528,26 +6693,26 @@
                     </p:cTn>
                   </p:par>
                   <p:par>
-                    <p:cTn id="13" fill="hold">
+                    <p:cTn id="9" fill="hold">
                       <p:stCondLst>
                         <p:cond delay="indefinite"/>
                       </p:stCondLst>
                       <p:childTnLst>
                         <p:par>
-                          <p:cTn id="14" fill="hold">
+                          <p:cTn id="10" fill="hold">
                             <p:stCondLst>
                               <p:cond delay="0"/>
                             </p:stCondLst>
                             <p:childTnLst>
                               <p:par>
-                                <p:cTn id="9" presetID="42" presetClass="entr" presetSubtype="0" fill="hold" grpId="0" nodeType="clickEffect">
+                                <p:cTn id="11" presetID="42" presetClass="entr" presetSubtype="0" fill="hold" nodeType="clickEffect">
                                   <p:stCondLst>
                                     <p:cond delay="0"/>
                                   </p:stCondLst>
                                   <p:childTnLst>
                                     <p:set>
                                       <p:cBhvr>
-                                        <p:cTn id="10" dur="1" fill="hold">
+                                        <p:cTn id="12" dur="1" fill="hold">
                                           <p:stCondLst>
                                             <p:cond delay="0"/>
                                           </p:stCondLst>
@@ -6565,7 +6730,7 @@
                                     </p:set>
                                     <p:animEffect transition="in" filter="fade">
                                       <p:cBhvr>
-                                        <p:cTn id="11" dur="1000"/>
+                                        <p:cTn id="13" dur="1000"/>
                                         <p:tgtEl>
                                           <p:spTgt spid="5"/>
                                         </p:tgtEl>
@@ -6573,7 +6738,7 @@
                                     </p:animEffect>
                                     <p:anim calcmode="lin" valueType="num">
                                       <p:cBhvr>
-                                        <p:cTn id="12" dur="1000" fill="hold"/>
+                                        <p:cTn id="14" dur="1000" fill="hold"/>
                                         <p:tgtEl>
                                           <p:spTgt spid="5"/>
                                         </p:tgtEl>
@@ -6604,26 +6769,26 @@
                     </p:cTn>
                   </p:par>
                   <p:par>
-                    <p:cTn id="19" fill="hold">
+                    <p:cTn id="15" fill="hold">
                       <p:stCondLst>
                         <p:cond delay="indefinite"/>
                       </p:stCondLst>
                       <p:childTnLst>
                         <p:par>
-                          <p:cTn id="20" fill="hold">
+                          <p:cTn id="16" fill="hold">
                             <p:stCondLst>
                               <p:cond delay="0"/>
                             </p:stCondLst>
                             <p:childTnLst>
                               <p:par>
-                                <p:cTn id="15" presetID="42" presetClass="entr" presetSubtype="0" fill="hold" grpId="0" nodeType="clickEffect">
+                                <p:cTn id="17" presetID="42" presetClass="entr" presetSubtype="0" fill="hold" nodeType="clickEffect">
                                   <p:stCondLst>
                                     <p:cond delay="0"/>
                                   </p:stCondLst>
                                   <p:childTnLst>
                                     <p:set>
                                       <p:cBhvr>
-                                        <p:cTn id="16" dur="1" fill="hold">
+                                        <p:cTn id="18" dur="1" fill="hold">
                                           <p:stCondLst>
                                             <p:cond delay="0"/>
                                           </p:stCondLst>
@@ -6641,7 +6806,7 @@
                                     </p:set>
                                     <p:animEffect transition="in" filter="fade">
                                       <p:cBhvr>
-                                        <p:cTn id="17" dur="1000"/>
+                                        <p:cTn id="19" dur="1000"/>
                                         <p:tgtEl>
                                           <p:spTgt spid="6"/>
                                         </p:tgtEl>
@@ -6649,7 +6814,7 @@
                                     </p:animEffect>
                                     <p:anim calcmode="lin" valueType="num">
                                       <p:cBhvr>
-                                        <p:cTn id="18" dur="1000" fill="hold"/>
+                                        <p:cTn id="20" dur="1000" fill="hold"/>
                                         <p:tgtEl>
                                           <p:spTgt spid="6"/>
                                         </p:tgtEl>
@@ -6680,26 +6845,26 @@
                     </p:cTn>
                   </p:par>
                   <p:par>
-                    <p:cTn id="25" fill="hold">
+                    <p:cTn id="21" fill="hold">
                       <p:stCondLst>
                         <p:cond delay="indefinite"/>
                       </p:stCondLst>
                       <p:childTnLst>
                         <p:par>
-                          <p:cTn id="26" fill="hold">
+                          <p:cTn id="22" fill="hold">
                             <p:stCondLst>
                               <p:cond delay="0"/>
                             </p:stCondLst>
                             <p:childTnLst>
                               <p:par>
-                                <p:cTn id="21" presetID="42" presetClass="entr" presetSubtype="0" fill="hold" grpId="0" nodeType="clickEffect">
+                                <p:cTn id="23" presetID="42" presetClass="entr" presetSubtype="0" fill="hold" nodeType="clickEffect">
                                   <p:stCondLst>
                                     <p:cond delay="0"/>
                                   </p:stCondLst>
                                   <p:childTnLst>
                                     <p:set>
                                       <p:cBhvr>
-                                        <p:cTn id="22" dur="1" fill="hold">
+                                        <p:cTn id="24" dur="1" fill="hold">
                                           <p:stCondLst>
                                             <p:cond delay="0"/>
                                           </p:stCondLst>
@@ -6717,7 +6882,7 @@
                                     </p:set>
                                     <p:animEffect transition="in" filter="fade">
                                       <p:cBhvr>
-                                        <p:cTn id="23" dur="1000"/>
+                                        <p:cTn id="25" dur="1000"/>
                                         <p:tgtEl>
                                           <p:spTgt spid="7"/>
                                         </p:tgtEl>
@@ -6725,7 +6890,7 @@
                                     </p:animEffect>
                                     <p:anim calcmode="lin" valueType="num">
                                       <p:cBhvr>
-                                        <p:cTn id="24" dur="1000" fill="hold"/>
+                                        <p:cTn id="26" dur="1000" fill="hold"/>
                                         <p:tgtEl>
                                           <p:spTgt spid="7"/>
                                         </p:tgtEl>
@@ -7073,4 +7238,319 @@
     </a:ext>
   </a:extLst>
 </a:theme>
+</file>
+
+<file path=ppt/theme/theme2.xml><?xml version="1.0" encoding="utf-8"?>
+<a:theme xmlns:a="http://schemas.openxmlformats.org/drawingml/2006/main" name="Office Theme">
+  <a:themeElements>
+    <a:clrScheme name="Office">
+      <a:dk1>
+        <a:sysClr val="windowText" lastClr="000000"/>
+      </a:dk1>
+      <a:lt1>
+        <a:sysClr val="window" lastClr="FFFFFF"/>
+      </a:lt1>
+      <a:dk2>
+        <a:srgbClr val="0E2841"/>
+      </a:dk2>
+      <a:lt2>
+        <a:srgbClr val="E8E8E8"/>
+      </a:lt2>
+      <a:accent1>
+        <a:srgbClr val="156082"/>
+      </a:accent1>
+      <a:accent2>
+        <a:srgbClr val="E97132"/>
+      </a:accent2>
+      <a:accent3>
+        <a:srgbClr val="196B24"/>
+      </a:accent3>
+      <a:accent4>
+        <a:srgbClr val="0F9ED5"/>
+      </a:accent4>
+      <a:accent5>
+        <a:srgbClr val="A02B93"/>
+      </a:accent5>
+      <a:accent6>
+        <a:srgbClr val="4EA72E"/>
+      </a:accent6>
+      <a:hlink>
+        <a:srgbClr val="467886"/>
+      </a:hlink>
+      <a:folHlink>
+        <a:srgbClr val="96607D"/>
+      </a:folHlink>
+    </a:clrScheme>
+    <a:fontScheme name="Office">
+      <a:majorFont>
+        <a:latin typeface="Aptos Display" panose="02110004020202020204"/>
+        <a:ea typeface=""/>
+        <a:cs typeface=""/>
+        <a:font script="Jpan" typeface="游ゴシック Light"/>
+        <a:font script="Hang" typeface="맑은 고딕"/>
+        <a:font script="Hans" typeface="等线 Light"/>
+        <a:font script="Hant" typeface="新細明體"/>
+        <a:font script="Arab" typeface="Times New Roman"/>
+        <a:font script="Hebr" typeface="Times New Roman"/>
+        <a:font script="Thai" typeface="Angsana New"/>
+        <a:font script="Ethi" typeface="Nyala"/>
+        <a:font script="Beng" typeface="Vrinda"/>
+        <a:font script="Gujr" typeface="Shruti"/>
+        <a:font script="Khmr" typeface="MoolBoran"/>
+        <a:font script="Knda" typeface="Tunga"/>
+        <a:font script="Guru" typeface="Raavi"/>
+        <a:font script="Cans" typeface="Euphemia"/>
+        <a:font script="Cher" typeface="Plantagenet Cherokee"/>
+        <a:font script="Yiii" typeface="Microsoft Yi Baiti"/>
+        <a:font script="Tibt" typeface="Microsoft Himalaya"/>
+        <a:font script="Thaa" typeface="MV Boli"/>
+        <a:font script="Deva" typeface="Mangal"/>
+        <a:font script="Telu" typeface="Gautami"/>
+        <a:font script="Taml" typeface="Latha"/>
+        <a:font script="Syrc" typeface="Estrangelo Edessa"/>
+        <a:font script="Orya" typeface="Kalinga"/>
+        <a:font script="Mlym" typeface="Kartika"/>
+        <a:font script="Laoo" typeface="DokChampa"/>
+        <a:font script="Sinh" typeface="Iskoola Pota"/>
+        <a:font script="Mong" typeface="Mongolian Baiti"/>
+        <a:font script="Viet" typeface="Times New Roman"/>
+        <a:font script="Uigh" typeface="Microsoft Uighur"/>
+        <a:font script="Geor" typeface="Sylfaen"/>
+        <a:font script="Armn" typeface="Arial"/>
+        <a:font script="Bugi" typeface="Leelawadee UI"/>
+        <a:font script="Bopo" typeface="Microsoft JhengHei"/>
+        <a:font script="Java" typeface="Javanese Text"/>
+        <a:font script="Lisu" typeface="Segoe UI"/>
+        <a:font script="Mymr" typeface="Myanmar Text"/>
+        <a:font script="Nkoo" typeface="Ebrima"/>
+        <a:font script="Olck" typeface="Nirmala UI"/>
+        <a:font script="Osma" typeface="Ebrima"/>
+        <a:font script="Phag" typeface="Phagspa"/>
+        <a:font script="Syrn" typeface="Estrangelo Edessa"/>
+        <a:font script="Syrj" typeface="Estrangelo Edessa"/>
+        <a:font script="Syre" typeface="Estrangelo Edessa"/>
+        <a:font script="Sora" typeface="Nirmala UI"/>
+        <a:font script="Tale" typeface="Microsoft Tai Le"/>
+        <a:font script="Talu" typeface="Microsoft New Tai Lue"/>
+        <a:font script="Tfng" typeface="Ebrima"/>
+      </a:majorFont>
+      <a:minorFont>
+        <a:latin typeface="Aptos" panose="02110004020202020204"/>
+        <a:ea typeface=""/>
+        <a:cs typeface=""/>
+        <a:font script="Jpan" typeface="游ゴシック"/>
+        <a:font script="Hang" typeface="맑은 고딕"/>
+        <a:font script="Hans" typeface="等线"/>
+        <a:font script="Hant" typeface="新細明體"/>
+        <a:font script="Arab" typeface="Arial"/>
+        <a:font script="Hebr" typeface="Arial"/>
+        <a:font script="Thai" typeface="Cordia New"/>
+        <a:font script="Ethi" typeface="Nyala"/>
+        <a:font script="Beng" typeface="Vrinda"/>
+        <a:font script="Gujr" typeface="Shruti"/>
+        <a:font script="Khmr" typeface="DaunPenh"/>
+        <a:font script="Knda" typeface="Tunga"/>
+        <a:font script="Guru" typeface="Raavi"/>
+        <a:font script="Cans" typeface="Euphemia"/>
+        <a:font script="Cher" typeface="Plantagenet Cherokee"/>
+        <a:font script="Yiii" typeface="Microsoft Yi Baiti"/>
+        <a:font script="Tibt" typeface="Microsoft Himalaya"/>
+        <a:font script="Thaa" typeface="MV Boli"/>
+        <a:font script="Deva" typeface="Mangal"/>
+        <a:font script="Telu" typeface="Gautami"/>
+        <a:font script="Taml" typeface="Latha"/>
+        <a:font script="Syrc" typeface="Estrangelo Edessa"/>
+        <a:font script="Orya" typeface="Kalinga"/>
+        <a:font script="Mlym" typeface="Kartika"/>
+        <a:font script="Laoo" typeface="DokChampa"/>
+        <a:font script="Sinh" typeface="Iskoola Pota"/>
+        <a:font script="Mong" typeface="Mongolian Baiti"/>
+        <a:font script="Viet" typeface="Arial"/>
+        <a:font script="Uigh" typeface="Microsoft Uighur"/>
+        <a:font script="Geor" typeface="Sylfaen"/>
+        <a:font script="Armn" typeface="Arial"/>
+        <a:font script="Bugi" typeface="Leelawadee UI"/>
+        <a:font script="Bopo" typeface="Microsoft JhengHei"/>
+        <a:font script="Java" typeface="Javanese Text"/>
+        <a:font script="Lisu" typeface="Segoe UI"/>
+        <a:font script="Mymr" typeface="Myanmar Text"/>
+        <a:font script="Nkoo" typeface="Ebrima"/>
+        <a:font script="Olck" typeface="Nirmala UI"/>
+        <a:font script="Osma" typeface="Ebrima"/>
+        <a:font script="Phag" typeface="Phagspa"/>
+        <a:font script="Syrn" typeface="Estrangelo Edessa"/>
+        <a:font script="Syrj" typeface="Estrangelo Edessa"/>
+        <a:font script="Syre" typeface="Estrangelo Edessa"/>
+        <a:font script="Sora" typeface="Nirmala UI"/>
+        <a:font script="Tale" typeface="Microsoft Tai Le"/>
+        <a:font script="Talu" typeface="Microsoft New Tai Lue"/>
+        <a:font script="Tfng" typeface="Ebrima"/>
+      </a:minorFont>
+    </a:fontScheme>
+    <a:fmtScheme name="Office">
+      <a:fillStyleLst>
+        <a:solidFill>
+          <a:schemeClr val="phClr"/>
+        </a:solidFill>
+        <a:gradFill rotWithShape="1">
+          <a:gsLst>
+            <a:gs pos="0">
+              <a:schemeClr val="phClr">
+                <a:lumMod val="110000"/>
+                <a:satMod val="105000"/>
+                <a:tint val="67000"/>
+              </a:schemeClr>
+            </a:gs>
+            <a:gs pos="50000">
+              <a:schemeClr val="phClr">
+                <a:lumMod val="105000"/>
+                <a:satMod val="103000"/>
+                <a:tint val="73000"/>
+              </a:schemeClr>
+            </a:gs>
+            <a:gs pos="100000">
+              <a:schemeClr val="phClr">
+                <a:lumMod val="105000"/>
+                <a:satMod val="109000"/>
+                <a:tint val="81000"/>
+              </a:schemeClr>
+            </a:gs>
+          </a:gsLst>
+          <a:lin ang="5400000" scaled="0"/>
+        </a:gradFill>
+        <a:gradFill rotWithShape="1">
+          <a:gsLst>
+            <a:gs pos="0">
+              <a:schemeClr val="phClr">
+                <a:satMod val="103000"/>
+                <a:lumMod val="102000"/>
+                <a:tint val="94000"/>
+              </a:schemeClr>
+            </a:gs>
+            <a:gs pos="50000">
+              <a:schemeClr val="phClr">
+                <a:satMod val="110000"/>
+                <a:lumMod val="100000"/>
+                <a:shade val="100000"/>
+              </a:schemeClr>
+            </a:gs>
+            <a:gs pos="100000">
+              <a:schemeClr val="phClr">
+                <a:lumMod val="99000"/>
+                <a:satMod val="120000"/>
+                <a:shade val="78000"/>
+              </a:schemeClr>
+            </a:gs>
+          </a:gsLst>
+          <a:lin ang="5400000" scaled="0"/>
+        </a:gradFill>
+      </a:fillStyleLst>
+      <a:lnStyleLst>
+        <a:ln w="12700" cap="flat" cmpd="sng" algn="ctr">
+          <a:solidFill>
+            <a:schemeClr val="phClr"/>
+          </a:solidFill>
+          <a:prstDash val="solid"/>
+          <a:miter lim="800000"/>
+        </a:ln>
+        <a:ln w="19050" cap="flat" cmpd="sng" algn="ctr">
+          <a:solidFill>
+            <a:schemeClr val="phClr"/>
+          </a:solidFill>
+          <a:prstDash val="solid"/>
+          <a:miter lim="800000"/>
+        </a:ln>
+        <a:ln w="25400" cap="flat" cmpd="sng" algn="ctr">
+          <a:solidFill>
+            <a:schemeClr val="phClr"/>
+          </a:solidFill>
+          <a:prstDash val="solid"/>
+          <a:miter lim="800000"/>
+        </a:ln>
+      </a:lnStyleLst>
+      <a:effectStyleLst>
+        <a:effectStyle>
+          <a:effectLst/>
+        </a:effectStyle>
+        <a:effectStyle>
+          <a:effectLst/>
+        </a:effectStyle>
+        <a:effectStyle>
+          <a:effectLst>
+            <a:outerShdw blurRad="57150" dist="19050" dir="5400000" algn="ctr" rotWithShape="0">
+              <a:srgbClr val="000000">
+                <a:alpha val="63000"/>
+              </a:srgbClr>
+            </a:outerShdw>
+          </a:effectLst>
+        </a:effectStyle>
+      </a:effectStyleLst>
+      <a:bgFillStyleLst>
+        <a:solidFill>
+          <a:schemeClr val="phClr"/>
+        </a:solidFill>
+        <a:solidFill>
+          <a:schemeClr val="phClr">
+            <a:tint val="95000"/>
+            <a:satMod val="170000"/>
+          </a:schemeClr>
+        </a:solidFill>
+        <a:gradFill rotWithShape="1">
+          <a:gsLst>
+            <a:gs pos="0">
+              <a:schemeClr val="phClr">
+                <a:tint val="93000"/>
+                <a:satMod val="150000"/>
+                <a:shade val="98000"/>
+                <a:lumMod val="102000"/>
+              </a:schemeClr>
+            </a:gs>
+            <a:gs pos="50000">
+              <a:schemeClr val="phClr">
+                <a:tint val="98000"/>
+                <a:satMod val="130000"/>
+                <a:shade val="90000"/>
+                <a:lumMod val="103000"/>
+              </a:schemeClr>
+            </a:gs>
+            <a:gs pos="100000">
+              <a:schemeClr val="phClr">
+                <a:shade val="63000"/>
+                <a:satMod val="120000"/>
+              </a:schemeClr>
+            </a:gs>
+          </a:gsLst>
+          <a:lin ang="5400000" scaled="0"/>
+        </a:gradFill>
+      </a:bgFillStyleLst>
+    </a:fmtScheme>
+  </a:themeElements>
+  <a:objectDefaults>
+    <a:lnDef>
+      <a:spPr/>
+      <a:bodyPr/>
+      <a:lstStyle/>
+      <a:style>
+        <a:lnRef idx="2">
+          <a:schemeClr val="accent1"/>
+        </a:lnRef>
+        <a:fillRef idx="0">
+          <a:schemeClr val="accent1"/>
+        </a:fillRef>
+        <a:effectRef idx="1">
+          <a:schemeClr val="accent1"/>
+        </a:effectRef>
+        <a:fontRef idx="minor">
+          <a:schemeClr val="tx1"/>
+        </a:fontRef>
+      </a:style>
+    </a:lnDef>
+  </a:objectDefaults>
+  <a:extraClrSchemeLst/>
+  <a:extLst>
+    <a:ext uri="{05A4C25C-085E-4340-85A3-A5531E510DB2}">
+      <thm15:themeFamily xmlns:thm15="http://schemas.microsoft.com/office/thememl/2012/main" name="Office Theme" id="{2E142A2C-CD16-42D6-873A-C26D2A0506FA}" vid="{1BDDFF52-6CD6-40A5-AB3C-68EB2F1E4D0A}"/>
+    </a:ext>
+  </a:extLst>
+</a:theme>
 </file>